--- a/presentation/TVS_Credit_EPIC_8_Round2_Submission.pptx
+++ b/presentation/TVS_Credit_EPIC_8_Round2_Submission.pptx
@@ -5,14 +5,14 @@
     <p:sldMasterId id="2147483648" r:id="rId1"/>
   </p:sldMasterIdLst>
   <p:sldIdLst>
-    <p:sldId id="256" r:id="rId6"/>
-    <p:sldId id="257" r:id="rId7"/>
-    <p:sldId id="258" r:id="rId8"/>
-    <p:sldId id="259" r:id="rId9"/>
-    <p:sldId id="260" r:id="rId10"/>
-    <p:sldId id="261" r:id="rId11"/>
-    <p:sldId id="262" r:id="rId12"/>
-    <p:sldId id="263" r:id="rId13"/>
+    <p:sldId id="256" r:id="rId2"/>
+    <p:sldId id="257" r:id="rId3"/>
+    <p:sldId id="258" r:id="rId4"/>
+    <p:sldId id="259" r:id="rId5"/>
+    <p:sldId id="260" r:id="rId6"/>
+    <p:sldId id="261" r:id="rId7"/>
+    <p:sldId id="262" r:id="rId8"/>
+    <p:sldId id="263" r:id="rId9"/>
   </p:sldIdLst>
   <p:sldSz cx="10693400" cy="7556500"/>
   <p:notesSz cx="10693400" cy="7556500"/>
@@ -21,11 +21,27 @@
       <a:defRPr kern="0"/>
     </a:defPPr>
   </p:defaultTextStyle>
+  <p:extLst>
+    <p:ext uri="{EFAFB233-063F-42B5-8137-9DF3F51BA10A}">
+      <p15:sldGuideLst xmlns:p15="http://schemas.microsoft.com/office/powerpoint/2012/main">
+        <p15:guide id="1" orient="horz" pos="2880">
+          <p15:clr>
+            <a:srgbClr val="A4A3A4"/>
+          </p15:clr>
+        </p15:guide>
+        <p15:guide id="2" pos="2160">
+          <p15:clr>
+            <a:srgbClr val="A4A3A4"/>
+          </p15:clr>
+        </p15:guide>
+      </p15:sldGuideLst>
+    </p:ext>
+  </p:extLst>
 </p:presentation>
 </file>
 
 <file path=ppt/slideLayouts/slideLayout1.xml><?xml version="1.0" encoding="utf-8"?>
-<p:sldLayout xmlns:a="http://schemas.openxmlformats.org/drawingml/2006/main" xmlns:r="http://schemas.openxmlformats.org/officeDocument/2006/relationships" xmlns:p="http://schemas.openxmlformats.org/presentationml/2006/main" preserve="1" type="obj">
+<p:sldLayout xmlns:a="http://schemas.openxmlformats.org/drawingml/2006/main" xmlns:r="http://schemas.openxmlformats.org/officeDocument/2006/relationships" xmlns:p="http://schemas.openxmlformats.org/presentationml/2006/main" type="obj" preserve="1">
   <p:cSld name="Title Slide">
     <p:spTree>
       <p:nvGrpSpPr>
@@ -69,7 +85,9 @@
               <a:defRPr/>
             </a:lvl1pPr>
           </a:lstStyle>
-          <a:p/>
+          <a:p>
+            <a:endParaRPr/>
+          </a:p>
         </p:txBody>
       </p:sp>
       <p:sp>
@@ -100,7 +118,9 @@
               <a:defRPr/>
             </a:lvl1pPr>
           </a:lstStyle>
-          <a:p/>
+          <a:p>
+            <a:endParaRPr/>
+          </a:p>
         </p:txBody>
       </p:sp>
       <p:sp>
@@ -110,7 +130,7 @@
             <a:spLocks noGrp="1"/>
           </p:cNvSpPr>
           <p:nvPr>
-            <p:ph type="ftr" idx="5" sz="quarter"/>
+            <p:ph type="ftr" sz="quarter" idx="5"/>
           </p:nvPr>
         </p:nvSpPr>
         <p:spPr/>
@@ -127,7 +147,9 @@
               </a:defRPr>
             </a:lvl1pPr>
           </a:lstStyle>
-          <a:p/>
+          <a:p>
+            <a:endParaRPr/>
+          </a:p>
         </p:txBody>
       </p:sp>
       <p:sp>
@@ -137,7 +159,7 @@
             <a:spLocks noGrp="1"/>
           </p:cNvSpPr>
           <p:nvPr>
-            <p:ph type="dt" idx="6" sz="half"/>
+            <p:ph type="dt" sz="half" idx="6"/>
           </p:nvPr>
         </p:nvSpPr>
         <p:spPr/>
@@ -157,7 +179,9 @@
           <a:p>
             <a:fld id="{1D8BD707-D9CF-40AE-B4C6-C98DA3205C09}" type="datetimeFigureOut">
               <a:rPr lang="en-US"/>
+              <a:t>9/6/2026</a:t>
             </a:fld>
+            <a:endParaRPr lang="en-US"/>
           </a:p>
         </p:txBody>
       </p:sp>
@@ -168,7 +192,7 @@
             <a:spLocks noGrp="1"/>
           </p:cNvSpPr>
           <p:nvPr>
-            <p:ph type="sldNum" idx="7" sz="quarter"/>
+            <p:ph type="sldNum" sz="quarter" idx="7"/>
           </p:nvPr>
         </p:nvSpPr>
         <p:spPr/>
@@ -187,8 +211,9 @@
           </a:lstStyle>
           <a:p>
             <a:fld id="{B6F15528-21DE-4FAA-801E-634DDDAF4B2B}" type="slidenum">
-              <a:t>#</a:t>
+              <a:t>‹#›</a:t>
             </a:fld>
+            <a:endParaRPr/>
           </a:p>
         </p:txBody>
       </p:sp>
@@ -201,7 +226,7 @@
 </file>
 
 <file path=ppt/slideLayouts/slideLayout2.xml><?xml version="1.0" encoding="utf-8"?>
-<p:sldLayout xmlns:a="http://schemas.openxmlformats.org/drawingml/2006/main" xmlns:r="http://schemas.openxmlformats.org/officeDocument/2006/relationships" xmlns:p="http://schemas.openxmlformats.org/presentationml/2006/main" preserve="1" type="obj">
+<p:sldLayout xmlns:a="http://schemas.openxmlformats.org/drawingml/2006/main" xmlns:r="http://schemas.openxmlformats.org/officeDocument/2006/relationships" xmlns:p="http://schemas.openxmlformats.org/presentationml/2006/main" type="obj" preserve="1">
   <p:cSld name="Title and Content">
     <p:spTree>
       <p:nvGrpSpPr>
@@ -235,7 +260,9 @@
               <a:defRPr/>
             </a:lvl1pPr>
           </a:lstStyle>
-          <a:p/>
+          <a:p>
+            <a:endParaRPr/>
+          </a:p>
         </p:txBody>
       </p:sp>
       <p:sp>
@@ -256,7 +283,9 @@
               <a:defRPr/>
             </a:lvl1pPr>
           </a:lstStyle>
-          <a:p/>
+          <a:p>
+            <a:endParaRPr/>
+          </a:p>
         </p:txBody>
       </p:sp>
       <p:sp>
@@ -266,7 +295,7 @@
             <a:spLocks noGrp="1"/>
           </p:cNvSpPr>
           <p:nvPr>
-            <p:ph type="ftr" idx="5" sz="quarter"/>
+            <p:ph type="ftr" sz="quarter" idx="5"/>
           </p:nvPr>
         </p:nvSpPr>
         <p:spPr/>
@@ -283,7 +312,9 @@
               </a:defRPr>
             </a:lvl1pPr>
           </a:lstStyle>
-          <a:p/>
+          <a:p>
+            <a:endParaRPr/>
+          </a:p>
         </p:txBody>
       </p:sp>
       <p:sp>
@@ -293,7 +324,7 @@
             <a:spLocks noGrp="1"/>
           </p:cNvSpPr>
           <p:nvPr>
-            <p:ph type="dt" idx="6" sz="half"/>
+            <p:ph type="dt" sz="half" idx="6"/>
           </p:nvPr>
         </p:nvSpPr>
         <p:spPr/>
@@ -313,7 +344,9 @@
           <a:p>
             <a:fld id="{1D8BD707-D9CF-40AE-B4C6-C98DA3205C09}" type="datetimeFigureOut">
               <a:rPr lang="en-US"/>
+              <a:t>9/6/2026</a:t>
             </a:fld>
+            <a:endParaRPr lang="en-US"/>
           </a:p>
         </p:txBody>
       </p:sp>
@@ -324,7 +357,7 @@
             <a:spLocks noGrp="1"/>
           </p:cNvSpPr>
           <p:nvPr>
-            <p:ph type="sldNum" idx="7" sz="quarter"/>
+            <p:ph type="sldNum" sz="quarter" idx="7"/>
           </p:nvPr>
         </p:nvSpPr>
         <p:spPr/>
@@ -343,8 +376,9 @@
           </a:lstStyle>
           <a:p>
             <a:fld id="{B6F15528-21DE-4FAA-801E-634DDDAF4B2B}" type="slidenum">
-              <a:t>#</a:t>
+              <a:t>‹#›</a:t>
             </a:fld>
+            <a:endParaRPr/>
           </a:p>
         </p:txBody>
       </p:sp>
@@ -357,7 +391,7 @@
 </file>
 
 <file path=ppt/slideLayouts/slideLayout3.xml><?xml version="1.0" encoding="utf-8"?>
-<p:sldLayout xmlns:a="http://schemas.openxmlformats.org/drawingml/2006/main" xmlns:r="http://schemas.openxmlformats.org/officeDocument/2006/relationships" xmlns:p="http://schemas.openxmlformats.org/presentationml/2006/main" preserve="1" type="obj">
+<p:sldLayout xmlns:a="http://schemas.openxmlformats.org/drawingml/2006/main" xmlns:r="http://schemas.openxmlformats.org/officeDocument/2006/relationships" xmlns:p="http://schemas.openxmlformats.org/presentationml/2006/main" type="obj" preserve="1">
   <p:cSld name="Two Content">
     <p:spTree>
       <p:nvGrpSpPr>
@@ -391,7 +425,9 @@
               <a:defRPr/>
             </a:lvl1pPr>
           </a:lstStyle>
-          <a:p/>
+          <a:p>
+            <a:endParaRPr/>
+          </a:p>
         </p:txBody>
       </p:sp>
       <p:sp>
@@ -401,7 +437,7 @@
             <a:spLocks noGrp="1"/>
           </p:cNvSpPr>
           <p:nvPr>
-            <p:ph idx="2" sz="half"/>
+            <p:ph sz="half" idx="2"/>
           </p:nvPr>
         </p:nvSpPr>
         <p:spPr>
@@ -422,7 +458,9 @@
               <a:defRPr/>
             </a:lvl1pPr>
           </a:lstStyle>
-          <a:p/>
+          <a:p>
+            <a:endParaRPr/>
+          </a:p>
         </p:txBody>
       </p:sp>
       <p:sp>
@@ -432,7 +470,7 @@
             <a:spLocks noGrp="1"/>
           </p:cNvSpPr>
           <p:nvPr>
-            <p:ph idx="3" sz="half"/>
+            <p:ph sz="half" idx="3"/>
           </p:nvPr>
         </p:nvSpPr>
         <p:spPr>
@@ -453,7 +491,9 @@
               <a:defRPr/>
             </a:lvl1pPr>
           </a:lstStyle>
-          <a:p/>
+          <a:p>
+            <a:endParaRPr/>
+          </a:p>
         </p:txBody>
       </p:sp>
       <p:sp>
@@ -463,7 +503,7 @@
             <a:spLocks noGrp="1"/>
           </p:cNvSpPr>
           <p:nvPr>
-            <p:ph type="ftr" idx="5" sz="quarter"/>
+            <p:ph type="ftr" sz="quarter" idx="5"/>
           </p:nvPr>
         </p:nvSpPr>
         <p:spPr/>
@@ -480,7 +520,9 @@
               </a:defRPr>
             </a:lvl1pPr>
           </a:lstStyle>
-          <a:p/>
+          <a:p>
+            <a:endParaRPr/>
+          </a:p>
         </p:txBody>
       </p:sp>
       <p:sp>
@@ -490,7 +532,7 @@
             <a:spLocks noGrp="1"/>
           </p:cNvSpPr>
           <p:nvPr>
-            <p:ph type="dt" idx="6" sz="half"/>
+            <p:ph type="dt" sz="half" idx="6"/>
           </p:nvPr>
         </p:nvSpPr>
         <p:spPr/>
@@ -510,7 +552,9 @@
           <a:p>
             <a:fld id="{1D8BD707-D9CF-40AE-B4C6-C98DA3205C09}" type="datetimeFigureOut">
               <a:rPr lang="en-US"/>
+              <a:t>9/6/2026</a:t>
             </a:fld>
+            <a:endParaRPr lang="en-US"/>
           </a:p>
         </p:txBody>
       </p:sp>
@@ -521,7 +565,7 @@
             <a:spLocks noGrp="1"/>
           </p:cNvSpPr>
           <p:nvPr>
-            <p:ph type="sldNum" idx="7" sz="quarter"/>
+            <p:ph type="sldNum" sz="quarter" idx="7"/>
           </p:nvPr>
         </p:nvSpPr>
         <p:spPr/>
@@ -540,8 +584,9 @@
           </a:lstStyle>
           <a:p>
             <a:fld id="{B6F15528-21DE-4FAA-801E-634DDDAF4B2B}" type="slidenum">
-              <a:t>#</a:t>
+              <a:t>‹#›</a:t>
             </a:fld>
+            <a:endParaRPr/>
           </a:p>
         </p:txBody>
       </p:sp>
@@ -554,7 +599,7 @@
 </file>
 
 <file path=ppt/slideLayouts/slideLayout4.xml><?xml version="1.0" encoding="utf-8"?>
-<p:sldLayout xmlns:a="http://schemas.openxmlformats.org/drawingml/2006/main" xmlns:r="http://schemas.openxmlformats.org/officeDocument/2006/relationships" xmlns:p="http://schemas.openxmlformats.org/presentationml/2006/main" preserve="1" type="obj">
+<p:sldLayout xmlns:a="http://schemas.openxmlformats.org/drawingml/2006/main" xmlns:r="http://schemas.openxmlformats.org/officeDocument/2006/relationships" xmlns:p="http://schemas.openxmlformats.org/presentationml/2006/main" type="obj" preserve="1">
   <p:cSld name="Title Only">
     <p:spTree>
       <p:nvGrpSpPr>
@@ -588,7 +633,9 @@
               <a:defRPr/>
             </a:lvl1pPr>
           </a:lstStyle>
-          <a:p/>
+          <a:p>
+            <a:endParaRPr/>
+          </a:p>
         </p:txBody>
       </p:sp>
       <p:sp>
@@ -598,7 +645,7 @@
             <a:spLocks noGrp="1"/>
           </p:cNvSpPr>
           <p:nvPr>
-            <p:ph type="ftr" idx="5" sz="quarter"/>
+            <p:ph type="ftr" sz="quarter" idx="5"/>
           </p:nvPr>
         </p:nvSpPr>
         <p:spPr/>
@@ -615,7 +662,9 @@
               </a:defRPr>
             </a:lvl1pPr>
           </a:lstStyle>
-          <a:p/>
+          <a:p>
+            <a:endParaRPr/>
+          </a:p>
         </p:txBody>
       </p:sp>
       <p:sp>
@@ -625,7 +674,7 @@
             <a:spLocks noGrp="1"/>
           </p:cNvSpPr>
           <p:nvPr>
-            <p:ph type="dt" idx="6" sz="half"/>
+            <p:ph type="dt" sz="half" idx="6"/>
           </p:nvPr>
         </p:nvSpPr>
         <p:spPr/>
@@ -645,7 +694,9 @@
           <a:p>
             <a:fld id="{1D8BD707-D9CF-40AE-B4C6-C98DA3205C09}" type="datetimeFigureOut">
               <a:rPr lang="en-US"/>
+              <a:t>9/6/2026</a:t>
             </a:fld>
+            <a:endParaRPr lang="en-US"/>
           </a:p>
         </p:txBody>
       </p:sp>
@@ -656,7 +707,7 @@
             <a:spLocks noGrp="1"/>
           </p:cNvSpPr>
           <p:nvPr>
-            <p:ph type="sldNum" idx="7" sz="quarter"/>
+            <p:ph type="sldNum" sz="quarter" idx="7"/>
           </p:nvPr>
         </p:nvSpPr>
         <p:spPr/>
@@ -675,8 +726,9 @@
           </a:lstStyle>
           <a:p>
             <a:fld id="{B6F15528-21DE-4FAA-801E-634DDDAF4B2B}" type="slidenum">
-              <a:t>#</a:t>
+              <a:t>‹#›</a:t>
             </a:fld>
+            <a:endParaRPr/>
           </a:p>
         </p:txBody>
       </p:sp>
@@ -689,7 +741,7 @@
 </file>
 
 <file path=ppt/slideLayouts/slideLayout5.xml><?xml version="1.0" encoding="utf-8"?>
-<p:sldLayout xmlns:a="http://schemas.openxmlformats.org/drawingml/2006/main" xmlns:r="http://schemas.openxmlformats.org/officeDocument/2006/relationships" xmlns:p="http://schemas.openxmlformats.org/presentationml/2006/main" preserve="1" type="obj">
+<p:sldLayout xmlns:a="http://schemas.openxmlformats.org/drawingml/2006/main" xmlns:r="http://schemas.openxmlformats.org/officeDocument/2006/relationships" xmlns:p="http://schemas.openxmlformats.org/presentationml/2006/main" type="obj" preserve="1">
   <p:cSld name="Blank">
     <p:spTree>
       <p:nvGrpSpPr>
@@ -712,7 +764,7 @@
             <a:spLocks noGrp="1"/>
           </p:cNvSpPr>
           <p:nvPr>
-            <p:ph type="ftr" idx="5" sz="quarter"/>
+            <p:ph type="ftr" sz="quarter" idx="5"/>
           </p:nvPr>
         </p:nvSpPr>
         <p:spPr/>
@@ -729,7 +781,9 @@
               </a:defRPr>
             </a:lvl1pPr>
           </a:lstStyle>
-          <a:p/>
+          <a:p>
+            <a:endParaRPr/>
+          </a:p>
         </p:txBody>
       </p:sp>
       <p:sp>
@@ -739,7 +793,7 @@
             <a:spLocks noGrp="1"/>
           </p:cNvSpPr>
           <p:nvPr>
-            <p:ph type="dt" idx="6" sz="half"/>
+            <p:ph type="dt" sz="half" idx="6"/>
           </p:nvPr>
         </p:nvSpPr>
         <p:spPr/>
@@ -759,7 +813,9 @@
           <a:p>
             <a:fld id="{1D8BD707-D9CF-40AE-B4C6-C98DA3205C09}" type="datetimeFigureOut">
               <a:rPr lang="en-US"/>
+              <a:t>9/6/2026</a:t>
             </a:fld>
+            <a:endParaRPr lang="en-US"/>
           </a:p>
         </p:txBody>
       </p:sp>
@@ -770,7 +826,7 @@
             <a:spLocks noGrp="1"/>
           </p:cNvSpPr>
           <p:nvPr>
-            <p:ph type="sldNum" idx="7" sz="quarter"/>
+            <p:ph type="sldNum" sz="quarter" idx="7"/>
           </p:nvPr>
         </p:nvSpPr>
         <p:spPr/>
@@ -789,8 +845,9 @@
           </a:lstStyle>
           <a:p>
             <a:fld id="{B6F15528-21DE-4FAA-801E-634DDDAF4B2B}" type="slidenum">
-              <a:t>#</a:t>
+              <a:t>‹#›</a:t>
             </a:fld>
+            <a:endParaRPr/>
           </a:p>
         </p:txBody>
       </p:sp>
@@ -855,7 +912,9 @@
               <a:defRPr/>
             </a:lvl1pPr>
           </a:lstStyle>
-          <a:p/>
+          <a:p>
+            <a:endParaRPr/>
+          </a:p>
         </p:txBody>
       </p:sp>
       <p:sp>
@@ -886,7 +945,9 @@
               <a:defRPr/>
             </a:lvl1pPr>
           </a:lstStyle>
-          <a:p/>
+          <a:p>
+            <a:endParaRPr/>
+          </a:p>
         </p:txBody>
       </p:sp>
       <p:sp>
@@ -896,7 +957,7 @@
             <a:spLocks noGrp="1"/>
           </p:cNvSpPr>
           <p:nvPr>
-            <p:ph type="ftr" idx="5" sz="quarter"/>
+            <p:ph type="ftr" sz="quarter" idx="5"/>
           </p:nvPr>
         </p:nvSpPr>
         <p:spPr>
@@ -923,7 +984,9 @@
               </a:defRPr>
             </a:lvl1pPr>
           </a:lstStyle>
-          <a:p/>
+          <a:p>
+            <a:endParaRPr/>
+          </a:p>
         </p:txBody>
       </p:sp>
       <p:sp>
@@ -933,7 +996,7 @@
             <a:spLocks noGrp="1"/>
           </p:cNvSpPr>
           <p:nvPr>
-            <p:ph type="dt" idx="6" sz="half"/>
+            <p:ph type="dt" sz="half" idx="6"/>
           </p:nvPr>
         </p:nvSpPr>
         <p:spPr>
@@ -963,7 +1026,9 @@
           <a:p>
             <a:fld id="{1D8BD707-D9CF-40AE-B4C6-C98DA3205C09}" type="datetimeFigureOut">
               <a:rPr lang="en-US"/>
+              <a:t>9/6/2026</a:t>
             </a:fld>
+            <a:endParaRPr lang="en-US"/>
           </a:p>
         </p:txBody>
       </p:sp>
@@ -974,7 +1039,7 @@
             <a:spLocks noGrp="1"/>
           </p:cNvSpPr>
           <p:nvPr>
-            <p:ph type="sldNum" idx="7" sz="quarter"/>
+            <p:ph type="sldNum" sz="quarter" idx="7"/>
           </p:nvPr>
         </p:nvSpPr>
         <p:spPr>
@@ -1003,14 +1068,15 @@
           </a:lstStyle>
           <a:p>
             <a:fld id="{B6F15528-21DE-4FAA-801E-634DDDAF4B2B}" type="slidenum">
-              <a:t>#</a:t>
+              <a:t>‹#›</a:t>
             </a:fld>
+            <a:endParaRPr/>
           </a:p>
         </p:txBody>
       </p:sp>
     </p:spTree>
   </p:cSld>
-  <p:clrMap folHlink="folHlink" hlink="hlink" accent1="accent1" accent2="accent2" accent3="accent3" accent4="accent4" accent5="accent5" accent6="accent6" tx2="dk2" bg2="lt2" tx1="dk1" bg1="lt1"/>
+  <p:clrMap bg1="lt1" tx1="dk1" bg2="lt2" tx2="dk2" accent1="accent1" accent2="accent2" accent3="accent3" accent4="accent4" accent5="accent5" accent6="accent6" hlink="hlink" folHlink="folHlink"/>
   <p:sldLayoutIdLst>
     <p:sldLayoutId id="2147483661" r:id="rId1"/>
     <p:sldLayoutId id="2147483662" r:id="rId2"/>
@@ -1275,7 +1341,7 @@
 </file>
 
 <file path=ppt/slides/slide2.xml><?xml version="1.0" encoding="utf-8"?>
-<p:sld xmlns:a="http://schemas.openxmlformats.org/drawingml/2006/main" xmlns:p="http://schemas.openxmlformats.org/presentationml/2006/main" xmlns:r="http://schemas.openxmlformats.org/officeDocument/2006/relationships">
+<p:sld xmlns:a="http://schemas.openxmlformats.org/drawingml/2006/main" xmlns:r="http://schemas.openxmlformats.org/officeDocument/2006/relationships" xmlns:p="http://schemas.openxmlformats.org/presentationml/2006/main">
   <p:cSld>
     <p:spTree>
       <p:nvGrpSpPr>
@@ -1283,7 +1349,14 @@
         <p:cNvGrpSpPr/>
         <p:nvPr/>
       </p:nvGrpSpPr>
-      <p:grpSpPr/>
+      <p:grpSpPr>
+        <a:xfrm>
+          <a:off x="0" y="0"/>
+          <a:ext cx="0" cy="0"/>
+          <a:chOff x="0" y="0"/>
+          <a:chExt cx="0" cy="0"/>
+        </a:xfrm>
+      </p:grpSpPr>
       <p:sp>
         <p:nvSpPr>
           <p:cNvPr id="2" name="Title 1"/>
@@ -1298,7 +1371,9 @@
         <p:txBody>
           <a:bodyPr/>
           <a:lstStyle/>
-          <a:p/>
+          <a:p>
+            <a:endParaRPr/>
+          </a:p>
         </p:txBody>
       </p:sp>
       <p:sp>
@@ -1315,7 +1390,9 @@
         <p:txBody>
           <a:bodyPr/>
           <a:lstStyle/>
-          <a:p/>
+          <a:p>
+            <a:endParaRPr/>
+          </a:p>
         </p:txBody>
       </p:sp>
       <p:sp>
@@ -1360,6 +1437,7 @@
           <a:lstStyle/>
           <a:p>
             <a:pPr algn="ctr"/>
+            <a:endParaRPr/>
           </a:p>
         </p:txBody>
       </p:sp>
@@ -1483,7 +1561,7 @@
           </a:fontRef>
         </p:style>
         <p:txBody>
-          <a:bodyPr rtlCol="0" anchor="ctr" wrap="square"/>
+          <a:bodyPr wrap="square" rtlCol="0" anchor="ctr"/>
           <a:lstStyle/>
           <a:p>
             <a:pPr algn="ctr">
@@ -1552,7 +1630,7 @@
           </a:fontRef>
         </p:style>
         <p:txBody>
-          <a:bodyPr rtlCol="0" anchor="ctr" wrap="square"/>
+          <a:bodyPr wrap="square" rtlCol="0" anchor="ctr"/>
           <a:lstStyle/>
           <a:p>
             <a:pPr algn="ctr">
@@ -1621,7 +1699,7 @@
           </a:fontRef>
         </p:style>
         <p:txBody>
-          <a:bodyPr rtlCol="0" anchor="ctr" wrap="square"/>
+          <a:bodyPr wrap="square" rtlCol="0" anchor="ctr"/>
           <a:lstStyle/>
           <a:p>
             <a:pPr algn="ctr">
@@ -1690,7 +1768,7 @@
           </a:fontRef>
         </p:style>
         <p:txBody>
-          <a:bodyPr rtlCol="0" anchor="ctr" wrap="square"/>
+          <a:bodyPr wrap="square" rtlCol="0" anchor="ctr"/>
           <a:lstStyle/>
           <a:p>
             <a:pPr algn="ctr">
@@ -1730,7 +1808,7 @@
 </file>
 
 <file path=ppt/slides/slide3.xml><?xml version="1.0" encoding="utf-8"?>
-<p:sld xmlns:a="http://schemas.openxmlformats.org/drawingml/2006/main" xmlns:p="http://schemas.openxmlformats.org/presentationml/2006/main" xmlns:r="http://schemas.openxmlformats.org/officeDocument/2006/relationships">
+<p:sld xmlns:a="http://schemas.openxmlformats.org/drawingml/2006/main" xmlns:r="http://schemas.openxmlformats.org/officeDocument/2006/relationships" xmlns:p="http://schemas.openxmlformats.org/presentationml/2006/main">
   <p:cSld>
     <p:spTree>
       <p:nvGrpSpPr>
@@ -1738,7 +1816,14 @@
         <p:cNvGrpSpPr/>
         <p:nvPr/>
       </p:nvGrpSpPr>
-      <p:grpSpPr/>
+      <p:grpSpPr>
+        <a:xfrm>
+          <a:off x="0" y="0"/>
+          <a:ext cx="0" cy="0"/>
+          <a:chOff x="0" y="0"/>
+          <a:chExt cx="0" cy="0"/>
+        </a:xfrm>
+      </p:grpSpPr>
       <p:sp>
         <p:nvSpPr>
           <p:cNvPr id="2" name="Title 1"/>
@@ -1753,7 +1838,9 @@
         <p:txBody>
           <a:bodyPr/>
           <a:lstStyle/>
-          <a:p/>
+          <a:p>
+            <a:endParaRPr/>
+          </a:p>
         </p:txBody>
       </p:sp>
       <p:sp>
@@ -1770,7 +1857,9 @@
         <p:txBody>
           <a:bodyPr/>
           <a:lstStyle/>
-          <a:p/>
+          <a:p>
+            <a:endParaRPr/>
+          </a:p>
         </p:txBody>
       </p:sp>
       <p:sp>
@@ -1815,6 +1904,7 @@
           <a:lstStyle/>
           <a:p>
             <a:pPr algn="ctr"/>
+            <a:endParaRPr/>
           </a:p>
         </p:txBody>
       </p:sp>
@@ -1938,7 +2028,7 @@
           </a:fontRef>
         </p:style>
         <p:txBody>
-          <a:bodyPr rtlCol="0" anchor="ctr" wrap="square"/>
+          <a:bodyPr wrap="square" rtlCol="0" anchor="ctr"/>
           <a:lstStyle/>
           <a:p>
             <a:pPr algn="ctr">
@@ -2004,7 +2094,7 @@
           </a:fontRef>
         </p:style>
         <p:txBody>
-          <a:bodyPr rtlCol="0" anchor="ctr" wrap="square"/>
+          <a:bodyPr wrap="square" rtlCol="0" anchor="ctr"/>
           <a:lstStyle/>
           <a:p>
             <a:pPr algn="ctr">
@@ -2070,7 +2160,7 @@
           </a:fontRef>
         </p:style>
         <p:txBody>
-          <a:bodyPr rtlCol="0" anchor="ctr" wrap="square"/>
+          <a:bodyPr wrap="square" rtlCol="0" anchor="ctr"/>
           <a:lstStyle/>
           <a:p>
             <a:pPr algn="ctr">
@@ -2136,7 +2226,7 @@
           </a:fontRef>
         </p:style>
         <p:txBody>
-          <a:bodyPr rtlCol="0" anchor="ctr" wrap="square"/>
+          <a:bodyPr wrap="square" rtlCol="0" anchor="ctr"/>
           <a:lstStyle/>
           <a:p>
             <a:pPr algn="ctr">
@@ -2173,7 +2263,7 @@
 </file>
 
 <file path=ppt/slides/slide4.xml><?xml version="1.0" encoding="utf-8"?>
-<p:sld xmlns:a="http://schemas.openxmlformats.org/drawingml/2006/main" xmlns:p="http://schemas.openxmlformats.org/presentationml/2006/main" xmlns:r="http://schemas.openxmlformats.org/officeDocument/2006/relationships">
+<p:sld xmlns:a="http://schemas.openxmlformats.org/drawingml/2006/main" xmlns:r="http://schemas.openxmlformats.org/officeDocument/2006/relationships" xmlns:p="http://schemas.openxmlformats.org/presentationml/2006/main">
   <p:cSld>
     <p:spTree>
       <p:nvGrpSpPr>
@@ -2181,7 +2271,14 @@
         <p:cNvGrpSpPr/>
         <p:nvPr/>
       </p:nvGrpSpPr>
-      <p:grpSpPr/>
+      <p:grpSpPr>
+        <a:xfrm>
+          <a:off x="0" y="0"/>
+          <a:ext cx="0" cy="0"/>
+          <a:chOff x="0" y="0"/>
+          <a:chExt cx="0" cy="0"/>
+        </a:xfrm>
+      </p:grpSpPr>
       <p:sp>
         <p:nvSpPr>
           <p:cNvPr id="2" name="Title 1"/>
@@ -2196,7 +2293,9 @@
         <p:txBody>
           <a:bodyPr/>
           <a:lstStyle/>
-          <a:p/>
+          <a:p>
+            <a:endParaRPr/>
+          </a:p>
         </p:txBody>
       </p:sp>
       <p:sp>
@@ -2213,7 +2312,9 @@
         <p:txBody>
           <a:bodyPr/>
           <a:lstStyle/>
-          <a:p/>
+          <a:p>
+            <a:endParaRPr/>
+          </a:p>
         </p:txBody>
       </p:sp>
       <p:sp>
@@ -2258,6 +2359,7 @@
           <a:lstStyle/>
           <a:p>
             <a:pPr algn="ctr"/>
+            <a:endParaRPr/>
           </a:p>
         </p:txBody>
       </p:sp>
@@ -2501,7 +2603,7 @@
           </a:fontRef>
         </p:style>
         <p:txBody>
-          <a:bodyPr rtlCol="0" anchor="ctr" wrap="square"/>
+          <a:bodyPr wrap="square" rtlCol="0" anchor="ctr"/>
           <a:lstStyle/>
           <a:p>
             <a:pPr algn="ctr">
@@ -2631,7 +2733,7 @@
 </file>
 
 <file path=ppt/slides/slide5.xml><?xml version="1.0" encoding="utf-8"?>
-<p:sld xmlns:a="http://schemas.openxmlformats.org/drawingml/2006/main" xmlns:p="http://schemas.openxmlformats.org/presentationml/2006/main" xmlns:r="http://schemas.openxmlformats.org/officeDocument/2006/relationships">
+<p:sld xmlns:a="http://schemas.openxmlformats.org/drawingml/2006/main" xmlns:r="http://schemas.openxmlformats.org/officeDocument/2006/relationships" xmlns:p="http://schemas.openxmlformats.org/presentationml/2006/main">
   <p:cSld>
     <p:spTree>
       <p:nvGrpSpPr>
@@ -2639,7 +2741,14 @@
         <p:cNvGrpSpPr/>
         <p:nvPr/>
       </p:nvGrpSpPr>
-      <p:grpSpPr/>
+      <p:grpSpPr>
+        <a:xfrm>
+          <a:off x="0" y="0"/>
+          <a:ext cx="0" cy="0"/>
+          <a:chOff x="0" y="0"/>
+          <a:chExt cx="0" cy="0"/>
+        </a:xfrm>
+      </p:grpSpPr>
       <p:sp>
         <p:nvSpPr>
           <p:cNvPr id="2" name="Title 1"/>
@@ -2654,7 +2763,9 @@
         <p:txBody>
           <a:bodyPr/>
           <a:lstStyle/>
-          <a:p/>
+          <a:p>
+            <a:endParaRPr/>
+          </a:p>
         </p:txBody>
       </p:sp>
       <p:sp>
@@ -2671,7 +2782,9 @@
         <p:txBody>
           <a:bodyPr/>
           <a:lstStyle/>
-          <a:p/>
+          <a:p>
+            <a:endParaRPr/>
+          </a:p>
         </p:txBody>
       </p:sp>
       <p:sp>
@@ -2716,6 +2829,7 @@
           <a:lstStyle/>
           <a:p>
             <a:pPr algn="ctr"/>
+            <a:endParaRPr/>
           </a:p>
         </p:txBody>
       </p:sp>
@@ -2839,7 +2953,7 @@
           </a:fontRef>
         </p:style>
         <p:txBody>
-          <a:bodyPr rtlCol="0" anchor="ctr" wrap="square"/>
+          <a:bodyPr wrap="square" rtlCol="0" anchor="ctr"/>
           <a:lstStyle/>
           <a:p>
             <a:pPr algn="ctr">
@@ -2968,7 +3082,7 @@
           </a:fontRef>
         </p:style>
         <p:txBody>
-          <a:bodyPr rtlCol="0" anchor="ctr" wrap="square"/>
+          <a:bodyPr wrap="square" rtlCol="0" anchor="ctr"/>
           <a:lstStyle/>
           <a:p>
             <a:pPr algn="ctr">
@@ -3068,7 +3182,7 @@
 </file>
 
 <file path=ppt/slides/slide6.xml><?xml version="1.0" encoding="utf-8"?>
-<p:sld xmlns:a="http://schemas.openxmlformats.org/drawingml/2006/main" xmlns:p="http://schemas.openxmlformats.org/presentationml/2006/main" xmlns:r="http://schemas.openxmlformats.org/officeDocument/2006/relationships">
+<p:sld xmlns:a="http://schemas.openxmlformats.org/drawingml/2006/main" xmlns:r="http://schemas.openxmlformats.org/officeDocument/2006/relationships" xmlns:p="http://schemas.openxmlformats.org/presentationml/2006/main">
   <p:cSld>
     <p:spTree>
       <p:nvGrpSpPr>
@@ -3076,17 +3190,30 @@
         <p:cNvGrpSpPr/>
         <p:nvPr/>
       </p:nvGrpSpPr>
-      <p:grpSpPr/>
-      <p:sp>
-        <p:nvSpPr>
-          <p:cNvPr id="2" name="Rectangle 1"/>
+      <p:grpSpPr>
+        <a:xfrm>
+          <a:off x="0" y="0"/>
+          <a:ext cx="0" cy="0"/>
+          <a:chOff x="0" y="0"/>
+          <a:chExt cx="0" cy="0"/>
+        </a:xfrm>
+      </p:grpSpPr>
+      <p:sp>
+        <p:nvSpPr>
+          <p:cNvPr id="9" name="Rectangle 8">
+            <a:extLst>
+              <a:ext uri="{FF2B5EF4-FFF2-40B4-BE49-F238E27FC236}">
+                <a16:creationId xmlns:a16="http://schemas.microsoft.com/office/drawing/2014/main" id="{FB157CA3-ADAA-4B87-8248-978D3563F3FB}"/>
+              </a:ext>
+            </a:extLst>
+          </p:cNvPr>
           <p:cNvSpPr/>
           <p:nvPr/>
         </p:nvSpPr>
         <p:spPr>
           <a:xfrm>
             <a:off x="0" y="0"/>
-            <a:ext cx="10058400" cy="4139999"/>
+            <a:ext cx="10693400" cy="914400"/>
           </a:xfrm>
           <a:prstGeom prst="rect">
             <a:avLst/>
@@ -3094,18 +3221,34 @@
           <a:solidFill>
             <a:srgbClr val="1E3A8A"/>
           </a:solidFill>
-          <a:ln>
+          <a:ln w="25400" cap="flat" cmpd="sng" algn="ctr">
             <a:noFill/>
+            <a:prstDash val="solid"/>
           </a:ln>
+          <a:effectLst/>
+          <a:extLst>
+            <a:ext uri="{91240B29-F687-4F45-9708-019B960494DF}">
+              <a14:hiddenLine xmlns:a14="http://schemas.microsoft.com/office/drawing/2010/main" w="25400" cap="flat" cmpd="sng" algn="ctr">
+                <a:solidFill>
+                  <a:schemeClr val="accent1">
+                    <a:shade val="50000"/>
+                  </a:schemeClr>
+                </a:solidFill>
+                <a:prstDash val="solid"/>
+              </a14:hiddenLine>
+            </a:ext>
+          </a:extLst>
         </p:spPr>
         <p:style>
-          <a:lnRef idx="1">
-            <a:schemeClr val="accent1"/>
+          <a:lnRef idx="2">
+            <a:schemeClr val="accent1">
+              <a:shade val="50000"/>
+            </a:schemeClr>
           </a:lnRef>
-          <a:fillRef idx="3">
+          <a:fillRef idx="1">
             <a:schemeClr val="accent1"/>
           </a:fillRef>
-          <a:effectRef idx="2">
+          <a:effectRef idx="0">
             <a:schemeClr val="accent1"/>
           </a:effectRef>
           <a:fontRef idx="minor">
@@ -3117,19 +3260,174 @@
           <a:lstStyle/>
           <a:p>
             <a:pPr algn="ctr"/>
-          </a:p>
-        </p:txBody>
-      </p:sp>
-      <p:sp>
-        <p:nvSpPr>
-          <p:cNvPr id="3" name="TextBox 2"/>
+            <a:endParaRPr lang="en-IN"/>
+          </a:p>
+        </p:txBody>
+      </p:sp>
+      <p:sp>
+        <p:nvSpPr>
+          <p:cNvPr id="10" name="Rectangle: Rounded Corners 9">
+            <a:extLst>
+              <a:ext uri="{FF2B5EF4-FFF2-40B4-BE49-F238E27FC236}">
+                <a16:creationId xmlns:a16="http://schemas.microsoft.com/office/drawing/2014/main" id="{122462E9-1A08-4D3F-A02E-900A6C0A3D55}"/>
+              </a:ext>
+            </a:extLst>
+          </p:cNvPr>
+          <p:cNvSpPr/>
+          <p:nvPr/>
+        </p:nvSpPr>
+        <p:spPr>
+          <a:xfrm>
+            <a:off x="177800" y="177800"/>
+            <a:ext cx="762000" cy="254000"/>
+          </a:xfrm>
+          <a:prstGeom prst="roundRect">
+            <a:avLst/>
+          </a:prstGeom>
+          <a:solidFill>
+            <a:srgbClr val="FFFFFF"/>
+          </a:solidFill>
+          <a:ln w="25400" cap="flat" cmpd="sng" algn="ctr">
+            <a:noFill/>
+            <a:prstDash val="solid"/>
+          </a:ln>
+          <a:effectLst/>
+          <a:extLst>
+            <a:ext uri="{91240B29-F687-4F45-9708-019B960494DF}">
+              <a14:hiddenLine xmlns:a14="http://schemas.microsoft.com/office/drawing/2010/main" w="25400" cap="flat" cmpd="sng" algn="ctr">
+                <a:solidFill>
+                  <a:schemeClr val="accent1">
+                    <a:shade val="50000"/>
+                  </a:schemeClr>
+                </a:solidFill>
+                <a:prstDash val="solid"/>
+              </a14:hiddenLine>
+            </a:ext>
+          </a:extLst>
+        </p:spPr>
+        <p:style>
+          <a:lnRef idx="2">
+            <a:schemeClr val="accent1">
+              <a:shade val="50000"/>
+            </a:schemeClr>
+          </a:lnRef>
+          <a:fillRef idx="1">
+            <a:schemeClr val="accent1"/>
+          </a:fillRef>
+          <a:effectRef idx="0">
+            <a:schemeClr val="accent1"/>
+          </a:effectRef>
+          <a:fontRef idx="minor">
+            <a:schemeClr val="lt1"/>
+          </a:fontRef>
+        </p:style>
+        <p:txBody>
+          <a:bodyPr rtlCol="0" anchor="ctr"/>
+          <a:lstStyle/>
+          <a:p>
+            <a:pPr algn="ctr"/>
+            <a:r>
+              <a:rPr lang="en-IN" sz="850" b="1">
+                <a:solidFill>
+                  <a:srgbClr val="1E3A8A"/>
+                </a:solidFill>
+                <a:latin typeface="Calibri" panose="020F0502020204030204" pitchFamily="34" charset="0"/>
+              </a:rPr>
+              <a:t>TVSCREDIT</a:t>
+            </a:r>
+          </a:p>
+        </p:txBody>
+      </p:sp>
+      <p:sp>
+        <p:nvSpPr>
+          <p:cNvPr id="11" name="Rectangle: Rounded Corners 10">
+            <a:extLst>
+              <a:ext uri="{FF2B5EF4-FFF2-40B4-BE49-F238E27FC236}">
+                <a16:creationId xmlns:a16="http://schemas.microsoft.com/office/drawing/2014/main" id="{8B12F181-E906-4533-A7EE-EC945D24E468}"/>
+              </a:ext>
+            </a:extLst>
+          </p:cNvPr>
+          <p:cNvSpPr/>
+          <p:nvPr/>
+        </p:nvSpPr>
+        <p:spPr>
+          <a:xfrm>
+            <a:off x="990600" y="177800"/>
+            <a:ext cx="660400" cy="254000"/>
+          </a:xfrm>
+          <a:prstGeom prst="roundRect">
+            <a:avLst/>
+          </a:prstGeom>
+          <a:solidFill>
+            <a:srgbClr val="7C3AED"/>
+          </a:solidFill>
+          <a:ln w="25400" cap="flat" cmpd="sng" algn="ctr">
+            <a:noFill/>
+            <a:prstDash val="solid"/>
+          </a:ln>
+          <a:effectLst/>
+          <a:extLst>
+            <a:ext uri="{91240B29-F687-4F45-9708-019B960494DF}">
+              <a14:hiddenLine xmlns:a14="http://schemas.microsoft.com/office/drawing/2010/main" w="25400" cap="flat" cmpd="sng" algn="ctr">
+                <a:solidFill>
+                  <a:schemeClr val="accent1">
+                    <a:shade val="50000"/>
+                  </a:schemeClr>
+                </a:solidFill>
+                <a:prstDash val="solid"/>
+              </a14:hiddenLine>
+            </a:ext>
+          </a:extLst>
+        </p:spPr>
+        <p:style>
+          <a:lnRef idx="2">
+            <a:schemeClr val="accent1">
+              <a:shade val="50000"/>
+            </a:schemeClr>
+          </a:lnRef>
+          <a:fillRef idx="1">
+            <a:schemeClr val="accent1"/>
+          </a:fillRef>
+          <a:effectRef idx="0">
+            <a:schemeClr val="accent1"/>
+          </a:effectRef>
+          <a:fontRef idx="minor">
+            <a:schemeClr val="lt1"/>
+          </a:fontRef>
+        </p:style>
+        <p:txBody>
+          <a:bodyPr rtlCol="0" anchor="ctr"/>
+          <a:lstStyle/>
+          <a:p>
+            <a:pPr algn="ctr"/>
+            <a:r>
+              <a:rPr lang="en-IN" sz="800" b="1">
+                <a:solidFill>
+                  <a:srgbClr val="FFFFFF"/>
+                </a:solidFill>
+                <a:latin typeface="Calibri" panose="020F0502020204030204" pitchFamily="34" charset="0"/>
+              </a:rPr>
+              <a:t>e.p.i.c 8</a:t>
+            </a:r>
+          </a:p>
+        </p:txBody>
+      </p:sp>
+      <p:sp>
+        <p:nvSpPr>
+          <p:cNvPr id="12" name="TextBox 11">
+            <a:extLst>
+              <a:ext uri="{FF2B5EF4-FFF2-40B4-BE49-F238E27FC236}">
+                <a16:creationId xmlns:a16="http://schemas.microsoft.com/office/drawing/2014/main" id="{DC8F9ABC-BDD0-4A43-9345-BDD43A1344EE}"/>
+              </a:ext>
+            </a:extLst>
+          </p:cNvPr>
           <p:cNvSpPr txBox="1"/>
           <p:nvPr/>
         </p:nvSpPr>
         <p:spPr>
           <a:xfrm>
-            <a:off x="216000" y="288000"/>
-            <a:ext cx="9555480" cy="1620000"/>
+            <a:off x="1714500" y="50800"/>
+            <a:ext cx="7264400" cy="492443"/>
           </a:xfrm>
           <a:prstGeom prst="rect">
             <a:avLst/>
@@ -3137,33 +3435,192 @@
           <a:noFill/>
         </p:spPr>
         <p:txBody>
-          <a:bodyPr wrap="square">
+          <a:bodyPr vert="horz" wrap="square" lIns="0" tIns="0" rIns="0" bIns="0" rtlCol="0">
             <a:spAutoFit/>
           </a:bodyPr>
           <a:lstStyle/>
           <a:p>
             <a:pPr algn="ctr"/>
             <a:r>
-              <a:rPr sz="1800" b="1" i="0">
+              <a:rPr lang="en-IN" sz="1400" b="1">
                 <a:solidFill>
                   <a:srgbClr val="FFFFFF"/>
                 </a:solidFill>
+                <a:latin typeface="Calibri" panose="020F0502020204030204" pitchFamily="34" charset="0"/>
               </a:rPr>
               <a:t>Existing Solutions: Other NBFCs v/s Current TVS Credit v/s GeoKisan (TVS Credit)</a:t>
             </a:r>
           </a:p>
-        </p:txBody>
-      </p:sp>
-      <p:sp>
-        <p:nvSpPr>
-          <p:cNvPr id="4" name="TextBox 3"/>
+          <a:p>
+            <a:pPr algn="ctr"/>
+            <a:r>
+              <a:rPr lang="en-IN" sz="950" b="1">
+                <a:solidFill>
+                  <a:srgbClr val="BFDBFE"/>
+                </a:solidFill>
+                <a:latin typeface="Calibri" panose="020F0502020204030204" pitchFamily="34" charset="0"/>
+              </a:rPr>
+              <a:t>Unlocking ₹123.8 Cr Annual Bottom-Line Value Across TVS Credit's Rural Portfolio</a:t>
+            </a:r>
+          </a:p>
+          <a:p>
+            <a:pPr algn="ctr"/>
+            <a:r>
+              <a:rPr lang="en-IN" sz="850">
+                <a:solidFill>
+                  <a:srgbClr val="93C5FD"/>
+                </a:solidFill>
+                <a:latin typeface="Calibri" panose="020F0502020204030204" pitchFamily="34" charset="0"/>
+              </a:rPr>
+              <a:t>Transforming Unit Economics: 97% OpEx Compression, Sub-3-Minute Sanctions, and 125 bps GNPA Reduction via GeoKisan</a:t>
+            </a:r>
+          </a:p>
+        </p:txBody>
+      </p:sp>
+      <p:sp>
+        <p:nvSpPr>
+          <p:cNvPr id="13" name="Rectangle: Rounded Corners 12">
+            <a:extLst>
+              <a:ext uri="{FF2B5EF4-FFF2-40B4-BE49-F238E27FC236}">
+                <a16:creationId xmlns:a16="http://schemas.microsoft.com/office/drawing/2014/main" id="{E3F0B016-378B-4C9D-A35D-C75B1EBAB6C8}"/>
+              </a:ext>
+            </a:extLst>
+          </p:cNvPr>
+          <p:cNvSpPr/>
+          <p:nvPr/>
+        </p:nvSpPr>
+        <p:spPr>
+          <a:xfrm>
+            <a:off x="228600" y="990600"/>
+            <a:ext cx="3124200" cy="2794000"/>
+          </a:xfrm>
+          <a:prstGeom prst="roundRect">
+            <a:avLst/>
+          </a:prstGeom>
+          <a:solidFill>
+            <a:srgbClr val="FFFFFF"/>
+          </a:solidFill>
+          <a:ln w="19050">
+            <a:solidFill>
+              <a:srgbClr val="1E3A8A"/>
+            </a:solidFill>
+          </a:ln>
+        </p:spPr>
+        <p:style>
+          <a:lnRef idx="2">
+            <a:schemeClr val="accent1">
+              <a:shade val="50000"/>
+            </a:schemeClr>
+          </a:lnRef>
+          <a:fillRef idx="1">
+            <a:schemeClr val="accent1"/>
+          </a:fillRef>
+          <a:effectRef idx="0">
+            <a:schemeClr val="accent1"/>
+          </a:effectRef>
+          <a:fontRef idx="minor">
+            <a:schemeClr val="lt1"/>
+          </a:fontRef>
+        </p:style>
+        <p:txBody>
+          <a:bodyPr rtlCol="0" anchor="ctr"/>
+          <a:lstStyle/>
+          <a:p>
+            <a:pPr algn="ctr"/>
+            <a:endParaRPr lang="en-IN"/>
+          </a:p>
+        </p:txBody>
+      </p:sp>
+      <p:sp>
+        <p:nvSpPr>
+          <p:cNvPr id="14" name="Rectangle: Rounded Corners 13">
+            <a:extLst>
+              <a:ext uri="{FF2B5EF4-FFF2-40B4-BE49-F238E27FC236}">
+                <a16:creationId xmlns:a16="http://schemas.microsoft.com/office/drawing/2014/main" id="{3BCC8607-60A6-4AED-931A-5AC8E375CEF1}"/>
+              </a:ext>
+            </a:extLst>
+          </p:cNvPr>
+          <p:cNvSpPr/>
+          <p:nvPr/>
+        </p:nvSpPr>
+        <p:spPr>
+          <a:xfrm>
+            <a:off x="304800" y="1066800"/>
+            <a:ext cx="279400" cy="279400"/>
+          </a:xfrm>
+          <a:prstGeom prst="roundRect">
+            <a:avLst/>
+          </a:prstGeom>
+          <a:solidFill>
+            <a:srgbClr val="1E3A8A"/>
+          </a:solidFill>
+          <a:ln w="25400" cap="flat" cmpd="sng" algn="ctr">
+            <a:noFill/>
+            <a:prstDash val="solid"/>
+          </a:ln>
+          <a:effectLst/>
+          <a:extLst>
+            <a:ext uri="{91240B29-F687-4F45-9708-019B960494DF}">
+              <a14:hiddenLine xmlns:a14="http://schemas.microsoft.com/office/drawing/2010/main" w="25400" cap="flat" cmpd="sng" algn="ctr">
+                <a:solidFill>
+                  <a:schemeClr val="accent1">
+                    <a:shade val="50000"/>
+                  </a:schemeClr>
+                </a:solidFill>
+                <a:prstDash val="solid"/>
+              </a14:hiddenLine>
+            </a:ext>
+          </a:extLst>
+        </p:spPr>
+        <p:style>
+          <a:lnRef idx="2">
+            <a:schemeClr val="accent1">
+              <a:shade val="50000"/>
+            </a:schemeClr>
+          </a:lnRef>
+          <a:fillRef idx="1">
+            <a:schemeClr val="accent1"/>
+          </a:fillRef>
+          <a:effectRef idx="0">
+            <a:schemeClr val="accent1"/>
+          </a:effectRef>
+          <a:fontRef idx="minor">
+            <a:schemeClr val="lt1"/>
+          </a:fontRef>
+        </p:style>
+        <p:txBody>
+          <a:bodyPr rtlCol="0" anchor="ctr"/>
+          <a:lstStyle/>
+          <a:p>
+            <a:pPr algn="ctr"/>
+            <a:r>
+              <a:rPr lang="en-IN" sz="1200" b="1">
+                <a:solidFill>
+                  <a:srgbClr val="FFFFFF"/>
+                </a:solidFill>
+                <a:latin typeface="Calibri" panose="020F0502020204030204" pitchFamily="34" charset="0"/>
+              </a:rPr>
+              <a:t>1</a:t>
+            </a:r>
+          </a:p>
+        </p:txBody>
+      </p:sp>
+      <p:sp>
+        <p:nvSpPr>
+          <p:cNvPr id="15" name="TextBox 14">
+            <a:extLst>
+              <a:ext uri="{FF2B5EF4-FFF2-40B4-BE49-F238E27FC236}">
+                <a16:creationId xmlns:a16="http://schemas.microsoft.com/office/drawing/2014/main" id="{22B1F2D8-B2F2-4E4A-9EC6-3F5EA9138C29}"/>
+              </a:ext>
+            </a:extLst>
+          </p:cNvPr>
           <p:cNvSpPr txBox="1"/>
           <p:nvPr/>
         </p:nvSpPr>
         <p:spPr>
           <a:xfrm>
-            <a:off x="216000" y="1872000"/>
-            <a:ext cx="9555480" cy="1008000"/>
+            <a:off x="635000" y="1041400"/>
+            <a:ext cx="2667000" cy="276999"/>
           </a:xfrm>
           <a:prstGeom prst="rect">
             <a:avLst/>
@@ -3171,33 +3628,52 @@
           <a:noFill/>
         </p:spPr>
         <p:txBody>
-          <a:bodyPr wrap="square">
+          <a:bodyPr vert="horz" wrap="square" lIns="0" tIns="0" rIns="0" bIns="0" rtlCol="0">
             <a:spAutoFit/>
           </a:bodyPr>
           <a:lstStyle/>
           <a:p>
-            <a:pPr algn="ctr"/>
-            <a:r>
-              <a:rPr sz="1100" b="1" i="0">
-                <a:solidFill>
-                  <a:srgbClr val="BFDBFE"/>
-                </a:solidFill>
+            <a:pPr algn="l"/>
+            <a:r>
+              <a:rPr lang="en-IN" sz="1050" b="1">
+                <a:solidFill>
+                  <a:srgbClr val="1E3A8A"/>
+                </a:solidFill>
+                <a:latin typeface="Calibri" panose="020F0502020204030204" pitchFamily="34" charset="0"/>
               </a:rPr>
-              <a:t>Unlocking ₹123.8 Cr Annual Bottom-Line Value Across TVS Credit's Rural Portfolio</a:t>
-            </a:r>
-          </a:p>
-        </p:txBody>
-      </p:sp>
-      <p:sp>
-        <p:nvSpPr>
-          <p:cNvPr id="5" name="TextBox 4"/>
+              <a:t>DEALERSHIP INTAKE</a:t>
+            </a:r>
+          </a:p>
+          <a:p>
+            <a:pPr algn="l"/>
+            <a:r>
+              <a:rPr lang="en-IN" sz="750">
+                <a:solidFill>
+                  <a:srgbClr val="64748B"/>
+                </a:solidFill>
+                <a:latin typeface="Calibri" panose="020F0502020204030204" pitchFamily="34" charset="0"/>
+              </a:rPr>
+              <a:t>Satellite Field Underwriting</a:t>
+            </a:r>
+          </a:p>
+        </p:txBody>
+      </p:sp>
+      <p:sp>
+        <p:nvSpPr>
+          <p:cNvPr id="16" name="TextBox 15">
+            <a:extLst>
+              <a:ext uri="{FF2B5EF4-FFF2-40B4-BE49-F238E27FC236}">
+                <a16:creationId xmlns:a16="http://schemas.microsoft.com/office/drawing/2014/main" id="{71C7CE78-4F44-43B4-82D9-5ABA72F29AFD}"/>
+              </a:ext>
+            </a:extLst>
+          </p:cNvPr>
           <p:cNvSpPr txBox="1"/>
           <p:nvPr/>
         </p:nvSpPr>
         <p:spPr>
           <a:xfrm>
-            <a:off x="216000" y="2808000"/>
-            <a:ext cx="9555480" cy="1080000"/>
+            <a:off x="304800" y="1422400"/>
+            <a:ext cx="2971800" cy="974626"/>
           </a:xfrm>
           <a:prstGeom prst="rect">
             <a:avLst/>
@@ -3205,54 +3681,197 @@
           <a:noFill/>
         </p:spPr>
         <p:txBody>
-          <a:bodyPr wrap="square">
+          <a:bodyPr vert="horz" wrap="square" lIns="25400" tIns="25400" rIns="25400" bIns="25400" rtlCol="0">
             <a:spAutoFit/>
           </a:bodyPr>
           <a:lstStyle/>
           <a:p>
-            <a:pPr algn="ctr"/>
-            <a:r>
-              <a:rPr sz="1000" b="0" i="0">
-                <a:solidFill>
-                  <a:srgbClr val="BFDBFE"/>
-                </a:solidFill>
+            <a:pPr algn="l"/>
+            <a:r>
+              <a:rPr lang="en-IN" sz="750" b="1">
+                <a:solidFill>
+                  <a:srgbClr val="0F172A"/>
+                </a:solidFill>
+                <a:latin typeface="Calibri" panose="020F0502020204030204" pitchFamily="34" charset="0"/>
               </a:rPr>
-              <a:t>Transforming Unit Economics: 97% OpEx Compression, Sub-3-Minute Sanctions, and 125 bps GNPA Reduction via GeoKisan</a:t>
-            </a:r>
-          </a:p>
-        </p:txBody>
-      </p:sp>
-      <p:sp>
-        <p:nvSpPr>
-          <p:cNvPr id="6" name="Rectangle 5"/>
+              <a:t>• SOC &amp; NDVI Scan: </a:t>
+            </a:r>
+            <a:r>
+              <a:rPr lang="en-IN" sz="750">
+                <a:solidFill>
+                  <a:srgbClr val="0F172A"/>
+                </a:solidFill>
+                <a:latin typeface="Calibri" panose="020F0502020204030204" pitchFamily="34" charset="0"/>
+              </a:rPr>
+              <a:t>10m Sentinel-2 soil health + crop vigor scored in &lt; 40 seconds.</a:t>
+            </a:r>
+          </a:p>
+          <a:p>
+            <a:pPr algn="l"/>
+            <a:r>
+              <a:rPr lang="en-IN" sz="750" b="1">
+                <a:solidFill>
+                  <a:srgbClr val="0F172A"/>
+                </a:solidFill>
+                <a:latin typeface="Calibri" panose="020F0502020204030204" pitchFamily="34" charset="0"/>
+              </a:rPr>
+              <a:t>• Thin-File Override: </a:t>
+            </a:r>
+            <a:r>
+              <a:rPr lang="en-IN" sz="750">
+                <a:solidFill>
+                  <a:srgbClr val="0F172A"/>
+                </a:solidFill>
+                <a:latin typeface="Calibri" panose="020F0502020204030204" pitchFamily="34" charset="0"/>
+              </a:rPr>
+              <a:t>Account Aggregator cashflow replaces CIBIL bureau — no floor score.</a:t>
+            </a:r>
+          </a:p>
+          <a:p>
+            <a:pPr algn="l"/>
+            <a:r>
+              <a:rPr lang="en-IN" sz="750" b="1">
+                <a:solidFill>
+                  <a:srgbClr val="0F172A"/>
+                </a:solidFill>
+                <a:latin typeface="Calibri" panose="020F0502020204030204" pitchFamily="34" charset="0"/>
+              </a:rPr>
+              <a:t>• H3 Cadastral Check: </a:t>
+            </a:r>
+            <a:r>
+              <a:rPr lang="en-IN" sz="750">
+                <a:solidFill>
+                  <a:srgbClr val="0F172A"/>
+                </a:solidFill>
+                <a:latin typeface="Calibri" panose="020F0502020204030204" pitchFamily="34" charset="0"/>
+              </a:rPr>
+              <a:t>Satellite polygon flags duplicate multi-lender collateral pledges.</a:t>
+            </a:r>
+          </a:p>
+          <a:p>
+            <a:pPr algn="l"/>
+            <a:r>
+              <a:rPr lang="en-IN" sz="750" b="1">
+                <a:solidFill>
+                  <a:srgbClr val="0F172A"/>
+                </a:solidFill>
+                <a:latin typeface="Calibri" panose="020F0502020204030204" pitchFamily="34" charset="0"/>
+              </a:rPr>
+              <a:t>• Dealer Sanction: </a:t>
+            </a:r>
+            <a:r>
+              <a:rPr lang="en-IN" sz="750">
+                <a:solidFill>
+                  <a:srgbClr val="0F172A"/>
+                </a:solidFill>
+                <a:latin typeface="Calibri" panose="020F0502020204030204" pitchFamily="34" charset="0"/>
+              </a:rPr>
+              <a:t>300–900 score delivered to dealer tablet; approval in &lt; 3 minutes.</a:t>
+            </a:r>
+          </a:p>
+        </p:txBody>
+      </p:sp>
+      <p:sp>
+        <p:nvSpPr>
+          <p:cNvPr id="17" name="Rectangle: Rounded Corners 16">
+            <a:extLst>
+              <a:ext uri="{FF2B5EF4-FFF2-40B4-BE49-F238E27FC236}">
+                <a16:creationId xmlns:a16="http://schemas.microsoft.com/office/drawing/2014/main" id="{2F36BF1F-892B-47EB-9B56-8D9E70837429}"/>
+              </a:ext>
+            </a:extLst>
+          </p:cNvPr>
           <p:cNvSpPr/>
           <p:nvPr/>
         </p:nvSpPr>
         <p:spPr>
           <a:xfrm>
-            <a:off x="1080000" y="5039999"/>
-            <a:ext cx="1912800" cy="11520000"/>
+            <a:off x="304800" y="3225800"/>
+            <a:ext cx="2971800" cy="457200"/>
           </a:xfrm>
-          <a:prstGeom prst="rect">
+          <a:prstGeom prst="roundRect">
             <a:avLst/>
           </a:prstGeom>
           <a:solidFill>
-            <a:srgbClr val="F1F5F9"/>
+            <a:srgbClr val="FEF3C7"/>
           </a:solidFill>
           <a:ln w="12700">
+            <a:solidFill>
+              <a:srgbClr val="FBBF24"/>
+            </a:solidFill>
+          </a:ln>
+        </p:spPr>
+        <p:style>
+          <a:lnRef idx="2">
+            <a:schemeClr val="accent1">
+              <a:shade val="50000"/>
+            </a:schemeClr>
+          </a:lnRef>
+          <a:fillRef idx="1">
+            <a:schemeClr val="accent1"/>
+          </a:fillRef>
+          <a:effectRef idx="0">
+            <a:schemeClr val="accent1"/>
+          </a:effectRef>
+          <a:fontRef idx="minor">
+            <a:schemeClr val="lt1"/>
+          </a:fontRef>
+        </p:style>
+        <p:txBody>
+          <a:bodyPr rtlCol="0" anchor="ctr"/>
+          <a:lstStyle/>
+          <a:p>
+            <a:pPr algn="ctr"/>
+            <a:r>
+              <a:rPr lang="en-IN" sz="750" b="1">
+                <a:solidFill>
+                  <a:srgbClr val="92400E"/>
+                </a:solidFill>
+                <a:latin typeface="Calibri" panose="020F0502020204030204" pitchFamily="34" charset="0"/>
+              </a:rPr>
+              <a:t>💡 Saves ₹4,080/file vs ₹4,200 physical field officer cost (97% OpEx saving)</a:t>
+            </a:r>
+          </a:p>
+        </p:txBody>
+      </p:sp>
+      <p:sp>
+        <p:nvSpPr>
+          <p:cNvPr id="18" name="Rectangle: Rounded Corners 17">
+            <a:extLst>
+              <a:ext uri="{FF2B5EF4-FFF2-40B4-BE49-F238E27FC236}">
+                <a16:creationId xmlns:a16="http://schemas.microsoft.com/office/drawing/2014/main" id="{F472170C-9B5A-469F-95B3-D475DD14AA5C}"/>
+              </a:ext>
+            </a:extLst>
+          </p:cNvPr>
+          <p:cNvSpPr/>
+          <p:nvPr/>
+        </p:nvSpPr>
+        <p:spPr>
+          <a:xfrm>
+            <a:off x="3784600" y="990600"/>
+            <a:ext cx="3124200" cy="2794000"/>
+          </a:xfrm>
+          <a:prstGeom prst="roundRect">
+            <a:avLst/>
+          </a:prstGeom>
+          <a:solidFill>
+            <a:srgbClr val="FFFFFF"/>
+          </a:solidFill>
+          <a:ln w="19050">
             <a:solidFill>
               <a:srgbClr val="1E3A8A"/>
             </a:solidFill>
           </a:ln>
         </p:spPr>
         <p:style>
-          <a:lnRef idx="1">
-            <a:schemeClr val="accent1"/>
+          <a:lnRef idx="2">
+            <a:schemeClr val="accent1">
+              <a:shade val="50000"/>
+            </a:schemeClr>
           </a:lnRef>
-          <a:fillRef idx="3">
+          <a:fillRef idx="1">
             <a:schemeClr val="accent1"/>
           </a:fillRef>
-          <a:effectRef idx="2">
+          <a:effectRef idx="0">
             <a:schemeClr val="accent1"/>
           </a:effectRef>
           <a:fontRef idx="minor">
@@ -3264,19 +3883,1764 @@
           <a:lstStyle/>
           <a:p>
             <a:pPr algn="ctr"/>
-          </a:p>
-        </p:txBody>
-      </p:sp>
-      <p:sp>
-        <p:nvSpPr>
-          <p:cNvPr id="7" name="Rectangle 6"/>
+            <a:endParaRPr lang="en-IN"/>
+          </a:p>
+        </p:txBody>
+      </p:sp>
+      <p:sp>
+        <p:nvSpPr>
+          <p:cNvPr id="19" name="Rectangle: Rounded Corners 18">
+            <a:extLst>
+              <a:ext uri="{FF2B5EF4-FFF2-40B4-BE49-F238E27FC236}">
+                <a16:creationId xmlns:a16="http://schemas.microsoft.com/office/drawing/2014/main" id="{454B0C87-6F54-4F00-B09E-A5E364DDE458}"/>
+              </a:ext>
+            </a:extLst>
+          </p:cNvPr>
           <p:cNvSpPr/>
           <p:nvPr/>
         </p:nvSpPr>
         <p:spPr>
           <a:xfrm>
-            <a:off x="1080000" y="5039999"/>
-            <a:ext cx="1259999" cy="2160000"/>
+            <a:off x="3860800" y="1066800"/>
+            <a:ext cx="279400" cy="279400"/>
+          </a:xfrm>
+          <a:prstGeom prst="roundRect">
+            <a:avLst/>
+          </a:prstGeom>
+          <a:solidFill>
+            <a:srgbClr val="1E3A8A"/>
+          </a:solidFill>
+          <a:ln w="25400" cap="flat" cmpd="sng" algn="ctr">
+            <a:noFill/>
+            <a:prstDash val="solid"/>
+          </a:ln>
+          <a:effectLst/>
+          <a:extLst>
+            <a:ext uri="{91240B29-F687-4F45-9708-019B960494DF}">
+              <a14:hiddenLine xmlns:a14="http://schemas.microsoft.com/office/drawing/2010/main" w="25400" cap="flat" cmpd="sng" algn="ctr">
+                <a:solidFill>
+                  <a:schemeClr val="accent1">
+                    <a:shade val="50000"/>
+                  </a:schemeClr>
+                </a:solidFill>
+                <a:prstDash val="solid"/>
+              </a14:hiddenLine>
+            </a:ext>
+          </a:extLst>
+        </p:spPr>
+        <p:style>
+          <a:lnRef idx="2">
+            <a:schemeClr val="accent1">
+              <a:shade val="50000"/>
+            </a:schemeClr>
+          </a:lnRef>
+          <a:fillRef idx="1">
+            <a:schemeClr val="accent1"/>
+          </a:fillRef>
+          <a:effectRef idx="0">
+            <a:schemeClr val="accent1"/>
+          </a:effectRef>
+          <a:fontRef idx="minor">
+            <a:schemeClr val="lt1"/>
+          </a:fontRef>
+        </p:style>
+        <p:txBody>
+          <a:bodyPr rtlCol="0" anchor="ctr"/>
+          <a:lstStyle/>
+          <a:p>
+            <a:pPr algn="ctr"/>
+            <a:r>
+              <a:rPr lang="en-IN" sz="1200" b="1">
+                <a:solidFill>
+                  <a:srgbClr val="FFFFFF"/>
+                </a:solidFill>
+                <a:latin typeface="Calibri" panose="020F0502020204030204" pitchFamily="34" charset="0"/>
+              </a:rPr>
+              <a:t>2</a:t>
+            </a:r>
+          </a:p>
+        </p:txBody>
+      </p:sp>
+      <p:sp>
+        <p:nvSpPr>
+          <p:cNvPr id="20" name="TextBox 19">
+            <a:extLst>
+              <a:ext uri="{FF2B5EF4-FFF2-40B4-BE49-F238E27FC236}">
+                <a16:creationId xmlns:a16="http://schemas.microsoft.com/office/drawing/2014/main" id="{772B754B-5168-49A9-B958-91CECAA2D15C}"/>
+              </a:ext>
+            </a:extLst>
+          </p:cNvPr>
+          <p:cNvSpPr txBox="1"/>
+          <p:nvPr/>
+        </p:nvSpPr>
+        <p:spPr>
+          <a:xfrm>
+            <a:off x="4191000" y="1041400"/>
+            <a:ext cx="2667000" cy="276999"/>
+          </a:xfrm>
+          <a:prstGeom prst="rect">
+            <a:avLst/>
+          </a:prstGeom>
+          <a:noFill/>
+        </p:spPr>
+        <p:txBody>
+          <a:bodyPr vert="horz" wrap="square" lIns="0" tIns="0" rIns="0" bIns="0" rtlCol="0">
+            <a:spAutoFit/>
+          </a:bodyPr>
+          <a:lstStyle/>
+          <a:p>
+            <a:pPr algn="l"/>
+            <a:r>
+              <a:rPr lang="en-IN" sz="1050" b="1">
+                <a:solidFill>
+                  <a:srgbClr val="1E3A8A"/>
+                </a:solidFill>
+                <a:latin typeface="Calibri" panose="020F0502020204030204" pitchFamily="34" charset="0"/>
+              </a:rPr>
+              <a:t>MONSOON GESTATION</a:t>
+            </a:r>
+          </a:p>
+          <a:p>
+            <a:pPr algn="l"/>
+            <a:r>
+              <a:rPr lang="en-IN" sz="750">
+                <a:solidFill>
+                  <a:srgbClr val="64748B"/>
+                </a:solidFill>
+                <a:latin typeface="Calibri" panose="020F0502020204030204" pitchFamily="34" charset="0"/>
+              </a:rPr>
+              <a:t>All-Weather CloudGap-CG Monitoring</a:t>
+            </a:r>
+          </a:p>
+        </p:txBody>
+      </p:sp>
+      <p:sp>
+        <p:nvSpPr>
+          <p:cNvPr id="21" name="TextBox 20">
+            <a:extLst>
+              <a:ext uri="{FF2B5EF4-FFF2-40B4-BE49-F238E27FC236}">
+                <a16:creationId xmlns:a16="http://schemas.microsoft.com/office/drawing/2014/main" id="{7383A2BA-B23F-4F61-9CD2-255F6E1E1F08}"/>
+              </a:ext>
+            </a:extLst>
+          </p:cNvPr>
+          <p:cNvSpPr txBox="1"/>
+          <p:nvPr/>
+        </p:nvSpPr>
+        <p:spPr>
+          <a:xfrm>
+            <a:off x="3860800" y="1422400"/>
+            <a:ext cx="2971800" cy="974626"/>
+          </a:xfrm>
+          <a:prstGeom prst="rect">
+            <a:avLst/>
+          </a:prstGeom>
+          <a:noFill/>
+        </p:spPr>
+        <p:txBody>
+          <a:bodyPr vert="horz" wrap="square" lIns="25400" tIns="25400" rIns="25400" bIns="25400" rtlCol="0">
+            <a:spAutoFit/>
+          </a:bodyPr>
+          <a:lstStyle/>
+          <a:p>
+            <a:pPr algn="l"/>
+            <a:r>
+              <a:rPr lang="en-IN" sz="750" b="1">
+                <a:solidFill>
+                  <a:srgbClr val="0F172A"/>
+                </a:solidFill>
+                <a:latin typeface="Calibri" panose="020F0502020204030204" pitchFamily="34" charset="0"/>
+              </a:rPr>
+              <a:t>• CloudGap-CG Active (Jun–Oct): </a:t>
+            </a:r>
+            <a:r>
+              <a:rPr lang="en-IN" sz="750">
+                <a:solidFill>
+                  <a:srgbClr val="0F172A"/>
+                </a:solidFill>
+                <a:latin typeface="Calibri" panose="020F0502020204030204" pitchFamily="34" charset="0"/>
+              </a:rPr>
+              <a:t>ST-DIP U-Net inpainting maintains 100% Kharif satellite visibility through 70–80% clouds.</a:t>
+            </a:r>
+          </a:p>
+          <a:p>
+            <a:pPr algn="l"/>
+            <a:r>
+              <a:rPr lang="en-IN" sz="750" b="1">
+                <a:solidFill>
+                  <a:srgbClr val="0F172A"/>
+                </a:solidFill>
+                <a:latin typeface="Calibri" panose="020F0502020204030204" pitchFamily="34" charset="0"/>
+              </a:rPr>
+              <a:t>• Fortnightly SAR Passes: </a:t>
+            </a:r>
+            <a:r>
+              <a:rPr lang="en-IN" sz="750">
+                <a:solidFill>
+                  <a:srgbClr val="0F172A"/>
+                </a:solidFill>
+                <a:latin typeface="Calibri" panose="020F0502020204030204" pitchFamily="34" charset="0"/>
+              </a:rPr>
+              <a:t>Sentinel-2/1 NDVI + backscatter tracks crop health through blindspot.</a:t>
+            </a:r>
+          </a:p>
+          <a:p>
+            <a:pPr algn="l"/>
+            <a:r>
+              <a:rPr lang="en-IN" sz="750" b="1">
+                <a:solidFill>
+                  <a:srgbClr val="0F172A"/>
+                </a:solidFill>
+                <a:latin typeface="Calibri" panose="020F0502020204030204" pitchFamily="34" charset="0"/>
+              </a:rPr>
+              <a:t>• EWS Alerts: </a:t>
+            </a:r>
+            <a:r>
+              <a:rPr lang="en-IN" sz="750">
+                <a:solidFill>
+                  <a:srgbClr val="0F172A"/>
+                </a:solidFill>
+                <a:latin typeface="Calibri" panose="020F0502020204030204" pitchFamily="34" charset="0"/>
+              </a:rPr>
+              <a:t>Flood, drought, or pest distress flags officers 14–21 days before EMI default.</a:t>
+            </a:r>
+          </a:p>
+          <a:p>
+            <a:pPr algn="l"/>
+            <a:r>
+              <a:rPr lang="en-IN" sz="750" b="1">
+                <a:solidFill>
+                  <a:srgbClr val="0F172A"/>
+                </a:solidFill>
+                <a:latin typeface="Calibri" panose="020F0502020204030204" pitchFamily="34" charset="0"/>
+              </a:rPr>
+              <a:t>• Lean EMI Active: </a:t>
+            </a:r>
+            <a:r>
+              <a:rPr lang="en-IN" sz="750">
+                <a:solidFill>
+                  <a:srgbClr val="0F172A"/>
+                </a:solidFill>
+                <a:latin typeface="Calibri" panose="020F0502020204030204" pitchFamily="34" charset="0"/>
+              </a:rPr>
+              <a:t>Borrower pays ₹1,500/mo maintenance — zero sowing pressure.</a:t>
+            </a:r>
+          </a:p>
+        </p:txBody>
+      </p:sp>
+      <p:sp>
+        <p:nvSpPr>
+          <p:cNvPr id="22" name="Rectangle: Rounded Corners 21">
+            <a:extLst>
+              <a:ext uri="{FF2B5EF4-FFF2-40B4-BE49-F238E27FC236}">
+                <a16:creationId xmlns:a16="http://schemas.microsoft.com/office/drawing/2014/main" id="{7A2C62F5-92BA-4494-A46A-5A3074574FAC}"/>
+              </a:ext>
+            </a:extLst>
+          </p:cNvPr>
+          <p:cNvSpPr/>
+          <p:nvPr/>
+        </p:nvSpPr>
+        <p:spPr>
+          <a:xfrm>
+            <a:off x="3860800" y="3225800"/>
+            <a:ext cx="2971800" cy="457200"/>
+          </a:xfrm>
+          <a:prstGeom prst="roundRect">
+            <a:avLst/>
+          </a:prstGeom>
+          <a:solidFill>
+            <a:srgbClr val="FEF3C7"/>
+          </a:solidFill>
+          <a:ln w="12700">
+            <a:solidFill>
+              <a:srgbClr val="FBBF24"/>
+            </a:solidFill>
+          </a:ln>
+        </p:spPr>
+        <p:style>
+          <a:lnRef idx="2">
+            <a:schemeClr val="accent1">
+              <a:shade val="50000"/>
+            </a:schemeClr>
+          </a:lnRef>
+          <a:fillRef idx="1">
+            <a:schemeClr val="accent1"/>
+          </a:fillRef>
+          <a:effectRef idx="0">
+            <a:schemeClr val="accent1"/>
+          </a:effectRef>
+          <a:fontRef idx="minor">
+            <a:schemeClr val="lt1"/>
+          </a:fontRef>
+        </p:style>
+        <p:txBody>
+          <a:bodyPr rtlCol="0" anchor="ctr"/>
+          <a:lstStyle/>
+          <a:p>
+            <a:pPr algn="ctr"/>
+            <a:r>
+              <a:rPr lang="en-IN" sz="750" b="1">
+                <a:solidFill>
+                  <a:srgbClr val="92400E"/>
+                </a:solidFill>
+                <a:latin typeface="Calibri" panose="020F0502020204030204" pitchFamily="34" charset="0"/>
+              </a:rPr>
+              <a:t>💡 Zero Kharif underwriting pause — incumbent NBFCs halt for 4+ months</a:t>
+            </a:r>
+          </a:p>
+        </p:txBody>
+      </p:sp>
+      <p:sp>
+        <p:nvSpPr>
+          <p:cNvPr id="23" name="Rectangle: Rounded Corners 22">
+            <a:extLst>
+              <a:ext uri="{FF2B5EF4-FFF2-40B4-BE49-F238E27FC236}">
+                <a16:creationId xmlns:a16="http://schemas.microsoft.com/office/drawing/2014/main" id="{40E7D5DD-5A37-49D0-B101-F351B6BEEAE9}"/>
+              </a:ext>
+            </a:extLst>
+          </p:cNvPr>
+          <p:cNvSpPr/>
+          <p:nvPr/>
+        </p:nvSpPr>
+        <p:spPr>
+          <a:xfrm>
+            <a:off x="7340600" y="990600"/>
+            <a:ext cx="3124200" cy="2794000"/>
+          </a:xfrm>
+          <a:prstGeom prst="roundRect">
+            <a:avLst/>
+          </a:prstGeom>
+          <a:solidFill>
+            <a:srgbClr val="FFFFFF"/>
+          </a:solidFill>
+          <a:ln w="19050">
+            <a:solidFill>
+              <a:srgbClr val="1E3A8A"/>
+            </a:solidFill>
+          </a:ln>
+        </p:spPr>
+        <p:style>
+          <a:lnRef idx="2">
+            <a:schemeClr val="accent1">
+              <a:shade val="50000"/>
+            </a:schemeClr>
+          </a:lnRef>
+          <a:fillRef idx="1">
+            <a:schemeClr val="accent1"/>
+          </a:fillRef>
+          <a:effectRef idx="0">
+            <a:schemeClr val="accent1"/>
+          </a:effectRef>
+          <a:fontRef idx="minor">
+            <a:schemeClr val="lt1"/>
+          </a:fontRef>
+        </p:style>
+        <p:txBody>
+          <a:bodyPr rtlCol="0" anchor="ctr"/>
+          <a:lstStyle/>
+          <a:p>
+            <a:pPr algn="ctr"/>
+            <a:endParaRPr lang="en-IN"/>
+          </a:p>
+        </p:txBody>
+      </p:sp>
+      <p:sp>
+        <p:nvSpPr>
+          <p:cNvPr id="24" name="Rectangle: Rounded Corners 23">
+            <a:extLst>
+              <a:ext uri="{FF2B5EF4-FFF2-40B4-BE49-F238E27FC236}">
+                <a16:creationId xmlns:a16="http://schemas.microsoft.com/office/drawing/2014/main" id="{1EB8C5C9-2993-48F5-8B1A-9430B8A3B5D7}"/>
+              </a:ext>
+            </a:extLst>
+          </p:cNvPr>
+          <p:cNvSpPr/>
+          <p:nvPr/>
+        </p:nvSpPr>
+        <p:spPr>
+          <a:xfrm>
+            <a:off x="7416800" y="1066800"/>
+            <a:ext cx="279400" cy="279400"/>
+          </a:xfrm>
+          <a:prstGeom prst="roundRect">
+            <a:avLst/>
+          </a:prstGeom>
+          <a:solidFill>
+            <a:srgbClr val="1E3A8A"/>
+          </a:solidFill>
+          <a:ln w="25400" cap="flat" cmpd="sng" algn="ctr">
+            <a:noFill/>
+            <a:prstDash val="solid"/>
+          </a:ln>
+          <a:effectLst/>
+          <a:extLst>
+            <a:ext uri="{91240B29-F687-4F45-9708-019B960494DF}">
+              <a14:hiddenLine xmlns:a14="http://schemas.microsoft.com/office/drawing/2010/main" w="25400" cap="flat" cmpd="sng" algn="ctr">
+                <a:solidFill>
+                  <a:schemeClr val="accent1">
+                    <a:shade val="50000"/>
+                  </a:schemeClr>
+                </a:solidFill>
+                <a:prstDash val="solid"/>
+              </a14:hiddenLine>
+            </a:ext>
+          </a:extLst>
+        </p:spPr>
+        <p:style>
+          <a:lnRef idx="2">
+            <a:schemeClr val="accent1">
+              <a:shade val="50000"/>
+            </a:schemeClr>
+          </a:lnRef>
+          <a:fillRef idx="1">
+            <a:schemeClr val="accent1"/>
+          </a:fillRef>
+          <a:effectRef idx="0">
+            <a:schemeClr val="accent1"/>
+          </a:effectRef>
+          <a:fontRef idx="minor">
+            <a:schemeClr val="lt1"/>
+          </a:fontRef>
+        </p:style>
+        <p:txBody>
+          <a:bodyPr rtlCol="0" anchor="ctr"/>
+          <a:lstStyle/>
+          <a:p>
+            <a:pPr algn="ctr"/>
+            <a:r>
+              <a:rPr lang="en-IN" sz="1200" b="1">
+                <a:solidFill>
+                  <a:srgbClr val="FFFFFF"/>
+                </a:solidFill>
+                <a:latin typeface="Calibri" panose="020F0502020204030204" pitchFamily="34" charset="0"/>
+              </a:rPr>
+              <a:t>3</a:t>
+            </a:r>
+          </a:p>
+        </p:txBody>
+      </p:sp>
+      <p:sp>
+        <p:nvSpPr>
+          <p:cNvPr id="25" name="TextBox 24">
+            <a:extLst>
+              <a:ext uri="{FF2B5EF4-FFF2-40B4-BE49-F238E27FC236}">
+                <a16:creationId xmlns:a16="http://schemas.microsoft.com/office/drawing/2014/main" id="{68CEBAFE-7FD3-4F1E-BB81-A9C83E0642C0}"/>
+              </a:ext>
+            </a:extLst>
+          </p:cNvPr>
+          <p:cNvSpPr txBox="1"/>
+          <p:nvPr/>
+        </p:nvSpPr>
+        <p:spPr>
+          <a:xfrm>
+            <a:off x="7747000" y="1041400"/>
+            <a:ext cx="2667000" cy="276999"/>
+          </a:xfrm>
+          <a:prstGeom prst="rect">
+            <a:avLst/>
+          </a:prstGeom>
+          <a:noFill/>
+        </p:spPr>
+        <p:txBody>
+          <a:bodyPr vert="horz" wrap="square" lIns="0" tIns="0" rIns="0" bIns="0" rtlCol="0">
+            <a:spAutoFit/>
+          </a:bodyPr>
+          <a:lstStyle/>
+          <a:p>
+            <a:pPr algn="l"/>
+            <a:r>
+              <a:rPr lang="en-IN" sz="1050" b="1">
+                <a:solidFill>
+                  <a:srgbClr val="1E3A8A"/>
+                </a:solidFill>
+                <a:latin typeface="Calibri" panose="020F0502020204030204" pitchFamily="34" charset="0"/>
+              </a:rPr>
+              <a:t>HARVEST REALIZATION</a:t>
+            </a:r>
+          </a:p>
+          <a:p>
+            <a:pPr algn="l"/>
+            <a:r>
+              <a:rPr lang="en-IN" sz="750">
+                <a:solidFill>
+                  <a:srgbClr val="64748B"/>
+                </a:solidFill>
+                <a:latin typeface="Calibri" panose="020F0502020204030204" pitchFamily="34" charset="0"/>
+              </a:rPr>
+              <a:t>Yield-Synced Bullet Repayment</a:t>
+            </a:r>
+          </a:p>
+        </p:txBody>
+      </p:sp>
+      <p:sp>
+        <p:nvSpPr>
+          <p:cNvPr id="26" name="TextBox 25">
+            <a:extLst>
+              <a:ext uri="{FF2B5EF4-FFF2-40B4-BE49-F238E27FC236}">
+                <a16:creationId xmlns:a16="http://schemas.microsoft.com/office/drawing/2014/main" id="{5706F25F-80EC-4C9F-A191-DE1061C7656F}"/>
+              </a:ext>
+            </a:extLst>
+          </p:cNvPr>
+          <p:cNvSpPr txBox="1"/>
+          <p:nvPr/>
+        </p:nvSpPr>
+        <p:spPr>
+          <a:xfrm>
+            <a:off x="7416800" y="1422400"/>
+            <a:ext cx="2971800" cy="974626"/>
+          </a:xfrm>
+          <a:prstGeom prst="rect">
+            <a:avLst/>
+          </a:prstGeom>
+          <a:noFill/>
+        </p:spPr>
+        <p:txBody>
+          <a:bodyPr vert="horz" wrap="square" lIns="25400" tIns="25400" rIns="25400" bIns="25400" rtlCol="0">
+            <a:spAutoFit/>
+          </a:bodyPr>
+          <a:lstStyle/>
+          <a:p>
+            <a:pPr algn="l"/>
+            <a:r>
+              <a:rPr lang="en-IN" sz="750" b="1">
+                <a:solidFill>
+                  <a:srgbClr val="0F172A"/>
+                </a:solidFill>
+                <a:latin typeface="Calibri" panose="020F0502020204030204" pitchFamily="34" charset="0"/>
+              </a:rPr>
+              <a:t>• WOFOST Yield Forecast: </a:t>
+            </a:r>
+            <a:r>
+              <a:rPr lang="en-IN" sz="750">
+                <a:solidFill>
+                  <a:srgbClr val="0F172A"/>
+                </a:solidFill>
+                <a:latin typeface="Calibri" panose="020F0502020204030204" pitchFamily="34" charset="0"/>
+              </a:rPr>
+              <a:t>Satellite crop model predicts Mandi revenue before harvest date.</a:t>
+            </a:r>
+          </a:p>
+          <a:p>
+            <a:pPr algn="l"/>
+            <a:r>
+              <a:rPr lang="en-IN" sz="750" b="1">
+                <a:solidFill>
+                  <a:srgbClr val="0F172A"/>
+                </a:solidFill>
+                <a:latin typeface="Calibri" panose="020F0502020204030204" pitchFamily="34" charset="0"/>
+              </a:rPr>
+              <a:t>• Harvest Bullet Payment: </a:t>
+            </a:r>
+            <a:r>
+              <a:rPr lang="en-IN" sz="750">
+                <a:solidFill>
+                  <a:srgbClr val="0F172A"/>
+                </a:solidFill>
+                <a:latin typeface="Calibri" panose="020F0502020204030204" pitchFamily="34" charset="0"/>
+              </a:rPr>
+              <a:t>Major instalment synced with Mandi sale receipt from actual crop income.</a:t>
+            </a:r>
+          </a:p>
+          <a:p>
+            <a:pPr algn="l"/>
+            <a:r>
+              <a:rPr lang="en-IN" sz="750" b="1">
+                <a:solidFill>
+                  <a:srgbClr val="0F172A"/>
+                </a:solidFill>
+                <a:latin typeface="Calibri" panose="020F0502020204030204" pitchFamily="34" charset="0"/>
+              </a:rPr>
+              <a:t>• Sanction Letter: </a:t>
+            </a:r>
+            <a:r>
+              <a:rPr lang="en-IN" sz="750">
+                <a:solidFill>
+                  <a:srgbClr val="0F172A"/>
+                </a:solidFill>
+                <a:latin typeface="Calibri" panose="020F0502020204030204" pitchFamily="34" charset="0"/>
+              </a:rPr>
+              <a:t>TreeSHAP memo auto-generated in Hindi/Chhattisgarhi/English.</a:t>
+            </a:r>
+          </a:p>
+          <a:p>
+            <a:pPr algn="l"/>
+            <a:r>
+              <a:rPr lang="en-IN" sz="750" b="1">
+                <a:solidFill>
+                  <a:srgbClr val="0F172A"/>
+                </a:solidFill>
+                <a:latin typeface="Calibri" panose="020F0502020204030204" pitchFamily="34" charset="0"/>
+              </a:rPr>
+              <a:t>• Fast-Track Restructuring: </a:t>
+            </a:r>
+            <a:r>
+              <a:rPr lang="en-IN" sz="750">
+                <a:solidFill>
+                  <a:srgbClr val="0F172A"/>
+                </a:solidFill>
+                <a:latin typeface="Calibri" panose="020F0502020204030204" pitchFamily="34" charset="0"/>
+              </a:rPr>
+              <a:t>60-day deferral opens automatically if NDVI drops &gt;15% mid-season.</a:t>
+            </a:r>
+          </a:p>
+        </p:txBody>
+      </p:sp>
+      <p:sp>
+        <p:nvSpPr>
+          <p:cNvPr id="27" name="Rectangle: Rounded Corners 26">
+            <a:extLst>
+              <a:ext uri="{FF2B5EF4-FFF2-40B4-BE49-F238E27FC236}">
+                <a16:creationId xmlns:a16="http://schemas.microsoft.com/office/drawing/2014/main" id="{63F225C9-BC1F-461D-9B30-89EB1754E649}"/>
+              </a:ext>
+            </a:extLst>
+          </p:cNvPr>
+          <p:cNvSpPr/>
+          <p:nvPr/>
+        </p:nvSpPr>
+        <p:spPr>
+          <a:xfrm>
+            <a:off x="7416800" y="3225800"/>
+            <a:ext cx="2971800" cy="457200"/>
+          </a:xfrm>
+          <a:prstGeom prst="roundRect">
+            <a:avLst/>
+          </a:prstGeom>
+          <a:solidFill>
+            <a:srgbClr val="FEF3C7"/>
+          </a:solidFill>
+          <a:ln w="12700">
+            <a:solidFill>
+              <a:srgbClr val="FBBF24"/>
+            </a:solidFill>
+          </a:ln>
+        </p:spPr>
+        <p:style>
+          <a:lnRef idx="2">
+            <a:schemeClr val="accent1">
+              <a:shade val="50000"/>
+            </a:schemeClr>
+          </a:lnRef>
+          <a:fillRef idx="1">
+            <a:schemeClr val="accent1"/>
+          </a:fillRef>
+          <a:effectRef idx="0">
+            <a:schemeClr val="accent1"/>
+          </a:effectRef>
+          <a:fontRef idx="minor">
+            <a:schemeClr val="lt1"/>
+          </a:fontRef>
+        </p:style>
+        <p:txBody>
+          <a:bodyPr rtlCol="0" anchor="ctr"/>
+          <a:lstStyle/>
+          <a:p>
+            <a:pPr algn="ctr"/>
+            <a:r>
+              <a:rPr lang="en-IN" sz="750" b="1">
+                <a:solidFill>
+                  <a:srgbClr val="92400E"/>
+                </a:solidFill>
+                <a:latin typeface="Calibri" panose="020F0502020204030204" pitchFamily="34" charset="0"/>
+              </a:rPr>
+              <a:t>💡 34.5% reduction in 90-day NPAs vs industry flat EMI model</a:t>
+            </a:r>
+          </a:p>
+        </p:txBody>
+      </p:sp>
+      <p:sp>
+        <p:nvSpPr>
+          <p:cNvPr id="28" name="Arrow: Right 27">
+            <a:extLst>
+              <a:ext uri="{FF2B5EF4-FFF2-40B4-BE49-F238E27FC236}">
+                <a16:creationId xmlns:a16="http://schemas.microsoft.com/office/drawing/2014/main" id="{170EC837-BB2F-499F-A171-758A90FA39AF}"/>
+              </a:ext>
+            </a:extLst>
+          </p:cNvPr>
+          <p:cNvSpPr/>
+          <p:nvPr/>
+        </p:nvSpPr>
+        <p:spPr>
+          <a:xfrm>
+            <a:off x="3403600" y="2235200"/>
+            <a:ext cx="304800" cy="279400"/>
+          </a:xfrm>
+          <a:prstGeom prst="rightArrow">
+            <a:avLst/>
+          </a:prstGeom>
+          <a:solidFill>
+            <a:srgbClr val="1E3A8A"/>
+          </a:solidFill>
+          <a:ln w="25400" cap="flat" cmpd="sng" algn="ctr">
+            <a:noFill/>
+            <a:prstDash val="solid"/>
+          </a:ln>
+          <a:effectLst/>
+          <a:extLst>
+            <a:ext uri="{91240B29-F687-4F45-9708-019B960494DF}">
+              <a14:hiddenLine xmlns:a14="http://schemas.microsoft.com/office/drawing/2010/main" w="25400" cap="flat" cmpd="sng" algn="ctr">
+                <a:solidFill>
+                  <a:schemeClr val="accent1">
+                    <a:shade val="50000"/>
+                  </a:schemeClr>
+                </a:solidFill>
+                <a:prstDash val="solid"/>
+              </a14:hiddenLine>
+            </a:ext>
+          </a:extLst>
+        </p:spPr>
+        <p:style>
+          <a:lnRef idx="2">
+            <a:schemeClr val="accent1">
+              <a:shade val="50000"/>
+            </a:schemeClr>
+          </a:lnRef>
+          <a:fillRef idx="1">
+            <a:schemeClr val="accent1"/>
+          </a:fillRef>
+          <a:effectRef idx="0">
+            <a:schemeClr val="accent1"/>
+          </a:effectRef>
+          <a:fontRef idx="minor">
+            <a:schemeClr val="lt1"/>
+          </a:fontRef>
+        </p:style>
+        <p:txBody>
+          <a:bodyPr rtlCol="0" anchor="ctr"/>
+          <a:lstStyle/>
+          <a:p>
+            <a:pPr algn="ctr"/>
+            <a:endParaRPr lang="en-IN"/>
+          </a:p>
+        </p:txBody>
+      </p:sp>
+      <p:sp>
+        <p:nvSpPr>
+          <p:cNvPr id="29" name="Arrow: Right 28">
+            <a:extLst>
+              <a:ext uri="{FF2B5EF4-FFF2-40B4-BE49-F238E27FC236}">
+                <a16:creationId xmlns:a16="http://schemas.microsoft.com/office/drawing/2014/main" id="{6D4C4535-A94B-46C3-80A0-6FA0D61A62EA}"/>
+              </a:ext>
+            </a:extLst>
+          </p:cNvPr>
+          <p:cNvSpPr/>
+          <p:nvPr/>
+        </p:nvSpPr>
+        <p:spPr>
+          <a:xfrm>
+            <a:off x="6959600" y="2235200"/>
+            <a:ext cx="304800" cy="279400"/>
+          </a:xfrm>
+          <a:prstGeom prst="rightArrow">
+            <a:avLst/>
+          </a:prstGeom>
+          <a:solidFill>
+            <a:srgbClr val="1E3A8A"/>
+          </a:solidFill>
+          <a:ln w="25400" cap="flat" cmpd="sng" algn="ctr">
+            <a:noFill/>
+            <a:prstDash val="solid"/>
+          </a:ln>
+          <a:effectLst/>
+          <a:extLst>
+            <a:ext uri="{91240B29-F687-4F45-9708-019B960494DF}">
+              <a14:hiddenLine xmlns:a14="http://schemas.microsoft.com/office/drawing/2010/main" w="25400" cap="flat" cmpd="sng" algn="ctr">
+                <a:solidFill>
+                  <a:schemeClr val="accent1">
+                    <a:shade val="50000"/>
+                  </a:schemeClr>
+                </a:solidFill>
+                <a:prstDash val="solid"/>
+              </a14:hiddenLine>
+            </a:ext>
+          </a:extLst>
+        </p:spPr>
+        <p:style>
+          <a:lnRef idx="2">
+            <a:schemeClr val="accent1">
+              <a:shade val="50000"/>
+            </a:schemeClr>
+          </a:lnRef>
+          <a:fillRef idx="1">
+            <a:schemeClr val="accent1"/>
+          </a:fillRef>
+          <a:effectRef idx="0">
+            <a:schemeClr val="accent1"/>
+          </a:effectRef>
+          <a:fontRef idx="minor">
+            <a:schemeClr val="lt1"/>
+          </a:fontRef>
+        </p:style>
+        <p:txBody>
+          <a:bodyPr rtlCol="0" anchor="ctr"/>
+          <a:lstStyle/>
+          <a:p>
+            <a:pPr algn="ctr"/>
+            <a:endParaRPr lang="en-IN"/>
+          </a:p>
+        </p:txBody>
+      </p:sp>
+      <p:sp>
+        <p:nvSpPr>
+          <p:cNvPr id="30" name="Rectangle: Rounded Corners 29">
+            <a:extLst>
+              <a:ext uri="{FF2B5EF4-FFF2-40B4-BE49-F238E27FC236}">
+                <a16:creationId xmlns:a16="http://schemas.microsoft.com/office/drawing/2014/main" id="{8073D04E-3219-402E-B0F8-B92077B330C2}"/>
+              </a:ext>
+            </a:extLst>
+          </p:cNvPr>
+          <p:cNvSpPr/>
+          <p:nvPr/>
+        </p:nvSpPr>
+        <p:spPr>
+          <a:xfrm>
+            <a:off x="228600" y="3860800"/>
+            <a:ext cx="10236200" cy="279400"/>
+          </a:xfrm>
+          <a:prstGeom prst="roundRect">
+            <a:avLst/>
+          </a:prstGeom>
+          <a:solidFill>
+            <a:srgbClr val="E2E8F0"/>
+          </a:solidFill>
+          <a:ln w="25400" cap="flat" cmpd="sng" algn="ctr">
+            <a:noFill/>
+            <a:prstDash val="solid"/>
+          </a:ln>
+          <a:effectLst/>
+          <a:extLst>
+            <a:ext uri="{91240B29-F687-4F45-9708-019B960494DF}">
+              <a14:hiddenLine xmlns:a14="http://schemas.microsoft.com/office/drawing/2010/main" w="25400" cap="flat" cmpd="sng" algn="ctr">
+                <a:solidFill>
+                  <a:schemeClr val="accent1">
+                    <a:shade val="50000"/>
+                  </a:schemeClr>
+                </a:solidFill>
+                <a:prstDash val="solid"/>
+              </a14:hiddenLine>
+            </a:ext>
+          </a:extLst>
+        </p:spPr>
+        <p:style>
+          <a:lnRef idx="2">
+            <a:schemeClr val="accent1">
+              <a:shade val="50000"/>
+            </a:schemeClr>
+          </a:lnRef>
+          <a:fillRef idx="1">
+            <a:schemeClr val="accent1"/>
+          </a:fillRef>
+          <a:effectRef idx="0">
+            <a:schemeClr val="accent1"/>
+          </a:effectRef>
+          <a:fontRef idx="minor">
+            <a:schemeClr val="lt1"/>
+          </a:fontRef>
+        </p:style>
+        <p:txBody>
+          <a:bodyPr rtlCol="0" anchor="ctr"/>
+          <a:lstStyle/>
+          <a:p>
+            <a:pPr algn="ctr"/>
+            <a:r>
+              <a:rPr lang="en-IN" sz="850" b="1">
+                <a:solidFill>
+                  <a:srgbClr val="1E3A8A"/>
+                </a:solidFill>
+                <a:latin typeface="Calibri" panose="020F0502020204030204" pitchFamily="34" charset="0"/>
+              </a:rPr>
+              <a:t>GEOKISAN LOAN JOURNEY:   [ 01. DEALER INTAKE ]  ⟶  [ 02. MONSOON MONITORING ]  ⟶  [ 03. HARVEST REPAYMENT ]</a:t>
+            </a:r>
+          </a:p>
+        </p:txBody>
+      </p:sp>
+      <p:graphicFrame>
+        <p:nvGraphicFramePr>
+          <p:cNvPr id="31" name="Table 30">
+            <a:extLst>
+              <a:ext uri="{FF2B5EF4-FFF2-40B4-BE49-F238E27FC236}">
+                <a16:creationId xmlns:a16="http://schemas.microsoft.com/office/drawing/2014/main" id="{59321EC0-8CEA-4042-A5CF-6A5460113646}"/>
+              </a:ext>
+            </a:extLst>
+          </p:cNvPr>
+          <p:cNvGraphicFramePr>
+            <a:graphicFrameLocks noGrp="1"/>
+          </p:cNvGraphicFramePr>
+          <p:nvPr>
+            <p:extLst>
+              <p:ext uri="{D42A27DB-BD31-4B8C-83A1-F6EECF244321}">
+                <p14:modId xmlns:p14="http://schemas.microsoft.com/office/powerpoint/2010/main" val="1697251906"/>
+              </p:ext>
+            </p:extLst>
+          </p:nvPr>
+        </p:nvGraphicFramePr>
+        <p:xfrm>
+          <a:off x="228599" y="4191000"/>
+          <a:ext cx="10236200" cy="2971800"/>
+        </p:xfrm>
+        <a:graphic>
+          <a:graphicData uri="http://schemas.openxmlformats.org/drawingml/2006/table">
+            <a:tbl>
+              <a:tblPr firstRow="1" bandRow="1">
+                <a:tableStyleId>{5C22544A-7EE6-4342-B048-85BDC9FD1C3A}</a:tableStyleId>
+              </a:tblPr>
+              <a:tblGrid>
+                <a:gridCol w="1219200">
+                  <a:extLst>
+                    <a:ext uri="{9D8B030D-6E8A-4147-A177-3AD203B41FA5}">
+                      <a16:colId xmlns:a16="http://schemas.microsoft.com/office/drawing/2014/main" val="1445548834"/>
+                    </a:ext>
+                  </a:extLst>
+                </a:gridCol>
+                <a:gridCol w="2997200">
+                  <a:extLst>
+                    <a:ext uri="{9D8B030D-6E8A-4147-A177-3AD203B41FA5}">
+                      <a16:colId xmlns:a16="http://schemas.microsoft.com/office/drawing/2014/main" val="2860288188"/>
+                    </a:ext>
+                  </a:extLst>
+                </a:gridCol>
+                <a:gridCol w="2997200">
+                  <a:extLst>
+                    <a:ext uri="{9D8B030D-6E8A-4147-A177-3AD203B41FA5}">
+                      <a16:colId xmlns:a16="http://schemas.microsoft.com/office/drawing/2014/main" val="2579825648"/>
+                    </a:ext>
+                  </a:extLst>
+                </a:gridCol>
+                <a:gridCol w="3022600">
+                  <a:extLst>
+                    <a:ext uri="{9D8B030D-6E8A-4147-A177-3AD203B41FA5}">
+                      <a16:colId xmlns:a16="http://schemas.microsoft.com/office/drawing/2014/main" val="4047872123"/>
+                    </a:ext>
+                  </a:extLst>
+                </a:gridCol>
+              </a:tblGrid>
+              <a:tr h="495300">
+                <a:tc>
+                  <a:txBody>
+                    <a:bodyPr/>
+                    <a:lstStyle/>
+                    <a:p>
+                      <a:pPr algn="ctr"/>
+                      <a:r>
+                        <a:rPr lang="en-IN" sz="850" b="1">
+                          <a:solidFill>
+                            <a:srgbClr val="FFFFFF"/>
+                          </a:solidFill>
+                          <a:latin typeface="Calibri" panose="020F0502020204030204" pitchFamily="34" charset="0"/>
+                        </a:rPr>
+                        <a:t>Dimension</a:t>
+                      </a:r>
+                    </a:p>
+                  </a:txBody>
+                  <a:tcPr marL="50800" marR="50800" marT="38100" marB="38100">
+                    <a:solidFill>
+                      <a:srgbClr val="1E3A8A"/>
+                    </a:solidFill>
+                  </a:tcPr>
+                </a:tc>
+                <a:tc>
+                  <a:txBody>
+                    <a:bodyPr/>
+                    <a:lstStyle/>
+                    <a:p>
+                      <a:pPr algn="ctr"/>
+                      <a:r>
+                        <a:rPr lang="en-IN" sz="800" b="1">
+                          <a:solidFill>
+                            <a:srgbClr val="DC2626"/>
+                          </a:solidFill>
+                          <a:latin typeface="Calibri" panose="020F0502020204030204" pitchFamily="34" charset="0"/>
+                        </a:rPr>
+                        <a:t>✗ Traditional NBFCs</a:t>
+                      </a:r>
+                    </a:p>
+                    <a:p>
+                      <a:pPr algn="ctr"/>
+                      <a:r>
+                        <a:rPr lang="en-IN" sz="800" b="1">
+                          <a:solidFill>
+                            <a:srgbClr val="DC2626"/>
+                          </a:solidFill>
+                          <a:latin typeface="Calibri" panose="020F0502020204030204" pitchFamily="34" charset="0"/>
+                        </a:rPr>
+                        <a:t>(Mahindra / Shriram / Chola)</a:t>
+                      </a:r>
+                    </a:p>
+                  </a:txBody>
+                  <a:tcPr marL="50800" marR="50800" marT="38100" marB="38100">
+                    <a:solidFill>
+                      <a:srgbClr val="EEF2FF"/>
+                    </a:solidFill>
+                  </a:tcPr>
+                </a:tc>
+                <a:tc>
+                  <a:txBody>
+                    <a:bodyPr/>
+                    <a:lstStyle/>
+                    <a:p>
+                      <a:pPr algn="ctr"/>
+                      <a:r>
+                        <a:rPr lang="en-IN" sz="800" b="1">
+                          <a:solidFill>
+                            <a:srgbClr val="B45309"/>
+                          </a:solidFill>
+                          <a:latin typeface="Calibri" panose="020F0502020204030204" pitchFamily="34" charset="0"/>
+                        </a:rPr>
+                        <a:t>⚠ Current TVS Credit</a:t>
+                      </a:r>
+                    </a:p>
+                    <a:p>
+                      <a:pPr algn="ctr"/>
+                      <a:r>
+                        <a:rPr lang="en-IN" sz="800" b="1">
+                          <a:solidFill>
+                            <a:srgbClr val="B45309"/>
+                          </a:solidFill>
+                          <a:latin typeface="Calibri" panose="020F0502020204030204" pitchFamily="34" charset="0"/>
+                        </a:rPr>
+                        <a:t>(Baseline Operations)</a:t>
+                      </a:r>
+                    </a:p>
+                  </a:txBody>
+                  <a:tcPr marL="50800" marR="50800" marT="38100" marB="38100">
+                    <a:solidFill>
+                      <a:srgbClr val="FEF3C7"/>
+                    </a:solidFill>
+                  </a:tcPr>
+                </a:tc>
+                <a:tc>
+                  <a:txBody>
+                    <a:bodyPr/>
+                    <a:lstStyle/>
+                    <a:p>
+                      <a:pPr algn="ctr"/>
+                      <a:r>
+                        <a:rPr lang="en-IN" sz="850" b="1">
+                          <a:solidFill>
+                            <a:srgbClr val="FFFFFF"/>
+                          </a:solidFill>
+                          <a:latin typeface="Calibri" panose="020F0502020204030204" pitchFamily="34" charset="0"/>
+                        </a:rPr>
+                        <a:t>✓ GeoKisan (TVS Credit)</a:t>
+                      </a:r>
+                    </a:p>
+                    <a:p>
+                      <a:pPr algn="ctr"/>
+                      <a:r>
+                        <a:rPr lang="en-IN" sz="850" b="1">
+                          <a:solidFill>
+                            <a:srgbClr val="FFFFFF"/>
+                          </a:solidFill>
+                          <a:latin typeface="Calibri" panose="020F0502020204030204" pitchFamily="34" charset="0"/>
+                        </a:rPr>
+                        <a:t>(Our Platform — Moat)</a:t>
+                      </a:r>
+                    </a:p>
+                  </a:txBody>
+                  <a:tcPr marL="50800" marR="50800" marT="38100" marB="38100">
+                    <a:solidFill>
+                      <a:srgbClr val="16A34A"/>
+                    </a:solidFill>
+                  </a:tcPr>
+                </a:tc>
+                <a:extLst>
+                  <a:ext uri="{0D108BD9-81ED-4DB2-BD59-A6C34878D82A}">
+                    <a16:rowId xmlns:a16="http://schemas.microsoft.com/office/drawing/2014/main" val="3415662938"/>
+                  </a:ext>
+                </a:extLst>
+              </a:tr>
+              <a:tr h="495300">
+                <a:tc>
+                  <a:txBody>
+                    <a:bodyPr/>
+                    <a:lstStyle/>
+                    <a:p>
+                      <a:pPr algn="ctr"/>
+                      <a:r>
+                        <a:rPr lang="en-IN" sz="800" b="1">
+                          <a:solidFill>
+                            <a:srgbClr val="FFFFFF"/>
+                          </a:solidFill>
+                          <a:latin typeface="Calibri" panose="020F0502020204030204" pitchFamily="34" charset="0"/>
+                        </a:rPr>
+                        <a:t>Eligibility</a:t>
+                      </a:r>
+                    </a:p>
+                  </a:txBody>
+                  <a:tcPr marL="50800" marR="50800" marT="38100" marB="38100">
+                    <a:solidFill>
+                      <a:srgbClr val="1E3A8A"/>
+                    </a:solidFill>
+                  </a:tcPr>
+                </a:tc>
+                <a:tc>
+                  <a:txBody>
+                    <a:bodyPr/>
+                    <a:lstStyle/>
+                    <a:p>
+                      <a:pPr algn="l"/>
+                      <a:r>
+                        <a:rPr lang="en-IN" sz="750" b="0">
+                          <a:solidFill>
+                            <a:srgbClr val="DC2626"/>
+                          </a:solidFill>
+                          <a:latin typeface="Calibri" panose="020F0502020204030204" pitchFamily="34" charset="0"/>
+                        </a:rPr>
+                        <a:t>✗ CIBIL ≥ 650 mandatory</a:t>
+                      </a:r>
+                    </a:p>
+                    <a:p>
+                      <a:pPr algn="l"/>
+                      <a:r>
+                        <a:rPr lang="en-IN" sz="750" b="0">
+                          <a:solidFill>
+                            <a:srgbClr val="DC2626"/>
+                          </a:solidFill>
+                          <a:latin typeface="Calibri" panose="020F0502020204030204" pitchFamily="34" charset="0"/>
+                        </a:rPr>
+                        <a:t>✗ Excludes 65%+ smallholders</a:t>
+                      </a:r>
+                    </a:p>
+                  </a:txBody>
+                  <a:tcPr marL="50800" marR="50800" marT="38100" marB="38100">
+                    <a:solidFill>
+                      <a:srgbClr val="F8FAFF"/>
+                    </a:solidFill>
+                  </a:tcPr>
+                </a:tc>
+                <a:tc>
+                  <a:txBody>
+                    <a:bodyPr/>
+                    <a:lstStyle/>
+                    <a:p>
+                      <a:pPr algn="l"/>
+                      <a:r>
+                        <a:rPr lang="en-IN" sz="750" b="0">
+                          <a:solidFill>
+                            <a:srgbClr val="B45309"/>
+                          </a:solidFill>
+                          <a:latin typeface="Calibri" panose="020F0502020204030204" pitchFamily="34" charset="0"/>
+                        </a:rPr>
+                        <a:t>⚠ Manual thin-file review</a:t>
+                      </a:r>
+                    </a:p>
+                    <a:p>
+                      <a:pPr algn="l"/>
+                      <a:r>
+                        <a:rPr lang="en-IN" sz="750" b="0">
+                          <a:solidFill>
+                            <a:srgbClr val="B45309"/>
+                          </a:solidFill>
+                          <a:latin typeface="Calibri" panose="020F0502020204030204" pitchFamily="34" charset="0"/>
+                        </a:rPr>
+                        <a:t>⚠ Physical visit required</a:t>
+                      </a:r>
+                    </a:p>
+                  </a:txBody>
+                  <a:tcPr marL="50800" marR="50800" marT="38100" marB="38100">
+                    <a:solidFill>
+                      <a:srgbClr val="FFFDF5"/>
+                    </a:solidFill>
+                  </a:tcPr>
+                </a:tc>
+                <a:tc>
+                  <a:txBody>
+                    <a:bodyPr/>
+                    <a:lstStyle/>
+                    <a:p>
+                      <a:pPr algn="l"/>
+                      <a:r>
+                        <a:rPr lang="en-IN" sz="750" b="1">
+                          <a:solidFill>
+                            <a:srgbClr val="14532D"/>
+                          </a:solidFill>
+                          <a:latin typeface="Calibri" panose="020F0502020204030204" pitchFamily="34" charset="0"/>
+                        </a:rPr>
+                        <a:t>✓ Satellite SOC + Account Aggregator</a:t>
+                      </a:r>
+                    </a:p>
+                    <a:p>
+                      <a:pPr algn="l"/>
+                      <a:r>
+                        <a:rPr lang="en-IN" sz="750" b="1">
+                          <a:solidFill>
+                            <a:srgbClr val="14532D"/>
+                          </a:solidFill>
+                          <a:latin typeface="Calibri" panose="020F0502020204030204" pitchFamily="34" charset="0"/>
+                        </a:rPr>
+                        <a:t>✓ No CIBIL floor — zero exclusion</a:t>
+                      </a:r>
+                    </a:p>
+                  </a:txBody>
+                  <a:tcPr marL="50800" marR="50800" marT="38100" marB="38100">
+                    <a:solidFill>
+                      <a:srgbClr val="F0FDF4"/>
+                    </a:solidFill>
+                  </a:tcPr>
+                </a:tc>
+                <a:extLst>
+                  <a:ext uri="{0D108BD9-81ED-4DB2-BD59-A6C34878D82A}">
+                    <a16:rowId xmlns:a16="http://schemas.microsoft.com/office/drawing/2014/main" val="3653428629"/>
+                  </a:ext>
+                </a:extLst>
+              </a:tr>
+              <a:tr h="495300">
+                <a:tc>
+                  <a:txBody>
+                    <a:bodyPr/>
+                    <a:lstStyle/>
+                    <a:p>
+                      <a:pPr algn="ctr"/>
+                      <a:r>
+                        <a:rPr lang="en-IN" sz="800" b="1">
+                          <a:solidFill>
+                            <a:srgbClr val="FFFFFF"/>
+                          </a:solidFill>
+                          <a:latin typeface="Calibri" panose="020F0502020204030204" pitchFamily="34" charset="0"/>
+                        </a:rPr>
+                        <a:t>Speed (TAT)</a:t>
+                      </a:r>
+                    </a:p>
+                  </a:txBody>
+                  <a:tcPr marL="50800" marR="50800" marT="38100" marB="38100">
+                    <a:solidFill>
+                      <a:srgbClr val="1E3A8A"/>
+                    </a:solidFill>
+                  </a:tcPr>
+                </a:tc>
+                <a:tc>
+                  <a:txBody>
+                    <a:bodyPr/>
+                    <a:lstStyle/>
+                    <a:p>
+                      <a:pPr algn="l"/>
+                      <a:r>
+                        <a:rPr lang="en-IN" sz="750" b="0">
+                          <a:solidFill>
+                            <a:srgbClr val="DC2626"/>
+                          </a:solidFill>
+                          <a:latin typeface="Calibri" panose="020F0502020204030204" pitchFamily="34" charset="0"/>
+                        </a:rPr>
+                        <a:t>✗ 5–10 business days</a:t>
+                      </a:r>
+                    </a:p>
+                    <a:p>
+                      <a:pPr algn="l"/>
+                      <a:r>
+                        <a:rPr lang="en-IN" sz="750" b="0">
+                          <a:solidFill>
+                            <a:srgbClr val="DC2626"/>
+                          </a:solidFill>
+                          <a:latin typeface="Calibri" panose="020F0502020204030204" pitchFamily="34" charset="0"/>
+                        </a:rPr>
+                        <a:t>✗ Field officer bottleneck</a:t>
+                      </a:r>
+                    </a:p>
+                  </a:txBody>
+                  <a:tcPr marL="50800" marR="50800" marT="38100" marB="38100">
+                    <a:solidFill>
+                      <a:srgbClr val="F8FAFF"/>
+                    </a:solidFill>
+                  </a:tcPr>
+                </a:tc>
+                <a:tc>
+                  <a:txBody>
+                    <a:bodyPr/>
+                    <a:lstStyle/>
+                    <a:p>
+                      <a:pPr algn="l"/>
+                      <a:r>
+                        <a:rPr lang="en-IN" sz="750" b="0">
+                          <a:solidFill>
+                            <a:srgbClr val="B45309"/>
+                          </a:solidFill>
+                          <a:latin typeface="Calibri" panose="020F0502020204030204" pitchFamily="34" charset="0"/>
+                        </a:rPr>
+                        <a:t>⚠ 7–10 days field visit</a:t>
+                      </a:r>
+                    </a:p>
+                    <a:p>
+                      <a:pPr algn="l"/>
+                      <a:r>
+                        <a:rPr lang="en-IN" sz="750" b="0">
+                          <a:solidFill>
+                            <a:srgbClr val="B45309"/>
+                          </a:solidFill>
+                          <a:latin typeface="Calibri" panose="020F0502020204030204" pitchFamily="34" charset="0"/>
+                        </a:rPr>
+                        <a:t>⚠ Manual underwriting</a:t>
+                      </a:r>
+                    </a:p>
+                  </a:txBody>
+                  <a:tcPr marL="50800" marR="50800" marT="38100" marB="38100">
+                    <a:solidFill>
+                      <a:srgbClr val="FFFDF5"/>
+                    </a:solidFill>
+                  </a:tcPr>
+                </a:tc>
+                <a:tc>
+                  <a:txBody>
+                    <a:bodyPr/>
+                    <a:lstStyle/>
+                    <a:p>
+                      <a:pPr algn="l"/>
+                      <a:r>
+                        <a:rPr lang="en-IN" sz="750" b="1">
+                          <a:solidFill>
+                            <a:srgbClr val="14532D"/>
+                          </a:solidFill>
+                          <a:latin typeface="Calibri" panose="020F0502020204030204" pitchFamily="34" charset="0"/>
+                        </a:rPr>
+                        <a:t>✓ &lt; 3 Minutes automated</a:t>
+                      </a:r>
+                    </a:p>
+                    <a:p>
+                      <a:pPr algn="l"/>
+                      <a:r>
+                        <a:rPr lang="en-IN" sz="750" b="1">
+                          <a:solidFill>
+                            <a:srgbClr val="14532D"/>
+                          </a:solidFill>
+                          <a:latin typeface="Calibri" panose="020F0502020204030204" pitchFamily="34" charset="0"/>
+                        </a:rPr>
+                        <a:t>✓ Same-day dealer sanction</a:t>
+                      </a:r>
+                    </a:p>
+                  </a:txBody>
+                  <a:tcPr marL="50800" marR="50800" marT="38100" marB="38100">
+                    <a:solidFill>
+                      <a:srgbClr val="F0FDF4"/>
+                    </a:solidFill>
+                  </a:tcPr>
+                </a:tc>
+                <a:extLst>
+                  <a:ext uri="{0D108BD9-81ED-4DB2-BD59-A6C34878D82A}">
+                    <a16:rowId xmlns:a16="http://schemas.microsoft.com/office/drawing/2014/main" val="3777215196"/>
+                  </a:ext>
+                </a:extLst>
+              </a:tr>
+              <a:tr h="495300">
+                <a:tc>
+                  <a:txBody>
+                    <a:bodyPr/>
+                    <a:lstStyle/>
+                    <a:p>
+                      <a:pPr algn="ctr"/>
+                      <a:r>
+                        <a:rPr lang="en-IN" sz="800" b="1">
+                          <a:solidFill>
+                            <a:srgbClr val="FFFFFF"/>
+                          </a:solidFill>
+                          <a:latin typeface="Calibri" panose="020F0502020204030204" pitchFamily="34" charset="0"/>
+                        </a:rPr>
+                        <a:t>Kharif Uptime</a:t>
+                      </a:r>
+                    </a:p>
+                  </a:txBody>
+                  <a:tcPr marL="50800" marR="50800" marT="38100" marB="38100">
+                    <a:solidFill>
+                      <a:srgbClr val="1E3A8A"/>
+                    </a:solidFill>
+                  </a:tcPr>
+                </a:tc>
+                <a:tc>
+                  <a:txBody>
+                    <a:bodyPr/>
+                    <a:lstStyle/>
+                    <a:p>
+                      <a:pPr algn="l"/>
+                      <a:r>
+                        <a:rPr lang="en-IN" sz="750" b="0">
+                          <a:solidFill>
+                            <a:srgbClr val="DC2626"/>
+                          </a:solidFill>
+                          <a:latin typeface="Calibri" panose="020F0502020204030204" pitchFamily="34" charset="0"/>
+                        </a:rPr>
+                        <a:t>✗ Halts Jun–Oct (cloud blind)</a:t>
+                      </a:r>
+                    </a:p>
+                    <a:p>
+                      <a:pPr algn="l"/>
+                      <a:r>
+                        <a:rPr lang="en-IN" sz="750" b="0">
+                          <a:solidFill>
+                            <a:srgbClr val="DC2626"/>
+                          </a:solidFill>
+                          <a:latin typeface="Calibri" panose="020F0502020204030204" pitchFamily="34" charset="0"/>
+                        </a:rPr>
+                        <a:t>✗ 60% of farm loans mis-timed</a:t>
+                      </a:r>
+                    </a:p>
+                  </a:txBody>
+                  <a:tcPr marL="50800" marR="50800" marT="38100" marB="38100">
+                    <a:solidFill>
+                      <a:srgbClr val="F8FAFF"/>
+                    </a:solidFill>
+                  </a:tcPr>
+                </a:tc>
+                <a:tc>
+                  <a:txBody>
+                    <a:bodyPr/>
+                    <a:lstStyle/>
+                    <a:p>
+                      <a:pPr algn="l"/>
+                      <a:r>
+                        <a:rPr lang="en-IN" sz="750" b="0">
+                          <a:solidFill>
+                            <a:srgbClr val="B45309"/>
+                          </a:solidFill>
+                          <a:latin typeface="Calibri" panose="020F0502020204030204" pitchFamily="34" charset="0"/>
+                        </a:rPr>
+                        <a:t>⚠ Halts Kharif season</a:t>
+                      </a:r>
+                    </a:p>
+                    <a:p>
+                      <a:pPr algn="l"/>
+                      <a:r>
+                        <a:rPr lang="en-IN" sz="750" b="0">
+                          <a:solidFill>
+                            <a:srgbClr val="B45309"/>
+                          </a:solidFill>
+                          <a:latin typeface="Calibri" panose="020F0502020204030204" pitchFamily="34" charset="0"/>
+                        </a:rPr>
+                        <a:t>⚠ No SAR fallback</a:t>
+                      </a:r>
+                    </a:p>
+                  </a:txBody>
+                  <a:tcPr marL="50800" marR="50800" marT="38100" marB="38100">
+                    <a:solidFill>
+                      <a:srgbClr val="FFFDF5"/>
+                    </a:solidFill>
+                  </a:tcPr>
+                </a:tc>
+                <a:tc>
+                  <a:txBody>
+                    <a:bodyPr/>
+                    <a:lstStyle/>
+                    <a:p>
+                      <a:pPr algn="l"/>
+                      <a:r>
+                        <a:rPr lang="en-IN" sz="750" b="1">
+                          <a:solidFill>
+                            <a:srgbClr val="14532D"/>
+                          </a:solidFill>
+                          <a:latin typeface="Calibri" panose="020F0502020204030204" pitchFamily="34" charset="0"/>
+                        </a:rPr>
+                        <a:t>✓ 100% uptime via CloudGap-CG</a:t>
+                      </a:r>
+                    </a:p>
+                    <a:p>
+                      <a:pPr algn="l"/>
+                      <a:r>
+                        <a:rPr lang="en-IN" sz="750" b="1">
+                          <a:solidFill>
+                            <a:srgbClr val="14532D"/>
+                          </a:solidFill>
+                          <a:latin typeface="Calibri" panose="020F0502020204030204" pitchFamily="34" charset="0"/>
+                        </a:rPr>
+                        <a:t>✓ PSNR 34.6 dB inpainting</a:t>
+                      </a:r>
+                    </a:p>
+                  </a:txBody>
+                  <a:tcPr marL="50800" marR="50800" marT="38100" marB="38100">
+                    <a:solidFill>
+                      <a:srgbClr val="F0FDF4"/>
+                    </a:solidFill>
+                  </a:tcPr>
+                </a:tc>
+                <a:extLst>
+                  <a:ext uri="{0D108BD9-81ED-4DB2-BD59-A6C34878D82A}">
+                    <a16:rowId xmlns:a16="http://schemas.microsoft.com/office/drawing/2014/main" val="2778783689"/>
+                  </a:ext>
+                </a:extLst>
+              </a:tr>
+              <a:tr h="495300">
+                <a:tc>
+                  <a:txBody>
+                    <a:bodyPr/>
+                    <a:lstStyle/>
+                    <a:p>
+                      <a:pPr algn="ctr"/>
+                      <a:r>
+                        <a:rPr lang="en-IN" sz="800" b="1">
+                          <a:solidFill>
+                            <a:srgbClr val="FFFFFF"/>
+                          </a:solidFill>
+                          <a:latin typeface="Calibri" panose="020F0502020204030204" pitchFamily="34" charset="0"/>
+                        </a:rPr>
+                        <a:t>Repayment</a:t>
+                      </a:r>
+                    </a:p>
+                  </a:txBody>
+                  <a:tcPr marL="50800" marR="50800" marT="38100" marB="38100">
+                    <a:solidFill>
+                      <a:srgbClr val="1E3A8A"/>
+                    </a:solidFill>
+                  </a:tcPr>
+                </a:tc>
+                <a:tc>
+                  <a:txBody>
+                    <a:bodyPr/>
+                    <a:lstStyle/>
+                    <a:p>
+                      <a:pPr algn="l"/>
+                      <a:r>
+                        <a:rPr lang="en-IN" sz="750" b="0">
+                          <a:solidFill>
+                            <a:srgbClr val="DC2626"/>
+                          </a:solidFill>
+                          <a:latin typeface="Calibri" panose="020F0502020204030204" pitchFamily="34" charset="0"/>
+                        </a:rPr>
+                        <a:t>✗ Flat monthly EMI</a:t>
+                      </a:r>
+                    </a:p>
+                    <a:p>
+                      <a:pPr algn="l"/>
+                      <a:r>
+                        <a:rPr lang="en-IN" sz="750" b="0">
+                          <a:solidFill>
+                            <a:srgbClr val="DC2626"/>
+                          </a:solidFill>
+                          <a:latin typeface="Calibri" panose="020F0502020204030204" pitchFamily="34" charset="0"/>
+                        </a:rPr>
+                        <a:t>✗ ~7.2% Agri 90-day NPA</a:t>
+                      </a:r>
+                    </a:p>
+                  </a:txBody>
+                  <a:tcPr marL="50800" marR="50800" marT="38100" marB="38100">
+                    <a:solidFill>
+                      <a:srgbClr val="F8FAFF"/>
+                    </a:solidFill>
+                  </a:tcPr>
+                </a:tc>
+                <a:tc>
+                  <a:txBody>
+                    <a:bodyPr/>
+                    <a:lstStyle/>
+                    <a:p>
+                      <a:pPr algn="l"/>
+                      <a:r>
+                        <a:rPr lang="en-IN" sz="750" b="0">
+                          <a:solidFill>
+                            <a:srgbClr val="B45309"/>
+                          </a:solidFill>
+                          <a:latin typeface="Calibri" panose="020F0502020204030204" pitchFamily="34" charset="0"/>
+                        </a:rPr>
+                        <a:t>⚠ Flat EMI structure</a:t>
+                      </a:r>
+                    </a:p>
+                    <a:p>
+                      <a:pPr algn="l"/>
+                      <a:r>
+                        <a:rPr lang="en-IN" sz="750" b="0">
+                          <a:solidFill>
+                            <a:srgbClr val="B45309"/>
+                          </a:solidFill>
+                          <a:latin typeface="Calibri" panose="020F0502020204030204" pitchFamily="34" charset="0"/>
+                        </a:rPr>
+                        <a:t>⚠ Liquidity mismatch at sowing</a:t>
+                      </a:r>
+                    </a:p>
+                  </a:txBody>
+                  <a:tcPr marL="50800" marR="50800" marT="38100" marB="38100">
+                    <a:solidFill>
+                      <a:srgbClr val="FFFDF5"/>
+                    </a:solidFill>
+                  </a:tcPr>
+                </a:tc>
+                <a:tc>
+                  <a:txBody>
+                    <a:bodyPr/>
+                    <a:lstStyle/>
+                    <a:p>
+                      <a:pPr algn="l"/>
+                      <a:r>
+                        <a:rPr lang="en-IN" sz="750" b="1">
+                          <a:solidFill>
+                            <a:srgbClr val="14532D"/>
+                          </a:solidFill>
+                          <a:latin typeface="Calibri" panose="020F0502020204030204" pitchFamily="34" charset="0"/>
+                        </a:rPr>
+                        <a:t>✓ ₹1,500 lean + harvest bullet</a:t>
+                      </a:r>
+                    </a:p>
+                    <a:p>
+                      <a:pPr algn="l"/>
+                      <a:r>
+                        <a:rPr lang="en-IN" sz="750" b="1">
+                          <a:solidFill>
+                            <a:srgbClr val="14532D"/>
+                          </a:solidFill>
+                          <a:latin typeface="Calibri" panose="020F0502020204030204" pitchFamily="34" charset="0"/>
+                        </a:rPr>
+                        <a:t>✓ 34.5% NPA reduction</a:t>
+                      </a:r>
+                    </a:p>
+                  </a:txBody>
+                  <a:tcPr marL="50800" marR="50800" marT="38100" marB="38100">
+                    <a:solidFill>
+                      <a:srgbClr val="F0FDF4"/>
+                    </a:solidFill>
+                  </a:tcPr>
+                </a:tc>
+                <a:extLst>
+                  <a:ext uri="{0D108BD9-81ED-4DB2-BD59-A6C34878D82A}">
+                    <a16:rowId xmlns:a16="http://schemas.microsoft.com/office/drawing/2014/main" val="3770611096"/>
+                  </a:ext>
+                </a:extLst>
+              </a:tr>
+              <a:tr h="495300">
+                <a:tc>
+                  <a:txBody>
+                    <a:bodyPr/>
+                    <a:lstStyle/>
+                    <a:p>
+                      <a:pPr algn="ctr"/>
+                      <a:r>
+                        <a:rPr lang="en-IN" sz="800" b="1">
+                          <a:solidFill>
+                            <a:srgbClr val="FFFFFF"/>
+                          </a:solidFill>
+                          <a:latin typeface="Calibri" panose="020F0502020204030204" pitchFamily="34" charset="0"/>
+                        </a:rPr>
+                        <a:t>Collateral Cost</a:t>
+                      </a:r>
+                    </a:p>
+                  </a:txBody>
+                  <a:tcPr marL="50800" marR="50800" marT="38100" marB="38100">
+                    <a:solidFill>
+                      <a:srgbClr val="1E3A8A"/>
+                    </a:solidFill>
+                  </a:tcPr>
+                </a:tc>
+                <a:tc>
+                  <a:txBody>
+                    <a:bodyPr/>
+                    <a:lstStyle/>
+                    <a:p>
+                      <a:pPr algn="l"/>
+                      <a:r>
+                        <a:rPr lang="en-IN" sz="750" b="0">
+                          <a:solidFill>
+                            <a:srgbClr val="DC2626"/>
+                          </a:solidFill>
+                          <a:latin typeface="Calibri" panose="020F0502020204030204" pitchFamily="34" charset="0"/>
+                        </a:rPr>
+                        <a:t>✗ Physical inspection ₹4,200/file</a:t>
+                      </a:r>
+                    </a:p>
+                    <a:p>
+                      <a:pPr algn="l"/>
+                      <a:r>
+                        <a:rPr lang="en-IN" sz="750" b="0">
+                          <a:solidFill>
+                            <a:srgbClr val="DC2626"/>
+                          </a:solidFill>
+                          <a:latin typeface="Calibri" panose="020F0502020204030204" pitchFamily="34" charset="0"/>
+                        </a:rPr>
+                        <a:t>✗ 7–10 days, fraud-vulnerable</a:t>
+                      </a:r>
+                    </a:p>
+                  </a:txBody>
+                  <a:tcPr marL="50800" marR="50800" marT="38100" marB="38100">
+                    <a:solidFill>
+                      <a:srgbClr val="F8FAFF"/>
+                    </a:solidFill>
+                  </a:tcPr>
+                </a:tc>
+                <a:tc>
+                  <a:txBody>
+                    <a:bodyPr/>
+                    <a:lstStyle/>
+                    <a:p>
+                      <a:pPr algn="l"/>
+                      <a:r>
+                        <a:rPr lang="en-IN" sz="750" b="0">
+                          <a:solidFill>
+                            <a:srgbClr val="B45309"/>
+                          </a:solidFill>
+                          <a:latin typeface="Calibri" panose="020F0502020204030204" pitchFamily="34" charset="0"/>
+                        </a:rPr>
+                        <a:t>⚠ Physical inspection ₹4,200/file</a:t>
+                      </a:r>
+                    </a:p>
+                    <a:p>
+                      <a:pPr algn="l"/>
+                      <a:r>
+                        <a:rPr lang="en-IN" sz="750" b="0">
+                          <a:solidFill>
+                            <a:srgbClr val="B45309"/>
+                          </a:solidFill>
+                          <a:latin typeface="Calibri" panose="020F0502020204030204" pitchFamily="34" charset="0"/>
+                        </a:rPr>
+                        <a:t>⚠ Ghost land &amp; duplicate risk</a:t>
+                      </a:r>
+                    </a:p>
+                  </a:txBody>
+                  <a:tcPr marL="50800" marR="50800" marT="38100" marB="38100">
+                    <a:solidFill>
+                      <a:srgbClr val="FFFDF5"/>
+                    </a:solidFill>
+                  </a:tcPr>
+                </a:tc>
+                <a:tc>
+                  <a:txBody>
+                    <a:bodyPr/>
+                    <a:lstStyle/>
+                    <a:p>
+                      <a:pPr algn="l"/>
+                      <a:r>
+                        <a:rPr lang="en-IN" sz="750" b="1">
+                          <a:solidFill>
+                            <a:srgbClr val="14532D"/>
+                          </a:solidFill>
+                          <a:latin typeface="Calibri" panose="020F0502020204030204" pitchFamily="34" charset="0"/>
+                        </a:rPr>
+                        <a:t>✓ AI H3 + satellite ₹120/file</a:t>
+                      </a:r>
+                    </a:p>
+                    <a:p>
+                      <a:pPr algn="l"/>
+                      <a:r>
+                        <a:rPr lang="en-IN" sz="750" b="1">
+                          <a:solidFill>
+                            <a:srgbClr val="14532D"/>
+                          </a:solidFill>
+                          <a:latin typeface="Calibri" panose="020F0502020204030204" pitchFamily="34" charset="0"/>
+                        </a:rPr>
+                        <a:t>✓ 97% OpEx saving · fraud-proof</a:t>
+                      </a:r>
+                    </a:p>
+                  </a:txBody>
+                  <a:tcPr marL="50800" marR="50800" marT="38100" marB="38100">
+                    <a:solidFill>
+                      <a:srgbClr val="F0FDF4"/>
+                    </a:solidFill>
+                  </a:tcPr>
+                </a:tc>
+                <a:extLst>
+                  <a:ext uri="{0D108BD9-81ED-4DB2-BD59-A6C34878D82A}">
+                    <a16:rowId xmlns:a16="http://schemas.microsoft.com/office/drawing/2014/main" val="438520509"/>
+                  </a:ext>
+                </a:extLst>
+              </a:tr>
+            </a:tbl>
+          </a:graphicData>
+        </a:graphic>
+      </p:graphicFrame>
+      <p:sp>
+        <p:nvSpPr>
+          <p:cNvPr id="32" name="Rectangle 31">
+            <a:extLst>
+              <a:ext uri="{FF2B5EF4-FFF2-40B4-BE49-F238E27FC236}">
+                <a16:creationId xmlns:a16="http://schemas.microsoft.com/office/drawing/2014/main" id="{1B7A1A98-7A55-40EC-A4BA-8A48E22D4F91}"/>
+              </a:ext>
+            </a:extLst>
+          </p:cNvPr>
+          <p:cNvSpPr/>
+          <p:nvPr/>
+        </p:nvSpPr>
+        <p:spPr>
+          <a:xfrm>
+            <a:off x="0" y="7213600"/>
+            <a:ext cx="10693400" cy="342900"/>
           </a:xfrm>
           <a:prstGeom prst="rect">
             <a:avLst/>
@@ -3284,18 +5648,34 @@
           <a:solidFill>
             <a:srgbClr val="1E3A8A"/>
           </a:solidFill>
-          <a:ln>
+          <a:ln w="25400" cap="flat" cmpd="sng" algn="ctr">
             <a:noFill/>
+            <a:prstDash val="solid"/>
           </a:ln>
+          <a:effectLst/>
+          <a:extLst>
+            <a:ext uri="{91240B29-F687-4F45-9708-019B960494DF}">
+              <a14:hiddenLine xmlns:a14="http://schemas.microsoft.com/office/drawing/2010/main" w="25400" cap="flat" cmpd="sng" algn="ctr">
+                <a:solidFill>
+                  <a:schemeClr val="accent1">
+                    <a:shade val="50000"/>
+                  </a:schemeClr>
+                </a:solidFill>
+                <a:prstDash val="solid"/>
+              </a14:hiddenLine>
+            </a:ext>
+          </a:extLst>
         </p:spPr>
         <p:style>
-          <a:lnRef idx="1">
-            <a:schemeClr val="accent1"/>
+          <a:lnRef idx="2">
+            <a:schemeClr val="accent1">
+              <a:shade val="50000"/>
+            </a:schemeClr>
           </a:lnRef>
-          <a:fillRef idx="3">
+          <a:fillRef idx="1">
             <a:schemeClr val="accent1"/>
           </a:fillRef>
-          <a:effectRef idx="2">
+          <a:effectRef idx="0">
             <a:schemeClr val="accent1"/>
           </a:effectRef>
           <a:fontRef idx="minor">
@@ -3307,2899 +5687,14 @@
           <a:lstStyle/>
           <a:p>
             <a:pPr algn="ctr"/>
-          </a:p>
-        </p:txBody>
-      </p:sp>
-      <p:sp>
-        <p:nvSpPr>
-          <p:cNvPr id="8" name="TextBox 7"/>
-          <p:cNvSpPr txBox="1"/>
-          <p:nvPr/>
-        </p:nvSpPr>
-        <p:spPr>
-          <a:xfrm>
-            <a:off x="1224000" y="5399999"/>
-            <a:ext cx="1008000" cy="1620000"/>
-          </a:xfrm>
-          <a:prstGeom prst="rect">
-            <a:avLst/>
-          </a:prstGeom>
-          <a:noFill/>
-        </p:spPr>
-        <p:txBody>
-          <a:bodyPr wrap="square">
-            <a:spAutoFit/>
-          </a:bodyPr>
-          <a:lstStyle/>
-          <a:p>
-            <a:pPr algn="ctr"/>
-            <a:r>
-              <a:rPr sz="1300" b="1" i="0">
-                <a:solidFill>
-                  <a:srgbClr val="FFFFFF"/>
-                </a:solidFill>
+            <a:r>
+              <a:rPr lang="en-IN" sz="750">
+                <a:solidFill>
+                  <a:srgbClr val="BFDBFE"/>
+                </a:solidFill>
+                <a:latin typeface="Calibri" panose="020F0502020204030204" pitchFamily="34" charset="0"/>
               </a:rPr>
-              <a:t>1</a:t>
-            </a:r>
-          </a:p>
-        </p:txBody>
-      </p:sp>
-      <p:sp>
-        <p:nvSpPr>
-          <p:cNvPr id="9" name="TextBox 8"/>
-          <p:cNvSpPr txBox="1"/>
-          <p:nvPr/>
-        </p:nvSpPr>
-        <p:spPr>
-          <a:xfrm>
-            <a:off x="2520000" y="5327999"/>
-            <a:ext cx="292800" cy="2160000"/>
-          </a:xfrm>
-          <a:prstGeom prst="rect">
-            <a:avLst/>
-          </a:prstGeom>
-          <a:noFill/>
-        </p:spPr>
-        <p:txBody>
-          <a:bodyPr wrap="square">
-            <a:spAutoFit/>
-          </a:bodyPr>
-          <a:lstStyle/>
-          <a:p>
-            <a:pPr algn="l"/>
-            <a:r>
-              <a:rPr sz="1200" b="1" i="0">
-                <a:solidFill>
-                  <a:srgbClr val="1E3A8A"/>
-                </a:solidFill>
-              </a:rPr>
-              <a:t>DEALERSHIP INTAKE</a:t>
-            </a:r>
-          </a:p>
-        </p:txBody>
-      </p:sp>
-      <p:sp>
-        <p:nvSpPr>
-          <p:cNvPr id="10" name="TextBox 9"/>
-          <p:cNvSpPr txBox="1"/>
-          <p:nvPr/>
-        </p:nvSpPr>
-        <p:spPr>
-          <a:xfrm>
-            <a:off x="1440000" y="7019999"/>
-            <a:ext cx="1192800" cy="1080000"/>
-          </a:xfrm>
-          <a:prstGeom prst="rect">
-            <a:avLst/>
-          </a:prstGeom>
-          <a:noFill/>
-        </p:spPr>
-        <p:txBody>
-          <a:bodyPr wrap="square">
-            <a:spAutoFit/>
-          </a:bodyPr>
-          <a:lstStyle/>
-          <a:p>
-            <a:pPr algn="l"/>
-            <a:r>
-              <a:rPr sz="900" b="0" i="0">
-                <a:solidFill>
-                  <a:srgbClr val="64748B"/>
-                </a:solidFill>
-              </a:rPr>
-              <a:t>Satellite Field Underwriting</a:t>
-            </a:r>
-          </a:p>
-        </p:txBody>
-      </p:sp>
-      <p:sp>
-        <p:nvSpPr>
-          <p:cNvPr id="11" name="TextBox 10"/>
-          <p:cNvSpPr txBox="1"/>
-          <p:nvPr/>
-        </p:nvSpPr>
-        <p:spPr>
-          <a:xfrm>
-            <a:off x="1440000" y="8279999"/>
-            <a:ext cx="1192800" cy="7920000"/>
-          </a:xfrm>
-          <a:prstGeom prst="rect">
-            <a:avLst/>
-          </a:prstGeom>
-          <a:noFill/>
-        </p:spPr>
-        <p:txBody>
-          <a:bodyPr wrap="square">
-            <a:spAutoFit/>
-          </a:bodyPr>
-          <a:lstStyle/>
-          <a:p>
-            <a:pPr algn="l">
-              <a:spcBef>
-                <a:spcPts val="300"/>
-              </a:spcBef>
-            </a:pPr>
-            <a:r>
-              <a:rPr sz="900" b="0">
-                <a:solidFill>
-                  <a:srgbClr val="0F172A"/>
-                </a:solidFill>
-              </a:rPr>
-              <a:t>✅ Automated SOC &amp; NDVI Scan: 10m Sentinel-2 soil health + crop vigor scored in &lt; 40 seconds.</a:t>
-            </a:r>
-          </a:p>
-          <a:p>
-            <a:pPr algn="l">
-              <a:spcBef>
-                <a:spcPts val="300"/>
-              </a:spcBef>
-            </a:pPr>
-            <a:r>
-              <a:rPr sz="900" b="0">
-                <a:solidFill>
-                  <a:srgbClr val="0F172A"/>
-                </a:solidFill>
-              </a:rPr>
-              <a:t>✅ Thin-File Override: Account Aggregator cashflow replaces CIBIL bureau — no floor score required.</a:t>
-            </a:r>
-          </a:p>
-          <a:p>
-            <a:pPr algn="l">
-              <a:spcBef>
-                <a:spcPts val="300"/>
-              </a:spcBef>
-            </a:pPr>
-            <a:r>
-              <a:rPr sz="900" b="0">
-                <a:solidFill>
-                  <a:srgbClr val="0F172A"/>
-                </a:solidFill>
-              </a:rPr>
-              <a:t>✅ H3 Cadastral Cross-Check: Satellite polygon vs Bhuvan land registry flags duplicate collateral pledges.</a:t>
-            </a:r>
-          </a:p>
-          <a:p>
-            <a:pPr algn="l">
-              <a:spcBef>
-                <a:spcPts val="300"/>
-              </a:spcBef>
-            </a:pPr>
-            <a:r>
-              <a:rPr sz="900" b="0">
-                <a:solidFill>
-                  <a:srgbClr val="0F172A"/>
-                </a:solidFill>
-              </a:rPr>
-              <a:t>✅ Dealer Sanction: Score delivered to dealer tablet; approval routed in &lt; 3 minutes.</a:t>
-            </a:r>
-          </a:p>
-          <a:p>
-            <a:pPr algn="l">
-              <a:spcBef>
-                <a:spcPts val="300"/>
-              </a:spcBef>
-            </a:pPr>
-            <a:r>
-              <a:rPr sz="900" b="1">
-                <a:solidFill>
-                  <a:srgbClr val="15803D"/>
-                </a:solidFill>
-              </a:rPr>
-              <a:t>💡 Saves ₹4,080/file vs ₹4,200 physical field officer cost.</a:t>
-            </a:r>
-          </a:p>
-        </p:txBody>
-      </p:sp>
-      <p:sp>
-        <p:nvSpPr>
-          <p:cNvPr id="12" name="TextBox 11"/>
-          <p:cNvSpPr txBox="1"/>
-          <p:nvPr/>
-        </p:nvSpPr>
-        <p:spPr>
-          <a:xfrm>
-            <a:off x="3064800" y="10079999"/>
-            <a:ext cx="900000" cy="1440000"/>
-          </a:xfrm>
-          <a:prstGeom prst="rect">
-            <a:avLst/>
-          </a:prstGeom>
-          <a:noFill/>
-        </p:spPr>
-        <p:txBody>
-          <a:bodyPr wrap="square">
-            <a:spAutoFit/>
-          </a:bodyPr>
-          <a:lstStyle/>
-          <a:p>
-            <a:pPr algn="ctr"/>
-            <a:r>
-              <a:rPr sz="2000" b="1" i="0">
-                <a:solidFill>
-                  <a:srgbClr val="1E3A8A"/>
-                </a:solidFill>
-              </a:rPr>
-              <a:t>▶</a:t>
-            </a:r>
-          </a:p>
-        </p:txBody>
-      </p:sp>
-      <p:sp>
-        <p:nvSpPr>
-          <p:cNvPr id="13" name="Rectangle 12"/>
-          <p:cNvSpPr/>
-          <p:nvPr/>
-        </p:nvSpPr>
-        <p:spPr>
-          <a:xfrm>
-            <a:off x="4072800" y="5039999"/>
-            <a:ext cx="1912800" cy="11520000"/>
-          </a:xfrm>
-          <a:prstGeom prst="rect">
-            <a:avLst/>
-          </a:prstGeom>
-          <a:solidFill>
-            <a:srgbClr val="F1F5F9"/>
-          </a:solidFill>
-          <a:ln w="12700">
-            <a:solidFill>
-              <a:srgbClr val="1E3A8A"/>
-            </a:solidFill>
-          </a:ln>
-        </p:spPr>
-        <p:style>
-          <a:lnRef idx="1">
-            <a:schemeClr val="accent1"/>
-          </a:lnRef>
-          <a:fillRef idx="3">
-            <a:schemeClr val="accent1"/>
-          </a:fillRef>
-          <a:effectRef idx="2">
-            <a:schemeClr val="accent1"/>
-          </a:effectRef>
-          <a:fontRef idx="minor">
-            <a:schemeClr val="lt1"/>
-          </a:fontRef>
-        </p:style>
-        <p:txBody>
-          <a:bodyPr rtlCol="0" anchor="ctr"/>
-          <a:lstStyle/>
-          <a:p>
-            <a:pPr algn="ctr"/>
-          </a:p>
-        </p:txBody>
-      </p:sp>
-      <p:sp>
-        <p:nvSpPr>
-          <p:cNvPr id="14" name="Rectangle 13"/>
-          <p:cNvSpPr/>
-          <p:nvPr/>
-        </p:nvSpPr>
-        <p:spPr>
-          <a:xfrm>
-            <a:off x="4072800" y="5039999"/>
-            <a:ext cx="1259999" cy="2160000"/>
-          </a:xfrm>
-          <a:prstGeom prst="rect">
-            <a:avLst/>
-          </a:prstGeom>
-          <a:solidFill>
-            <a:srgbClr val="1E3A8A"/>
-          </a:solidFill>
-          <a:ln>
-            <a:noFill/>
-          </a:ln>
-        </p:spPr>
-        <p:style>
-          <a:lnRef idx="1">
-            <a:schemeClr val="accent1"/>
-          </a:lnRef>
-          <a:fillRef idx="3">
-            <a:schemeClr val="accent1"/>
-          </a:fillRef>
-          <a:effectRef idx="2">
-            <a:schemeClr val="accent1"/>
-          </a:effectRef>
-          <a:fontRef idx="minor">
-            <a:schemeClr val="lt1"/>
-          </a:fontRef>
-        </p:style>
-        <p:txBody>
-          <a:bodyPr rtlCol="0" anchor="ctr"/>
-          <a:lstStyle/>
-          <a:p>
-            <a:pPr algn="ctr"/>
-          </a:p>
-        </p:txBody>
-      </p:sp>
-      <p:sp>
-        <p:nvSpPr>
-          <p:cNvPr id="15" name="TextBox 14"/>
-          <p:cNvSpPr txBox="1"/>
-          <p:nvPr/>
-        </p:nvSpPr>
-        <p:spPr>
-          <a:xfrm>
-            <a:off x="4216800" y="5399999"/>
-            <a:ext cx="1008000" cy="1620000"/>
-          </a:xfrm>
-          <a:prstGeom prst="rect">
-            <a:avLst/>
-          </a:prstGeom>
-          <a:noFill/>
-        </p:spPr>
-        <p:txBody>
-          <a:bodyPr wrap="square">
-            <a:spAutoFit/>
-          </a:bodyPr>
-          <a:lstStyle/>
-          <a:p>
-            <a:pPr algn="ctr"/>
-            <a:r>
-              <a:rPr sz="1300" b="1" i="0">
-                <a:solidFill>
-                  <a:srgbClr val="FFFFFF"/>
-                </a:solidFill>
-              </a:rPr>
-              <a:t>2</a:t>
-            </a:r>
-          </a:p>
-        </p:txBody>
-      </p:sp>
-      <p:sp>
-        <p:nvSpPr>
-          <p:cNvPr id="16" name="TextBox 15"/>
-          <p:cNvSpPr txBox="1"/>
-          <p:nvPr/>
-        </p:nvSpPr>
-        <p:spPr>
-          <a:xfrm>
-            <a:off x="5512800" y="5327999"/>
-            <a:ext cx="292800" cy="2160000"/>
-          </a:xfrm>
-          <a:prstGeom prst="rect">
-            <a:avLst/>
-          </a:prstGeom>
-          <a:noFill/>
-        </p:spPr>
-        <p:txBody>
-          <a:bodyPr wrap="square">
-            <a:spAutoFit/>
-          </a:bodyPr>
-          <a:lstStyle/>
-          <a:p>
-            <a:pPr algn="l"/>
-            <a:r>
-              <a:rPr sz="1200" b="1" i="0">
-                <a:solidFill>
-                  <a:srgbClr val="1E3A8A"/>
-                </a:solidFill>
-              </a:rPr>
-              <a:t>MONSOON GESTATION</a:t>
-            </a:r>
-          </a:p>
-        </p:txBody>
-      </p:sp>
-      <p:sp>
-        <p:nvSpPr>
-          <p:cNvPr id="17" name="TextBox 16"/>
-          <p:cNvSpPr txBox="1"/>
-          <p:nvPr/>
-        </p:nvSpPr>
-        <p:spPr>
-          <a:xfrm>
-            <a:off x="4432800" y="7019999"/>
-            <a:ext cx="1192800" cy="1080000"/>
-          </a:xfrm>
-          <a:prstGeom prst="rect">
-            <a:avLst/>
-          </a:prstGeom>
-          <a:noFill/>
-        </p:spPr>
-        <p:txBody>
-          <a:bodyPr wrap="square">
-            <a:spAutoFit/>
-          </a:bodyPr>
-          <a:lstStyle/>
-          <a:p>
-            <a:pPr algn="l"/>
-            <a:r>
-              <a:rPr sz="900" b="0" i="0">
-                <a:solidFill>
-                  <a:srgbClr val="64748B"/>
-                </a:solidFill>
-              </a:rPr>
-              <a:t>All-Weather CloudGap-CG Monitoring</a:t>
-            </a:r>
-          </a:p>
-        </p:txBody>
-      </p:sp>
-      <p:sp>
-        <p:nvSpPr>
-          <p:cNvPr id="18" name="TextBox 17"/>
-          <p:cNvSpPr txBox="1"/>
-          <p:nvPr/>
-        </p:nvSpPr>
-        <p:spPr>
-          <a:xfrm>
-            <a:off x="4432800" y="8279999"/>
-            <a:ext cx="1192800" cy="7920000"/>
-          </a:xfrm>
-          <a:prstGeom prst="rect">
-            <a:avLst/>
-          </a:prstGeom>
-          <a:noFill/>
-        </p:spPr>
-        <p:txBody>
-          <a:bodyPr wrap="square">
-            <a:spAutoFit/>
-          </a:bodyPr>
-          <a:lstStyle/>
-          <a:p>
-            <a:pPr algn="l">
-              <a:spcBef>
-                <a:spcPts val="300"/>
-              </a:spcBef>
-            </a:pPr>
-            <a:r>
-              <a:rPr sz="900" b="0">
-                <a:solidFill>
-                  <a:srgbClr val="0F172A"/>
-                </a:solidFill>
-              </a:rPr>
-              <a:t>☁ CloudGap-CG Active (Jun–Oct): ST-DIP U-Net inpainting maintains 100% Kharif satellite visibility despite 70–80% cloud cover.</a:t>
-            </a:r>
-          </a:p>
-          <a:p>
-            <a:pPr algn="l">
-              <a:spcBef>
-                <a:spcPts val="300"/>
-              </a:spcBef>
-            </a:pPr>
-            <a:r>
-              <a:rPr sz="900" b="0">
-                <a:solidFill>
-                  <a:srgbClr val="0F172A"/>
-                </a:solidFill>
-              </a:rPr>
-              <a:t>📡 Fortnightly Sentinel-2/1 Passes: NDVI + SAR backscatter tracks crop health through cloud blindspot.</a:t>
-            </a:r>
-          </a:p>
-          <a:p>
-            <a:pPr algn="l">
-              <a:spcBef>
-                <a:spcPts val="300"/>
-              </a:spcBef>
-            </a:pPr>
-            <a:r>
-              <a:rPr sz="900" b="0">
-                <a:solidFill>
-                  <a:srgbClr val="0F172A"/>
-                </a:solidFill>
-              </a:rPr>
-              <a:t>⚠ EWS Alerts: Flood, drought, or pest distress triggers restructuring memo 14–21 days before EMI default.</a:t>
-            </a:r>
-          </a:p>
-          <a:p>
-            <a:pPr algn="l">
-              <a:spcBef>
-                <a:spcPts val="300"/>
-              </a:spcBef>
-            </a:pPr>
-            <a:r>
-              <a:rPr sz="900" b="0">
-                <a:solidFill>
-                  <a:srgbClr val="0F172A"/>
-                </a:solidFill>
-              </a:rPr>
-              <a:t>📊 Lean EMI Engaged: Borrower pays ₹1,500/mo maintenance — zero financial stress during growing season.</a:t>
-            </a:r>
-          </a:p>
-          <a:p>
-            <a:pPr algn="l">
-              <a:spcBef>
-                <a:spcPts val="300"/>
-              </a:spcBef>
-            </a:pPr>
-            <a:r>
-              <a:rPr sz="900" b="1">
-                <a:solidFill>
-                  <a:srgbClr val="15803D"/>
-                </a:solidFill>
-              </a:rPr>
-              <a:t>💡 Zero Kharif underwriting pause — industry NBFCs halt for 4 months.</a:t>
-            </a:r>
-          </a:p>
-        </p:txBody>
-      </p:sp>
-      <p:sp>
-        <p:nvSpPr>
-          <p:cNvPr id="19" name="TextBox 18"/>
-          <p:cNvSpPr txBox="1"/>
-          <p:nvPr/>
-        </p:nvSpPr>
-        <p:spPr>
-          <a:xfrm>
-            <a:off x="6057600" y="10079999"/>
-            <a:ext cx="900000" cy="1440000"/>
-          </a:xfrm>
-          <a:prstGeom prst="rect">
-            <a:avLst/>
-          </a:prstGeom>
-          <a:noFill/>
-        </p:spPr>
-        <p:txBody>
-          <a:bodyPr wrap="square">
-            <a:spAutoFit/>
-          </a:bodyPr>
-          <a:lstStyle/>
-          <a:p>
-            <a:pPr algn="ctr"/>
-            <a:r>
-              <a:rPr sz="2000" b="1" i="0">
-                <a:solidFill>
-                  <a:srgbClr val="1E3A8A"/>
-                </a:solidFill>
-              </a:rPr>
-              <a:t>▶</a:t>
-            </a:r>
-          </a:p>
-        </p:txBody>
-      </p:sp>
-      <p:sp>
-        <p:nvSpPr>
-          <p:cNvPr id="20" name="Rectangle 19"/>
-          <p:cNvSpPr/>
-          <p:nvPr/>
-        </p:nvSpPr>
-        <p:spPr>
-          <a:xfrm>
-            <a:off x="7065600" y="5039999"/>
-            <a:ext cx="1912800" cy="11520000"/>
-          </a:xfrm>
-          <a:prstGeom prst="rect">
-            <a:avLst/>
-          </a:prstGeom>
-          <a:solidFill>
-            <a:srgbClr val="F1F5F9"/>
-          </a:solidFill>
-          <a:ln w="12700">
-            <a:solidFill>
-              <a:srgbClr val="1E3A8A"/>
-            </a:solidFill>
-          </a:ln>
-        </p:spPr>
-        <p:style>
-          <a:lnRef idx="1">
-            <a:schemeClr val="accent1"/>
-          </a:lnRef>
-          <a:fillRef idx="3">
-            <a:schemeClr val="accent1"/>
-          </a:fillRef>
-          <a:effectRef idx="2">
-            <a:schemeClr val="accent1"/>
-          </a:effectRef>
-          <a:fontRef idx="minor">
-            <a:schemeClr val="lt1"/>
-          </a:fontRef>
-        </p:style>
-        <p:txBody>
-          <a:bodyPr rtlCol="0" anchor="ctr"/>
-          <a:lstStyle/>
-          <a:p>
-            <a:pPr algn="ctr"/>
-          </a:p>
-        </p:txBody>
-      </p:sp>
-      <p:sp>
-        <p:nvSpPr>
-          <p:cNvPr id="21" name="Rectangle 20"/>
-          <p:cNvSpPr/>
-          <p:nvPr/>
-        </p:nvSpPr>
-        <p:spPr>
-          <a:xfrm>
-            <a:off x="7065600" y="5039999"/>
-            <a:ext cx="1259999" cy="2160000"/>
-          </a:xfrm>
-          <a:prstGeom prst="rect">
-            <a:avLst/>
-          </a:prstGeom>
-          <a:solidFill>
-            <a:srgbClr val="1E3A8A"/>
-          </a:solidFill>
-          <a:ln>
-            <a:noFill/>
-          </a:ln>
-        </p:spPr>
-        <p:style>
-          <a:lnRef idx="1">
-            <a:schemeClr val="accent1"/>
-          </a:lnRef>
-          <a:fillRef idx="3">
-            <a:schemeClr val="accent1"/>
-          </a:fillRef>
-          <a:effectRef idx="2">
-            <a:schemeClr val="accent1"/>
-          </a:effectRef>
-          <a:fontRef idx="minor">
-            <a:schemeClr val="lt1"/>
-          </a:fontRef>
-        </p:style>
-        <p:txBody>
-          <a:bodyPr rtlCol="0" anchor="ctr"/>
-          <a:lstStyle/>
-          <a:p>
-            <a:pPr algn="ctr"/>
-          </a:p>
-        </p:txBody>
-      </p:sp>
-      <p:sp>
-        <p:nvSpPr>
-          <p:cNvPr id="22" name="TextBox 21"/>
-          <p:cNvSpPr txBox="1"/>
-          <p:nvPr/>
-        </p:nvSpPr>
-        <p:spPr>
-          <a:xfrm>
-            <a:off x="7209600" y="5399999"/>
-            <a:ext cx="1008000" cy="1620000"/>
-          </a:xfrm>
-          <a:prstGeom prst="rect">
-            <a:avLst/>
-          </a:prstGeom>
-          <a:noFill/>
-        </p:spPr>
-        <p:txBody>
-          <a:bodyPr wrap="square">
-            <a:spAutoFit/>
-          </a:bodyPr>
-          <a:lstStyle/>
-          <a:p>
-            <a:pPr algn="ctr"/>
-            <a:r>
-              <a:rPr sz="1300" b="1" i="0">
-                <a:solidFill>
-                  <a:srgbClr val="FFFFFF"/>
-                </a:solidFill>
-              </a:rPr>
-              <a:t>3</a:t>
-            </a:r>
-          </a:p>
-        </p:txBody>
-      </p:sp>
-      <p:sp>
-        <p:nvSpPr>
-          <p:cNvPr id="23" name="TextBox 22"/>
-          <p:cNvSpPr txBox="1"/>
-          <p:nvPr/>
-        </p:nvSpPr>
-        <p:spPr>
-          <a:xfrm>
-            <a:off x="8505600" y="5327999"/>
-            <a:ext cx="292800" cy="2160000"/>
-          </a:xfrm>
-          <a:prstGeom prst="rect">
-            <a:avLst/>
-          </a:prstGeom>
-          <a:noFill/>
-        </p:spPr>
-        <p:txBody>
-          <a:bodyPr wrap="square">
-            <a:spAutoFit/>
-          </a:bodyPr>
-          <a:lstStyle/>
-          <a:p>
-            <a:pPr algn="l"/>
-            <a:r>
-              <a:rPr sz="1200" b="1" i="0">
-                <a:solidFill>
-                  <a:srgbClr val="1E3A8A"/>
-                </a:solidFill>
-              </a:rPr>
-              <a:t>HARVEST REALIZATION</a:t>
-            </a:r>
-          </a:p>
-        </p:txBody>
-      </p:sp>
-      <p:sp>
-        <p:nvSpPr>
-          <p:cNvPr id="24" name="TextBox 23"/>
-          <p:cNvSpPr txBox="1"/>
-          <p:nvPr/>
-        </p:nvSpPr>
-        <p:spPr>
-          <a:xfrm>
-            <a:off x="7425600" y="7019999"/>
-            <a:ext cx="1192800" cy="1080000"/>
-          </a:xfrm>
-          <a:prstGeom prst="rect">
-            <a:avLst/>
-          </a:prstGeom>
-          <a:noFill/>
-        </p:spPr>
-        <p:txBody>
-          <a:bodyPr wrap="square">
-            <a:spAutoFit/>
-          </a:bodyPr>
-          <a:lstStyle/>
-          <a:p>
-            <a:pPr algn="l"/>
-            <a:r>
-              <a:rPr sz="900" b="0" i="0">
-                <a:solidFill>
-                  <a:srgbClr val="64748B"/>
-                </a:solidFill>
-              </a:rPr>
-              <a:t>Yield-Synced Bullet Repayment</a:t>
-            </a:r>
-          </a:p>
-        </p:txBody>
-      </p:sp>
-      <p:sp>
-        <p:nvSpPr>
-          <p:cNvPr id="25" name="TextBox 24"/>
-          <p:cNvSpPr txBox="1"/>
-          <p:nvPr/>
-        </p:nvSpPr>
-        <p:spPr>
-          <a:xfrm>
-            <a:off x="7425600" y="8279999"/>
-            <a:ext cx="1192800" cy="7920000"/>
-          </a:xfrm>
-          <a:prstGeom prst="rect">
-            <a:avLst/>
-          </a:prstGeom>
-          <a:noFill/>
-        </p:spPr>
-        <p:txBody>
-          <a:bodyPr wrap="square">
-            <a:spAutoFit/>
-          </a:bodyPr>
-          <a:lstStyle/>
-          <a:p>
-            <a:pPr algn="l">
-              <a:spcBef>
-                <a:spcPts val="300"/>
-              </a:spcBef>
-            </a:pPr>
-            <a:r>
-              <a:rPr sz="900" b="0">
-                <a:solidFill>
-                  <a:srgbClr val="0F172A"/>
-                </a:solidFill>
-              </a:rPr>
-              <a:t>🌾 WOFOST Yield Forecast: Satellite crop model predicts expected Mandi revenue before harvest date.</a:t>
-            </a:r>
-          </a:p>
-          <a:p>
-            <a:pPr algn="l">
-              <a:spcBef>
-                <a:spcPts val="300"/>
-              </a:spcBef>
-            </a:pPr>
-            <a:r>
-              <a:rPr sz="900" b="0">
-                <a:solidFill>
-                  <a:srgbClr val="0F172A"/>
-                </a:solidFill>
-              </a:rPr>
-              <a:t>💰 Harvest Bullet Payment: Major EMI instalment synced with Mandi sale receipt — farmer pays from actual crop income.</a:t>
-            </a:r>
-          </a:p>
-          <a:p>
-            <a:pPr algn="l">
-              <a:spcBef>
-                <a:spcPts val="300"/>
-              </a:spcBef>
-            </a:pPr>
-            <a:r>
-              <a:rPr sz="900" b="0">
-                <a:solidFill>
-                  <a:srgbClr val="0F172A"/>
-                </a:solidFill>
-              </a:rPr>
-              <a:t>📋 Sanction Letter Auto-Generated: Underwriter memo with TreeSHAP attribution sent to dealer + farmer in local language.</a:t>
-            </a:r>
-          </a:p>
-          <a:p>
-            <a:pPr algn="l">
-              <a:spcBef>
-                <a:spcPts val="300"/>
-              </a:spcBef>
-            </a:pPr>
-            <a:r>
-              <a:rPr sz="900" b="0">
-                <a:solidFill>
-                  <a:srgbClr val="0F172A"/>
-                </a:solidFill>
-              </a:rPr>
-              <a:t>🔄 Restructuring Fast-Track: EWS-triggered distress auto-opens 60-day deferral if NDVI dropped &gt; 15% mid-season.</a:t>
-            </a:r>
-          </a:p>
-          <a:p>
-            <a:pPr algn="l">
-              <a:spcBef>
-                <a:spcPts val="300"/>
-              </a:spcBef>
-            </a:pPr>
-            <a:r>
-              <a:rPr sz="900" b="1">
-                <a:solidFill>
-                  <a:srgbClr val="15803D"/>
-                </a:solidFill>
-              </a:rPr>
-              <a:t>💡 34.5% reduction in 90-day NPAs vs flat EMI model.</a:t>
-            </a:r>
-          </a:p>
-        </p:txBody>
-      </p:sp>
-      <p:sp>
-        <p:nvSpPr>
-          <p:cNvPr id="26" name="Rectangle 25"/>
-          <p:cNvSpPr/>
-          <p:nvPr/>
-        </p:nvSpPr>
-        <p:spPr>
-          <a:xfrm>
-            <a:off x="1080000" y="16991999"/>
-            <a:ext cx="7898400" cy="1620000"/>
-          </a:xfrm>
-          <a:prstGeom prst="rect">
-            <a:avLst/>
-          </a:prstGeom>
-          <a:solidFill>
-            <a:srgbClr val="E2E8F0"/>
-          </a:solidFill>
-          <a:ln>
-            <a:noFill/>
-          </a:ln>
-        </p:spPr>
-        <p:style>
-          <a:lnRef idx="1">
-            <a:schemeClr val="accent1"/>
-          </a:lnRef>
-          <a:fillRef idx="3">
-            <a:schemeClr val="accent1"/>
-          </a:fillRef>
-          <a:effectRef idx="2">
-            <a:schemeClr val="accent1"/>
-          </a:effectRef>
-          <a:fontRef idx="minor">
-            <a:schemeClr val="lt1"/>
-          </a:fontRef>
-        </p:style>
-        <p:txBody>
-          <a:bodyPr rtlCol="0" anchor="ctr"/>
-          <a:lstStyle/>
-          <a:p>
-            <a:pPr algn="ctr"/>
-          </a:p>
-        </p:txBody>
-      </p:sp>
-      <p:sp>
-        <p:nvSpPr>
-          <p:cNvPr id="27" name="TextBox 26"/>
-          <p:cNvSpPr txBox="1"/>
-          <p:nvPr/>
-        </p:nvSpPr>
-        <p:spPr>
-          <a:xfrm>
-            <a:off x="1800000" y="17207999"/>
-            <a:ext cx="6458400" cy="1620000"/>
-          </a:xfrm>
-          <a:prstGeom prst="rect">
-            <a:avLst/>
-          </a:prstGeom>
-          <a:noFill/>
-        </p:spPr>
-        <p:txBody>
-          <a:bodyPr wrap="square">
-            <a:spAutoFit/>
-          </a:bodyPr>
-          <a:lstStyle/>
-          <a:p>
-            <a:pPr algn="ctr"/>
-            <a:r>
-              <a:rPr sz="900" b="1" i="0">
-                <a:solidFill>
-                  <a:srgbClr val="1E3A8A"/>
-                </a:solidFill>
-              </a:rPr>
-              <a:t>GEOKISAN LOAN JOURNEY:   [ 01. DEALER INTAKE ]  ──►  [ 02. SATELLITE MONITORING ]  ──►  [ 03. HARVEST REALIZATION ]</a:t>
-            </a:r>
-          </a:p>
-        </p:txBody>
-      </p:sp>
-      <p:sp>
-        <p:nvSpPr>
-          <p:cNvPr id="28" name="Rectangle 27"/>
-          <p:cNvSpPr/>
-          <p:nvPr/>
-        </p:nvSpPr>
-        <p:spPr>
-          <a:xfrm>
-            <a:off x="1080000" y="19331999"/>
-            <a:ext cx="5760000" cy="-2296200"/>
-          </a:xfrm>
-          <a:prstGeom prst="rect">
-            <a:avLst/>
-          </a:prstGeom>
-          <a:solidFill>
-            <a:srgbClr val="1E3A8A"/>
-          </a:solidFill>
-          <a:ln>
-            <a:noFill/>
-          </a:ln>
-        </p:spPr>
-        <p:style>
-          <a:lnRef idx="1">
-            <a:schemeClr val="accent1"/>
-          </a:lnRef>
-          <a:fillRef idx="3">
-            <a:schemeClr val="accent1"/>
-          </a:fillRef>
-          <a:effectRef idx="2">
-            <a:schemeClr val="accent1"/>
-          </a:effectRef>
-          <a:fontRef idx="minor">
-            <a:schemeClr val="lt1"/>
-          </a:fontRef>
-        </p:style>
-        <p:txBody>
-          <a:bodyPr rtlCol="0" anchor="ctr"/>
-          <a:lstStyle/>
-          <a:p>
-            <a:pPr algn="ctr"/>
-          </a:p>
-        </p:txBody>
-      </p:sp>
-      <p:sp>
-        <p:nvSpPr>
-          <p:cNvPr id="29" name="TextBox 28"/>
-          <p:cNvSpPr txBox="1"/>
-          <p:nvPr/>
-        </p:nvSpPr>
-        <p:spPr>
-          <a:xfrm>
-            <a:off x="1260000" y="19511999"/>
-            <a:ext cx="5400000" cy="-2296200"/>
-          </a:xfrm>
-          <a:prstGeom prst="rect">
-            <a:avLst/>
-          </a:prstGeom>
-          <a:noFill/>
-        </p:spPr>
-        <p:txBody>
-          <a:bodyPr wrap="square">
-            <a:spAutoFit/>
-          </a:bodyPr>
-          <a:lstStyle/>
-          <a:p>
-            <a:pPr algn="ctr"/>
-            <a:r>
-              <a:rPr sz="1000" b="1" i="0">
-                <a:solidFill>
-                  <a:srgbClr val="FFFFFF"/>
-                </a:solidFill>
-              </a:rPr>
-              <a:t>Dimension</a:t>
-            </a:r>
-          </a:p>
-        </p:txBody>
-      </p:sp>
-      <p:sp>
-        <p:nvSpPr>
-          <p:cNvPr id="30" name="Rectangle 29"/>
-          <p:cNvSpPr/>
-          <p:nvPr/>
-        </p:nvSpPr>
-        <p:spPr>
-          <a:xfrm>
-            <a:off x="6840000" y="19331999"/>
-            <a:ext cx="712800" cy="-2296200"/>
-          </a:xfrm>
-          <a:prstGeom prst="rect">
-            <a:avLst/>
-          </a:prstGeom>
-          <a:solidFill>
-            <a:srgbClr val="E0E7FF"/>
-          </a:solidFill>
-          <a:ln>
-            <a:noFill/>
-          </a:ln>
-        </p:spPr>
-        <p:style>
-          <a:lnRef idx="1">
-            <a:schemeClr val="accent1"/>
-          </a:lnRef>
-          <a:fillRef idx="3">
-            <a:schemeClr val="accent1"/>
-          </a:fillRef>
-          <a:effectRef idx="2">
-            <a:schemeClr val="accent1"/>
-          </a:effectRef>
-          <a:fontRef idx="minor">
-            <a:schemeClr val="lt1"/>
-          </a:fontRef>
-        </p:style>
-        <p:txBody>
-          <a:bodyPr rtlCol="0" anchor="ctr"/>
-          <a:lstStyle/>
-          <a:p>
-            <a:pPr algn="ctr"/>
-          </a:p>
-        </p:txBody>
-      </p:sp>
-      <p:sp>
-        <p:nvSpPr>
-          <p:cNvPr id="31" name="TextBox 30"/>
-          <p:cNvSpPr txBox="1"/>
-          <p:nvPr/>
-        </p:nvSpPr>
-        <p:spPr>
-          <a:xfrm>
-            <a:off x="7020000" y="19439999"/>
-            <a:ext cx="352800" cy="-2296200"/>
-          </a:xfrm>
-          <a:prstGeom prst="rect">
-            <a:avLst/>
-          </a:prstGeom>
-          <a:noFill/>
-        </p:spPr>
-        <p:txBody>
-          <a:bodyPr wrap="square">
-            <a:spAutoFit/>
-          </a:bodyPr>
-          <a:lstStyle/>
-          <a:p>
-            <a:pPr algn="ctr"/>
-            <a:r>
-              <a:rPr sz="1000" b="1" i="0">
-                <a:solidFill>
-                  <a:srgbClr val="DC2626"/>
-                </a:solidFill>
-              </a:rPr>
-              <a:t>✗  Traditional NBFCs
-(Mahindra / Shriram / Chola)</a:t>
-            </a:r>
-          </a:p>
-        </p:txBody>
-      </p:sp>
-      <p:sp>
-        <p:nvSpPr>
-          <p:cNvPr id="32" name="Rectangle 31"/>
-          <p:cNvSpPr/>
-          <p:nvPr/>
-        </p:nvSpPr>
-        <p:spPr>
-          <a:xfrm>
-            <a:off x="7552800" y="19331999"/>
-            <a:ext cx="712800" cy="-2296200"/>
-          </a:xfrm>
-          <a:prstGeom prst="rect">
-            <a:avLst/>
-          </a:prstGeom>
-          <a:solidFill>
-            <a:srgbClr val="FEF3C7"/>
-          </a:solidFill>
-          <a:ln>
-            <a:noFill/>
-          </a:ln>
-        </p:spPr>
-        <p:style>
-          <a:lnRef idx="1">
-            <a:schemeClr val="accent1"/>
-          </a:lnRef>
-          <a:fillRef idx="3">
-            <a:schemeClr val="accent1"/>
-          </a:fillRef>
-          <a:effectRef idx="2">
-            <a:schemeClr val="accent1"/>
-          </a:effectRef>
-          <a:fontRef idx="minor">
-            <a:schemeClr val="lt1"/>
-          </a:fontRef>
-        </p:style>
-        <p:txBody>
-          <a:bodyPr rtlCol="0" anchor="ctr"/>
-          <a:lstStyle/>
-          <a:p>
-            <a:pPr algn="ctr"/>
-          </a:p>
-        </p:txBody>
-      </p:sp>
-      <p:sp>
-        <p:nvSpPr>
-          <p:cNvPr id="33" name="TextBox 32"/>
-          <p:cNvSpPr txBox="1"/>
-          <p:nvPr/>
-        </p:nvSpPr>
-        <p:spPr>
-          <a:xfrm>
-            <a:off x="7732800" y="19439999"/>
-            <a:ext cx="352800" cy="-2296200"/>
-          </a:xfrm>
-          <a:prstGeom prst="rect">
-            <a:avLst/>
-          </a:prstGeom>
-          <a:noFill/>
-        </p:spPr>
-        <p:txBody>
-          <a:bodyPr wrap="square">
-            <a:spAutoFit/>
-          </a:bodyPr>
-          <a:lstStyle/>
-          <a:p>
-            <a:pPr algn="ctr"/>
-            <a:r>
-              <a:rPr sz="1000" b="1" i="0">
-                <a:solidFill>
-                  <a:srgbClr val="D97706"/>
-                </a:solidFill>
-              </a:rPr>
-              <a:t>⚠  Current TVS Credit
-(Baseline Operations)</a:t>
-            </a:r>
-          </a:p>
-        </p:txBody>
-      </p:sp>
-      <p:sp>
-        <p:nvSpPr>
-          <p:cNvPr id="34" name="Rectangle 33"/>
-          <p:cNvSpPr/>
-          <p:nvPr/>
-        </p:nvSpPr>
-        <p:spPr>
-          <a:xfrm>
-            <a:off x="8265600" y="19331999"/>
-            <a:ext cx="712800" cy="-2296200"/>
-          </a:xfrm>
-          <a:prstGeom prst="rect">
-            <a:avLst/>
-          </a:prstGeom>
-          <a:solidFill>
-            <a:srgbClr val="16A34A"/>
-          </a:solidFill>
-          <a:ln>
-            <a:noFill/>
-          </a:ln>
-        </p:spPr>
-        <p:style>
-          <a:lnRef idx="1">
-            <a:schemeClr val="accent1"/>
-          </a:lnRef>
-          <a:fillRef idx="3">
-            <a:schemeClr val="accent1"/>
-          </a:fillRef>
-          <a:effectRef idx="2">
-            <a:schemeClr val="accent1"/>
-          </a:effectRef>
-          <a:fontRef idx="minor">
-            <a:schemeClr val="lt1"/>
-          </a:fontRef>
-        </p:style>
-        <p:txBody>
-          <a:bodyPr rtlCol="0" anchor="ctr"/>
-          <a:lstStyle/>
-          <a:p>
-            <a:pPr algn="ctr"/>
-          </a:p>
-        </p:txBody>
-      </p:sp>
-      <p:sp>
-        <p:nvSpPr>
-          <p:cNvPr id="35" name="TextBox 34"/>
-          <p:cNvSpPr txBox="1"/>
-          <p:nvPr/>
-        </p:nvSpPr>
-        <p:spPr>
-          <a:xfrm>
-            <a:off x="8445600" y="19439999"/>
-            <a:ext cx="352800" cy="-2296200"/>
-          </a:xfrm>
-          <a:prstGeom prst="rect">
-            <a:avLst/>
-          </a:prstGeom>
-          <a:noFill/>
-        </p:spPr>
-        <p:txBody>
-          <a:bodyPr wrap="square">
-            <a:spAutoFit/>
-          </a:bodyPr>
-          <a:lstStyle/>
-          <a:p>
-            <a:pPr algn="ctr"/>
-            <a:r>
-              <a:rPr sz="1000" b="1" i="0">
-                <a:solidFill>
-                  <a:srgbClr val="FFFFFF"/>
-                </a:solidFill>
-              </a:rPr>
-              <a:t>✓  GeoKisan (TVS Credit)
-(Our Platform)</a:t>
-            </a:r>
-          </a:p>
-        </p:txBody>
-      </p:sp>
-      <p:sp>
-        <p:nvSpPr>
-          <p:cNvPr id="36" name="Rectangle 35"/>
-          <p:cNvSpPr/>
-          <p:nvPr/>
-        </p:nvSpPr>
-        <p:spPr>
-          <a:xfrm>
-            <a:off x="1080000" y="17035799"/>
-            <a:ext cx="5760000" cy="-2296200"/>
-          </a:xfrm>
-          <a:prstGeom prst="rect">
-            <a:avLst/>
-          </a:prstGeom>
-          <a:solidFill>
-            <a:srgbClr val="1E3A8A"/>
-          </a:solidFill>
-          <a:ln>
-            <a:noFill/>
-          </a:ln>
-        </p:spPr>
-        <p:style>
-          <a:lnRef idx="1">
-            <a:schemeClr val="accent1"/>
-          </a:lnRef>
-          <a:fillRef idx="3">
-            <a:schemeClr val="accent1"/>
-          </a:fillRef>
-          <a:effectRef idx="2">
-            <a:schemeClr val="accent1"/>
-          </a:effectRef>
-          <a:fontRef idx="minor">
-            <a:schemeClr val="lt1"/>
-          </a:fontRef>
-        </p:style>
-        <p:txBody>
-          <a:bodyPr rtlCol="0" anchor="ctr"/>
-          <a:lstStyle/>
-          <a:p>
-            <a:pPr algn="ctr"/>
-          </a:p>
-        </p:txBody>
-      </p:sp>
-      <p:sp>
-        <p:nvSpPr>
-          <p:cNvPr id="37" name="TextBox 36"/>
-          <p:cNvSpPr txBox="1"/>
-          <p:nvPr/>
-        </p:nvSpPr>
-        <p:spPr>
-          <a:xfrm>
-            <a:off x="1260000" y="17215799"/>
-            <a:ext cx="5400000" cy="-2656200"/>
-          </a:xfrm>
-          <a:prstGeom prst="rect">
-            <a:avLst/>
-          </a:prstGeom>
-          <a:noFill/>
-        </p:spPr>
-        <p:txBody>
-          <a:bodyPr wrap="square">
-            <a:spAutoFit/>
-          </a:bodyPr>
-          <a:lstStyle/>
-          <a:p>
-            <a:pPr algn="ctr"/>
-            <a:r>
-              <a:rPr sz="1000" b="1" i="0">
-                <a:solidFill>
-                  <a:srgbClr val="FFFFFF"/>
-                </a:solidFill>
-              </a:rPr>
-              <a:t>Eligibility</a:t>
-            </a:r>
-          </a:p>
-        </p:txBody>
-      </p:sp>
-      <p:sp>
-        <p:nvSpPr>
-          <p:cNvPr id="38" name="Rectangle 37"/>
-          <p:cNvSpPr/>
-          <p:nvPr/>
-        </p:nvSpPr>
-        <p:spPr>
-          <a:xfrm>
-            <a:off x="6840000" y="17035799"/>
-            <a:ext cx="712800" cy="-2296200"/>
-          </a:xfrm>
-          <a:prstGeom prst="rect">
-            <a:avLst/>
-          </a:prstGeom>
-          <a:solidFill>
-            <a:srgbClr val="F8FAFF"/>
-          </a:solidFill>
-          <a:ln w="6350">
-            <a:solidFill>
-              <a:srgbClr val="DC2626"/>
-            </a:solidFill>
-          </a:ln>
-        </p:spPr>
-        <p:style>
-          <a:lnRef idx="1">
-            <a:schemeClr val="accent1"/>
-          </a:lnRef>
-          <a:fillRef idx="3">
-            <a:schemeClr val="accent1"/>
-          </a:fillRef>
-          <a:effectRef idx="2">
-            <a:schemeClr val="accent1"/>
-          </a:effectRef>
-          <a:fontRef idx="minor">
-            <a:schemeClr val="lt1"/>
-          </a:fontRef>
-        </p:style>
-        <p:txBody>
-          <a:bodyPr rtlCol="0" anchor="ctr"/>
-          <a:lstStyle/>
-          <a:p>
-            <a:pPr algn="ctr"/>
-          </a:p>
-        </p:txBody>
-      </p:sp>
-      <p:sp>
-        <p:nvSpPr>
-          <p:cNvPr id="39" name="TextBox 38"/>
-          <p:cNvSpPr txBox="1"/>
-          <p:nvPr/>
-        </p:nvSpPr>
-        <p:spPr>
-          <a:xfrm>
-            <a:off x="7128000" y="17251799"/>
-            <a:ext cx="136800" cy="-2728200"/>
-          </a:xfrm>
-          <a:prstGeom prst="rect">
-            <a:avLst/>
-          </a:prstGeom>
-          <a:noFill/>
-        </p:spPr>
-        <p:txBody>
-          <a:bodyPr wrap="square">
-            <a:spAutoFit/>
-          </a:bodyPr>
-          <a:lstStyle/>
-          <a:p>
-            <a:pPr algn="l"/>
-            <a:r>
-              <a:rPr sz="900" b="0" i="0">
-                <a:solidFill>
-                  <a:srgbClr val="0F172A"/>
-                </a:solidFill>
-              </a:rPr>
-              <a:t>✗ CIBIL ≥ 650 mandatory
-✗ Excludes 65%+ smallholders</a:t>
-            </a:r>
-          </a:p>
-        </p:txBody>
-      </p:sp>
-      <p:sp>
-        <p:nvSpPr>
-          <p:cNvPr id="40" name="Rectangle 39"/>
-          <p:cNvSpPr/>
-          <p:nvPr/>
-        </p:nvSpPr>
-        <p:spPr>
-          <a:xfrm>
-            <a:off x="7552800" y="17035799"/>
-            <a:ext cx="712800" cy="-2296200"/>
-          </a:xfrm>
-          <a:prstGeom prst="rect">
-            <a:avLst/>
-          </a:prstGeom>
-          <a:solidFill>
-            <a:srgbClr val="F8FAFF"/>
-          </a:solidFill>
-          <a:ln w="6350">
-            <a:solidFill>
-              <a:srgbClr val="D97706"/>
-            </a:solidFill>
-          </a:ln>
-        </p:spPr>
-        <p:style>
-          <a:lnRef idx="1">
-            <a:schemeClr val="accent1"/>
-          </a:lnRef>
-          <a:fillRef idx="3">
-            <a:schemeClr val="accent1"/>
-          </a:fillRef>
-          <a:effectRef idx="2">
-            <a:schemeClr val="accent1"/>
-          </a:effectRef>
-          <a:fontRef idx="minor">
-            <a:schemeClr val="lt1"/>
-          </a:fontRef>
-        </p:style>
-        <p:txBody>
-          <a:bodyPr rtlCol="0" anchor="ctr"/>
-          <a:lstStyle/>
-          <a:p>
-            <a:pPr algn="ctr"/>
-          </a:p>
-        </p:txBody>
-      </p:sp>
-      <p:sp>
-        <p:nvSpPr>
-          <p:cNvPr id="41" name="TextBox 40"/>
-          <p:cNvSpPr txBox="1"/>
-          <p:nvPr/>
-        </p:nvSpPr>
-        <p:spPr>
-          <a:xfrm>
-            <a:off x="7840800" y="17251799"/>
-            <a:ext cx="136800" cy="-2728200"/>
-          </a:xfrm>
-          <a:prstGeom prst="rect">
-            <a:avLst/>
-          </a:prstGeom>
-          <a:noFill/>
-        </p:spPr>
-        <p:txBody>
-          <a:bodyPr wrap="square">
-            <a:spAutoFit/>
-          </a:bodyPr>
-          <a:lstStyle/>
-          <a:p>
-            <a:pPr algn="l"/>
-            <a:r>
-              <a:rPr sz="900" b="0" i="0">
-                <a:solidFill>
-                  <a:srgbClr val="0F172A"/>
-                </a:solidFill>
-              </a:rPr>
-              <a:t>✗ Manual thin-file review
-✗ 7–10 day physical visit</a:t>
-            </a:r>
-          </a:p>
-        </p:txBody>
-      </p:sp>
-      <p:sp>
-        <p:nvSpPr>
-          <p:cNvPr id="42" name="Rectangle 41"/>
-          <p:cNvSpPr/>
-          <p:nvPr/>
-        </p:nvSpPr>
-        <p:spPr>
-          <a:xfrm>
-            <a:off x="8265600" y="17035799"/>
-            <a:ext cx="712800" cy="-2296200"/>
-          </a:xfrm>
-          <a:prstGeom prst="rect">
-            <a:avLst/>
-          </a:prstGeom>
-          <a:solidFill>
-            <a:srgbClr val="F0FDF4"/>
-          </a:solidFill>
-          <a:ln w="6350">
-            <a:solidFill>
-              <a:srgbClr val="16A34A"/>
-            </a:solidFill>
-          </a:ln>
-        </p:spPr>
-        <p:style>
-          <a:lnRef idx="1">
-            <a:schemeClr val="accent1"/>
-          </a:lnRef>
-          <a:fillRef idx="3">
-            <a:schemeClr val="accent1"/>
-          </a:fillRef>
-          <a:effectRef idx="2">
-            <a:schemeClr val="accent1"/>
-          </a:effectRef>
-          <a:fontRef idx="minor">
-            <a:schemeClr val="lt1"/>
-          </a:fontRef>
-        </p:style>
-        <p:txBody>
-          <a:bodyPr rtlCol="0" anchor="ctr"/>
-          <a:lstStyle/>
-          <a:p>
-            <a:pPr algn="ctr"/>
-          </a:p>
-        </p:txBody>
-      </p:sp>
-      <p:sp>
-        <p:nvSpPr>
-          <p:cNvPr id="43" name="TextBox 42"/>
-          <p:cNvSpPr txBox="1"/>
-          <p:nvPr/>
-        </p:nvSpPr>
-        <p:spPr>
-          <a:xfrm>
-            <a:off x="8553600" y="17251799"/>
-            <a:ext cx="136800" cy="-2728200"/>
-          </a:xfrm>
-          <a:prstGeom prst="rect">
-            <a:avLst/>
-          </a:prstGeom>
-          <a:noFill/>
-        </p:spPr>
-        <p:txBody>
-          <a:bodyPr wrap="square">
-            <a:spAutoFit/>
-          </a:bodyPr>
-          <a:lstStyle/>
-          <a:p>
-            <a:pPr algn="l"/>
-            <a:r>
-              <a:rPr sz="900" b="0" i="0">
-                <a:solidFill>
-                  <a:srgbClr val="14532D"/>
-                </a:solidFill>
-              </a:rPr>
-              <a:t>✓ Satellite SOC + Account
-  Aggregator — no CIBIL floor</a:t>
-            </a:r>
-          </a:p>
-        </p:txBody>
-      </p:sp>
-      <p:sp>
-        <p:nvSpPr>
-          <p:cNvPr id="44" name="Rectangle 43"/>
-          <p:cNvSpPr/>
-          <p:nvPr/>
-        </p:nvSpPr>
-        <p:spPr>
-          <a:xfrm>
-            <a:off x="1080000" y="14739599"/>
-            <a:ext cx="5760000" cy="-2296200"/>
-          </a:xfrm>
-          <a:prstGeom prst="rect">
-            <a:avLst/>
-          </a:prstGeom>
-          <a:solidFill>
-            <a:srgbClr val="1E3A8A"/>
-          </a:solidFill>
-          <a:ln>
-            <a:noFill/>
-          </a:ln>
-        </p:spPr>
-        <p:style>
-          <a:lnRef idx="1">
-            <a:schemeClr val="accent1"/>
-          </a:lnRef>
-          <a:fillRef idx="3">
-            <a:schemeClr val="accent1"/>
-          </a:fillRef>
-          <a:effectRef idx="2">
-            <a:schemeClr val="accent1"/>
-          </a:effectRef>
-          <a:fontRef idx="minor">
-            <a:schemeClr val="lt1"/>
-          </a:fontRef>
-        </p:style>
-        <p:txBody>
-          <a:bodyPr rtlCol="0" anchor="ctr"/>
-          <a:lstStyle/>
-          <a:p>
-            <a:pPr algn="ctr"/>
-          </a:p>
-        </p:txBody>
-      </p:sp>
-      <p:sp>
-        <p:nvSpPr>
-          <p:cNvPr id="45" name="TextBox 44"/>
-          <p:cNvSpPr txBox="1"/>
-          <p:nvPr/>
-        </p:nvSpPr>
-        <p:spPr>
-          <a:xfrm>
-            <a:off x="1260000" y="14919599"/>
-            <a:ext cx="5400000" cy="-2656200"/>
-          </a:xfrm>
-          <a:prstGeom prst="rect">
-            <a:avLst/>
-          </a:prstGeom>
-          <a:noFill/>
-        </p:spPr>
-        <p:txBody>
-          <a:bodyPr wrap="square">
-            <a:spAutoFit/>
-          </a:bodyPr>
-          <a:lstStyle/>
-          <a:p>
-            <a:pPr algn="ctr"/>
-            <a:r>
-              <a:rPr sz="1000" b="1" i="0">
-                <a:solidFill>
-                  <a:srgbClr val="FFFFFF"/>
-                </a:solidFill>
-              </a:rPr>
-              <a:t>Speed (TAT)</a:t>
-            </a:r>
-          </a:p>
-        </p:txBody>
-      </p:sp>
-      <p:sp>
-        <p:nvSpPr>
-          <p:cNvPr id="46" name="Rectangle 45"/>
-          <p:cNvSpPr/>
-          <p:nvPr/>
-        </p:nvSpPr>
-        <p:spPr>
-          <a:xfrm>
-            <a:off x="6840000" y="14739599"/>
-            <a:ext cx="712800" cy="-2296200"/>
-          </a:xfrm>
-          <a:prstGeom prst="rect">
-            <a:avLst/>
-          </a:prstGeom>
-          <a:solidFill>
-            <a:srgbClr val="FFFFFF"/>
-          </a:solidFill>
-          <a:ln w="6350">
-            <a:solidFill>
-              <a:srgbClr val="DC2626"/>
-            </a:solidFill>
-          </a:ln>
-        </p:spPr>
-        <p:style>
-          <a:lnRef idx="1">
-            <a:schemeClr val="accent1"/>
-          </a:lnRef>
-          <a:fillRef idx="3">
-            <a:schemeClr val="accent1"/>
-          </a:fillRef>
-          <a:effectRef idx="2">
-            <a:schemeClr val="accent1"/>
-          </a:effectRef>
-          <a:fontRef idx="minor">
-            <a:schemeClr val="lt1"/>
-          </a:fontRef>
-        </p:style>
-        <p:txBody>
-          <a:bodyPr rtlCol="0" anchor="ctr"/>
-          <a:lstStyle/>
-          <a:p>
-            <a:pPr algn="ctr"/>
-          </a:p>
-        </p:txBody>
-      </p:sp>
-      <p:sp>
-        <p:nvSpPr>
-          <p:cNvPr id="47" name="TextBox 46"/>
-          <p:cNvSpPr txBox="1"/>
-          <p:nvPr/>
-        </p:nvSpPr>
-        <p:spPr>
-          <a:xfrm>
-            <a:off x="7128000" y="14955599"/>
-            <a:ext cx="136800" cy="-2728200"/>
-          </a:xfrm>
-          <a:prstGeom prst="rect">
-            <a:avLst/>
-          </a:prstGeom>
-          <a:noFill/>
-        </p:spPr>
-        <p:txBody>
-          <a:bodyPr wrap="square">
-            <a:spAutoFit/>
-          </a:bodyPr>
-          <a:lstStyle/>
-          <a:p>
-            <a:pPr algn="l"/>
-            <a:r>
-              <a:rPr sz="900" b="0" i="0">
-                <a:solidFill>
-                  <a:srgbClr val="0F172A"/>
-                </a:solidFill>
-              </a:rPr>
-              <a:t>✗ 5–10 business days
-✗ Field officer bottleneck</a:t>
-            </a:r>
-          </a:p>
-        </p:txBody>
-      </p:sp>
-      <p:sp>
-        <p:nvSpPr>
-          <p:cNvPr id="48" name="Rectangle 47"/>
-          <p:cNvSpPr/>
-          <p:nvPr/>
-        </p:nvSpPr>
-        <p:spPr>
-          <a:xfrm>
-            <a:off x="7552800" y="14739599"/>
-            <a:ext cx="712800" cy="-2296200"/>
-          </a:xfrm>
-          <a:prstGeom prst="rect">
-            <a:avLst/>
-          </a:prstGeom>
-          <a:solidFill>
-            <a:srgbClr val="FFFFFF"/>
-          </a:solidFill>
-          <a:ln w="6350">
-            <a:solidFill>
-              <a:srgbClr val="D97706"/>
-            </a:solidFill>
-          </a:ln>
-        </p:spPr>
-        <p:style>
-          <a:lnRef idx="1">
-            <a:schemeClr val="accent1"/>
-          </a:lnRef>
-          <a:fillRef idx="3">
-            <a:schemeClr val="accent1"/>
-          </a:fillRef>
-          <a:effectRef idx="2">
-            <a:schemeClr val="accent1"/>
-          </a:effectRef>
-          <a:fontRef idx="minor">
-            <a:schemeClr val="lt1"/>
-          </a:fontRef>
-        </p:style>
-        <p:txBody>
-          <a:bodyPr rtlCol="0" anchor="ctr"/>
-          <a:lstStyle/>
-          <a:p>
-            <a:pPr algn="ctr"/>
-          </a:p>
-        </p:txBody>
-      </p:sp>
-      <p:sp>
-        <p:nvSpPr>
-          <p:cNvPr id="49" name="TextBox 48"/>
-          <p:cNvSpPr txBox="1"/>
-          <p:nvPr/>
-        </p:nvSpPr>
-        <p:spPr>
-          <a:xfrm>
-            <a:off x="7840800" y="14955599"/>
-            <a:ext cx="136800" cy="-2728200"/>
-          </a:xfrm>
-          <a:prstGeom prst="rect">
-            <a:avLst/>
-          </a:prstGeom>
-          <a:noFill/>
-        </p:spPr>
-        <p:txBody>
-          <a:bodyPr wrap="square">
-            <a:spAutoFit/>
-          </a:bodyPr>
-          <a:lstStyle/>
-          <a:p>
-            <a:pPr algn="l"/>
-            <a:r>
-              <a:rPr sz="900" b="0" i="0">
-                <a:solidFill>
-                  <a:srgbClr val="0F172A"/>
-                </a:solidFill>
-              </a:rPr>
-              <a:t>✗ 7–10 days field visit
-✗ Manual underwriting</a:t>
-            </a:r>
-          </a:p>
-        </p:txBody>
-      </p:sp>
-      <p:sp>
-        <p:nvSpPr>
-          <p:cNvPr id="50" name="Rectangle 49"/>
-          <p:cNvSpPr/>
-          <p:nvPr/>
-        </p:nvSpPr>
-        <p:spPr>
-          <a:xfrm>
-            <a:off x="8265600" y="14739599"/>
-            <a:ext cx="712800" cy="-2296200"/>
-          </a:xfrm>
-          <a:prstGeom prst="rect">
-            <a:avLst/>
-          </a:prstGeom>
-          <a:solidFill>
-            <a:srgbClr val="F0FDF4"/>
-          </a:solidFill>
-          <a:ln w="6350">
-            <a:solidFill>
-              <a:srgbClr val="16A34A"/>
-            </a:solidFill>
-          </a:ln>
-        </p:spPr>
-        <p:style>
-          <a:lnRef idx="1">
-            <a:schemeClr val="accent1"/>
-          </a:lnRef>
-          <a:fillRef idx="3">
-            <a:schemeClr val="accent1"/>
-          </a:fillRef>
-          <a:effectRef idx="2">
-            <a:schemeClr val="accent1"/>
-          </a:effectRef>
-          <a:fontRef idx="minor">
-            <a:schemeClr val="lt1"/>
-          </a:fontRef>
-        </p:style>
-        <p:txBody>
-          <a:bodyPr rtlCol="0" anchor="ctr"/>
-          <a:lstStyle/>
-          <a:p>
-            <a:pPr algn="ctr"/>
-          </a:p>
-        </p:txBody>
-      </p:sp>
-      <p:sp>
-        <p:nvSpPr>
-          <p:cNvPr id="51" name="TextBox 50"/>
-          <p:cNvSpPr txBox="1"/>
-          <p:nvPr/>
-        </p:nvSpPr>
-        <p:spPr>
-          <a:xfrm>
-            <a:off x="8553600" y="14955599"/>
-            <a:ext cx="136800" cy="-2728200"/>
-          </a:xfrm>
-          <a:prstGeom prst="rect">
-            <a:avLst/>
-          </a:prstGeom>
-          <a:noFill/>
-        </p:spPr>
-        <p:txBody>
-          <a:bodyPr wrap="square">
-            <a:spAutoFit/>
-          </a:bodyPr>
-          <a:lstStyle/>
-          <a:p>
-            <a:pPr algn="l"/>
-            <a:r>
-              <a:rPr sz="900" b="0" i="0">
-                <a:solidFill>
-                  <a:srgbClr val="14532D"/>
-                </a:solidFill>
-              </a:rPr>
-              <a:t>✓ &lt; 3 Minutes automated
-✓ Same-day dealer sanction</a:t>
-            </a:r>
-          </a:p>
-        </p:txBody>
-      </p:sp>
-      <p:sp>
-        <p:nvSpPr>
-          <p:cNvPr id="52" name="Rectangle 51"/>
-          <p:cNvSpPr/>
-          <p:nvPr/>
-        </p:nvSpPr>
-        <p:spPr>
-          <a:xfrm>
-            <a:off x="1080000" y="12443399"/>
-            <a:ext cx="5760000" cy="-2296200"/>
-          </a:xfrm>
-          <a:prstGeom prst="rect">
-            <a:avLst/>
-          </a:prstGeom>
-          <a:solidFill>
-            <a:srgbClr val="1E3A8A"/>
-          </a:solidFill>
-          <a:ln>
-            <a:noFill/>
-          </a:ln>
-        </p:spPr>
-        <p:style>
-          <a:lnRef idx="1">
-            <a:schemeClr val="accent1"/>
-          </a:lnRef>
-          <a:fillRef idx="3">
-            <a:schemeClr val="accent1"/>
-          </a:fillRef>
-          <a:effectRef idx="2">
-            <a:schemeClr val="accent1"/>
-          </a:effectRef>
-          <a:fontRef idx="minor">
-            <a:schemeClr val="lt1"/>
-          </a:fontRef>
-        </p:style>
-        <p:txBody>
-          <a:bodyPr rtlCol="0" anchor="ctr"/>
-          <a:lstStyle/>
-          <a:p>
-            <a:pPr algn="ctr"/>
-          </a:p>
-        </p:txBody>
-      </p:sp>
-      <p:sp>
-        <p:nvSpPr>
-          <p:cNvPr id="53" name="TextBox 52"/>
-          <p:cNvSpPr txBox="1"/>
-          <p:nvPr/>
-        </p:nvSpPr>
-        <p:spPr>
-          <a:xfrm>
-            <a:off x="1260000" y="12623399"/>
-            <a:ext cx="5400000" cy="-2656200"/>
-          </a:xfrm>
-          <a:prstGeom prst="rect">
-            <a:avLst/>
-          </a:prstGeom>
-          <a:noFill/>
-        </p:spPr>
-        <p:txBody>
-          <a:bodyPr wrap="square">
-            <a:spAutoFit/>
-          </a:bodyPr>
-          <a:lstStyle/>
-          <a:p>
-            <a:pPr algn="ctr"/>
-            <a:r>
-              <a:rPr sz="1000" b="1" i="0">
-                <a:solidFill>
-                  <a:srgbClr val="FFFFFF"/>
-                </a:solidFill>
-              </a:rPr>
-              <a:t>Kharif Uptime</a:t>
-            </a:r>
-          </a:p>
-        </p:txBody>
-      </p:sp>
-      <p:sp>
-        <p:nvSpPr>
-          <p:cNvPr id="54" name="Rectangle 53"/>
-          <p:cNvSpPr/>
-          <p:nvPr/>
-        </p:nvSpPr>
-        <p:spPr>
-          <a:xfrm>
-            <a:off x="6840000" y="12443399"/>
-            <a:ext cx="712800" cy="-2296200"/>
-          </a:xfrm>
-          <a:prstGeom prst="rect">
-            <a:avLst/>
-          </a:prstGeom>
-          <a:solidFill>
-            <a:srgbClr val="F8FAFF"/>
-          </a:solidFill>
-          <a:ln w="6350">
-            <a:solidFill>
-              <a:srgbClr val="DC2626"/>
-            </a:solidFill>
-          </a:ln>
-        </p:spPr>
-        <p:style>
-          <a:lnRef idx="1">
-            <a:schemeClr val="accent1"/>
-          </a:lnRef>
-          <a:fillRef idx="3">
-            <a:schemeClr val="accent1"/>
-          </a:fillRef>
-          <a:effectRef idx="2">
-            <a:schemeClr val="accent1"/>
-          </a:effectRef>
-          <a:fontRef idx="minor">
-            <a:schemeClr val="lt1"/>
-          </a:fontRef>
-        </p:style>
-        <p:txBody>
-          <a:bodyPr rtlCol="0" anchor="ctr"/>
-          <a:lstStyle/>
-          <a:p>
-            <a:pPr algn="ctr"/>
-          </a:p>
-        </p:txBody>
-      </p:sp>
-      <p:sp>
-        <p:nvSpPr>
-          <p:cNvPr id="55" name="TextBox 54"/>
-          <p:cNvSpPr txBox="1"/>
-          <p:nvPr/>
-        </p:nvSpPr>
-        <p:spPr>
-          <a:xfrm>
-            <a:off x="7128000" y="12659399"/>
-            <a:ext cx="136800" cy="-2728200"/>
-          </a:xfrm>
-          <a:prstGeom prst="rect">
-            <a:avLst/>
-          </a:prstGeom>
-          <a:noFill/>
-        </p:spPr>
-        <p:txBody>
-          <a:bodyPr wrap="square">
-            <a:spAutoFit/>
-          </a:bodyPr>
-          <a:lstStyle/>
-          <a:p>
-            <a:pPr algn="l"/>
-            <a:r>
-              <a:rPr sz="900" b="0" i="0">
-                <a:solidFill>
-                  <a:srgbClr val="0F172A"/>
-                </a:solidFill>
-              </a:rPr>
-              <a:t>✗ Halts June–Oct
-✗ Cloud blindspot 70–80%</a:t>
-            </a:r>
-          </a:p>
-        </p:txBody>
-      </p:sp>
-      <p:sp>
-        <p:nvSpPr>
-          <p:cNvPr id="56" name="Rectangle 55"/>
-          <p:cNvSpPr/>
-          <p:nvPr/>
-        </p:nvSpPr>
-        <p:spPr>
-          <a:xfrm>
-            <a:off x="7552800" y="12443399"/>
-            <a:ext cx="712800" cy="-2296200"/>
-          </a:xfrm>
-          <a:prstGeom prst="rect">
-            <a:avLst/>
-          </a:prstGeom>
-          <a:solidFill>
-            <a:srgbClr val="F8FAFF"/>
-          </a:solidFill>
-          <a:ln w="6350">
-            <a:solidFill>
-              <a:srgbClr val="D97706"/>
-            </a:solidFill>
-          </a:ln>
-        </p:spPr>
-        <p:style>
-          <a:lnRef idx="1">
-            <a:schemeClr val="accent1"/>
-          </a:lnRef>
-          <a:fillRef idx="3">
-            <a:schemeClr val="accent1"/>
-          </a:fillRef>
-          <a:effectRef idx="2">
-            <a:schemeClr val="accent1"/>
-          </a:effectRef>
-          <a:fontRef idx="minor">
-            <a:schemeClr val="lt1"/>
-          </a:fontRef>
-        </p:style>
-        <p:txBody>
-          <a:bodyPr rtlCol="0" anchor="ctr"/>
-          <a:lstStyle/>
-          <a:p>
-            <a:pPr algn="ctr"/>
-          </a:p>
-        </p:txBody>
-      </p:sp>
-      <p:sp>
-        <p:nvSpPr>
-          <p:cNvPr id="57" name="TextBox 56"/>
-          <p:cNvSpPr txBox="1"/>
-          <p:nvPr/>
-        </p:nvSpPr>
-        <p:spPr>
-          <a:xfrm>
-            <a:off x="7840800" y="12659399"/>
-            <a:ext cx="136800" cy="-2728200"/>
-          </a:xfrm>
-          <a:prstGeom prst="rect">
-            <a:avLst/>
-          </a:prstGeom>
-          <a:noFill/>
-        </p:spPr>
-        <p:txBody>
-          <a:bodyPr wrap="square">
-            <a:spAutoFit/>
-          </a:bodyPr>
-          <a:lstStyle/>
-          <a:p>
-            <a:pPr algn="l"/>
-            <a:r>
-              <a:rPr sz="900" b="0" i="0">
-                <a:solidFill>
-                  <a:srgbClr val="0F172A"/>
-                </a:solidFill>
-              </a:rPr>
-              <a:t>✗ Halts Kharif season
-✗ No SAR fallback</a:t>
-            </a:r>
-          </a:p>
-        </p:txBody>
-      </p:sp>
-      <p:sp>
-        <p:nvSpPr>
-          <p:cNvPr id="58" name="Rectangle 57"/>
-          <p:cNvSpPr/>
-          <p:nvPr/>
-        </p:nvSpPr>
-        <p:spPr>
-          <a:xfrm>
-            <a:off x="8265600" y="12443399"/>
-            <a:ext cx="712800" cy="-2296200"/>
-          </a:xfrm>
-          <a:prstGeom prst="rect">
-            <a:avLst/>
-          </a:prstGeom>
-          <a:solidFill>
-            <a:srgbClr val="F0FDF4"/>
-          </a:solidFill>
-          <a:ln w="6350">
-            <a:solidFill>
-              <a:srgbClr val="16A34A"/>
-            </a:solidFill>
-          </a:ln>
-        </p:spPr>
-        <p:style>
-          <a:lnRef idx="1">
-            <a:schemeClr val="accent1"/>
-          </a:lnRef>
-          <a:fillRef idx="3">
-            <a:schemeClr val="accent1"/>
-          </a:fillRef>
-          <a:effectRef idx="2">
-            <a:schemeClr val="accent1"/>
-          </a:effectRef>
-          <a:fontRef idx="minor">
-            <a:schemeClr val="lt1"/>
-          </a:fontRef>
-        </p:style>
-        <p:txBody>
-          <a:bodyPr rtlCol="0" anchor="ctr"/>
-          <a:lstStyle/>
-          <a:p>
-            <a:pPr algn="ctr"/>
-          </a:p>
-        </p:txBody>
-      </p:sp>
-      <p:sp>
-        <p:nvSpPr>
-          <p:cNvPr id="59" name="TextBox 58"/>
-          <p:cNvSpPr txBox="1"/>
-          <p:nvPr/>
-        </p:nvSpPr>
-        <p:spPr>
-          <a:xfrm>
-            <a:off x="8553600" y="12659399"/>
-            <a:ext cx="136800" cy="-2728200"/>
-          </a:xfrm>
-          <a:prstGeom prst="rect">
-            <a:avLst/>
-          </a:prstGeom>
-          <a:noFill/>
-        </p:spPr>
-        <p:txBody>
-          <a:bodyPr wrap="square">
-            <a:spAutoFit/>
-          </a:bodyPr>
-          <a:lstStyle/>
-          <a:p>
-            <a:pPr algn="l"/>
-            <a:r>
-              <a:rPr sz="900" b="0" i="0">
-                <a:solidFill>
-                  <a:srgbClr val="14532D"/>
-                </a:solidFill>
-              </a:rPr>
-              <a:t>✓ 100% uptime via CloudGap-CG
-✓ SAR inpainting PSNR 34.6 dB</a:t>
-            </a:r>
-          </a:p>
-        </p:txBody>
-      </p:sp>
-      <p:sp>
-        <p:nvSpPr>
-          <p:cNvPr id="60" name="Rectangle 59"/>
-          <p:cNvSpPr/>
-          <p:nvPr/>
-        </p:nvSpPr>
-        <p:spPr>
-          <a:xfrm>
-            <a:off x="1080000" y="10147199"/>
-            <a:ext cx="5760000" cy="-2296200"/>
-          </a:xfrm>
-          <a:prstGeom prst="rect">
-            <a:avLst/>
-          </a:prstGeom>
-          <a:solidFill>
-            <a:srgbClr val="1E3A8A"/>
-          </a:solidFill>
-          <a:ln>
-            <a:noFill/>
-          </a:ln>
-        </p:spPr>
-        <p:style>
-          <a:lnRef idx="1">
-            <a:schemeClr val="accent1"/>
-          </a:lnRef>
-          <a:fillRef idx="3">
-            <a:schemeClr val="accent1"/>
-          </a:fillRef>
-          <a:effectRef idx="2">
-            <a:schemeClr val="accent1"/>
-          </a:effectRef>
-          <a:fontRef idx="minor">
-            <a:schemeClr val="lt1"/>
-          </a:fontRef>
-        </p:style>
-        <p:txBody>
-          <a:bodyPr rtlCol="0" anchor="ctr"/>
-          <a:lstStyle/>
-          <a:p>
-            <a:pPr algn="ctr"/>
-          </a:p>
-        </p:txBody>
-      </p:sp>
-      <p:sp>
-        <p:nvSpPr>
-          <p:cNvPr id="61" name="TextBox 60"/>
-          <p:cNvSpPr txBox="1"/>
-          <p:nvPr/>
-        </p:nvSpPr>
-        <p:spPr>
-          <a:xfrm>
-            <a:off x="1260000" y="10327199"/>
-            <a:ext cx="5400000" cy="-2656200"/>
-          </a:xfrm>
-          <a:prstGeom prst="rect">
-            <a:avLst/>
-          </a:prstGeom>
-          <a:noFill/>
-        </p:spPr>
-        <p:txBody>
-          <a:bodyPr wrap="square">
-            <a:spAutoFit/>
-          </a:bodyPr>
-          <a:lstStyle/>
-          <a:p>
-            <a:pPr algn="ctr"/>
-            <a:r>
-              <a:rPr sz="1000" b="1" i="0">
-                <a:solidFill>
-                  <a:srgbClr val="FFFFFF"/>
-                </a:solidFill>
-              </a:rPr>
-              <a:t>Repayment</a:t>
-            </a:r>
-          </a:p>
-        </p:txBody>
-      </p:sp>
-      <p:sp>
-        <p:nvSpPr>
-          <p:cNvPr id="62" name="Rectangle 61"/>
-          <p:cNvSpPr/>
-          <p:nvPr/>
-        </p:nvSpPr>
-        <p:spPr>
-          <a:xfrm>
-            <a:off x="6840000" y="10147199"/>
-            <a:ext cx="712800" cy="-2296200"/>
-          </a:xfrm>
-          <a:prstGeom prst="rect">
-            <a:avLst/>
-          </a:prstGeom>
-          <a:solidFill>
-            <a:srgbClr val="FFFFFF"/>
-          </a:solidFill>
-          <a:ln w="6350">
-            <a:solidFill>
-              <a:srgbClr val="DC2626"/>
-            </a:solidFill>
-          </a:ln>
-        </p:spPr>
-        <p:style>
-          <a:lnRef idx="1">
-            <a:schemeClr val="accent1"/>
-          </a:lnRef>
-          <a:fillRef idx="3">
-            <a:schemeClr val="accent1"/>
-          </a:fillRef>
-          <a:effectRef idx="2">
-            <a:schemeClr val="accent1"/>
-          </a:effectRef>
-          <a:fontRef idx="minor">
-            <a:schemeClr val="lt1"/>
-          </a:fontRef>
-        </p:style>
-        <p:txBody>
-          <a:bodyPr rtlCol="0" anchor="ctr"/>
-          <a:lstStyle/>
-          <a:p>
-            <a:pPr algn="ctr"/>
-          </a:p>
-        </p:txBody>
-      </p:sp>
-      <p:sp>
-        <p:nvSpPr>
-          <p:cNvPr id="63" name="TextBox 62"/>
-          <p:cNvSpPr txBox="1"/>
-          <p:nvPr/>
-        </p:nvSpPr>
-        <p:spPr>
-          <a:xfrm>
-            <a:off x="7128000" y="10363199"/>
-            <a:ext cx="136800" cy="-2728200"/>
-          </a:xfrm>
-          <a:prstGeom prst="rect">
-            <a:avLst/>
-          </a:prstGeom>
-          <a:noFill/>
-        </p:spPr>
-        <p:txBody>
-          <a:bodyPr wrap="square">
-            <a:spAutoFit/>
-          </a:bodyPr>
-          <a:lstStyle/>
-          <a:p>
-            <a:pPr algn="l"/>
-            <a:r>
-              <a:rPr sz="900" b="0" i="0">
-                <a:solidFill>
-                  <a:srgbClr val="0F172A"/>
-                </a:solidFill>
-              </a:rPr>
-              <a:t>✗ Flat monthly EMI
-✗ Forced default in sowing season</a:t>
-            </a:r>
-          </a:p>
-        </p:txBody>
-      </p:sp>
-      <p:sp>
-        <p:nvSpPr>
-          <p:cNvPr id="64" name="Rectangle 63"/>
-          <p:cNvSpPr/>
-          <p:nvPr/>
-        </p:nvSpPr>
-        <p:spPr>
-          <a:xfrm>
-            <a:off x="7552800" y="10147199"/>
-            <a:ext cx="712800" cy="-2296200"/>
-          </a:xfrm>
-          <a:prstGeom prst="rect">
-            <a:avLst/>
-          </a:prstGeom>
-          <a:solidFill>
-            <a:srgbClr val="FFFFFF"/>
-          </a:solidFill>
-          <a:ln w="6350">
-            <a:solidFill>
-              <a:srgbClr val="D97706"/>
-            </a:solidFill>
-          </a:ln>
-        </p:spPr>
-        <p:style>
-          <a:lnRef idx="1">
-            <a:schemeClr val="accent1"/>
-          </a:lnRef>
-          <a:fillRef idx="3">
-            <a:schemeClr val="accent1"/>
-          </a:fillRef>
-          <a:effectRef idx="2">
-            <a:schemeClr val="accent1"/>
-          </a:effectRef>
-          <a:fontRef idx="minor">
-            <a:schemeClr val="lt1"/>
-          </a:fontRef>
-        </p:style>
-        <p:txBody>
-          <a:bodyPr rtlCol="0" anchor="ctr"/>
-          <a:lstStyle/>
-          <a:p>
-            <a:pPr algn="ctr"/>
-          </a:p>
-        </p:txBody>
-      </p:sp>
-      <p:sp>
-        <p:nvSpPr>
-          <p:cNvPr id="65" name="TextBox 64"/>
-          <p:cNvSpPr txBox="1"/>
-          <p:nvPr/>
-        </p:nvSpPr>
-        <p:spPr>
-          <a:xfrm>
-            <a:off x="7840800" y="10363199"/>
-            <a:ext cx="136800" cy="-2728200"/>
-          </a:xfrm>
-          <a:prstGeom prst="rect">
-            <a:avLst/>
-          </a:prstGeom>
-          <a:noFill/>
-        </p:spPr>
-        <p:txBody>
-          <a:bodyPr wrap="square">
-            <a:spAutoFit/>
-          </a:bodyPr>
-          <a:lstStyle/>
-          <a:p>
-            <a:pPr algn="l"/>
-            <a:r>
-              <a:rPr sz="900" b="0" i="0">
-                <a:solidFill>
-                  <a:srgbClr val="0F172A"/>
-                </a:solidFill>
-              </a:rPr>
-              <a:t>✗ Flat EMI structure
-✗ ~7.2% Agri 90-day NPA</a:t>
-            </a:r>
-          </a:p>
-        </p:txBody>
-      </p:sp>
-      <p:sp>
-        <p:nvSpPr>
-          <p:cNvPr id="66" name="Rectangle 65"/>
-          <p:cNvSpPr/>
-          <p:nvPr/>
-        </p:nvSpPr>
-        <p:spPr>
-          <a:xfrm>
-            <a:off x="8265600" y="10147199"/>
-            <a:ext cx="712800" cy="-2296200"/>
-          </a:xfrm>
-          <a:prstGeom prst="rect">
-            <a:avLst/>
-          </a:prstGeom>
-          <a:solidFill>
-            <a:srgbClr val="F0FDF4"/>
-          </a:solidFill>
-          <a:ln w="6350">
-            <a:solidFill>
-              <a:srgbClr val="16A34A"/>
-            </a:solidFill>
-          </a:ln>
-        </p:spPr>
-        <p:style>
-          <a:lnRef idx="1">
-            <a:schemeClr val="accent1"/>
-          </a:lnRef>
-          <a:fillRef idx="3">
-            <a:schemeClr val="accent1"/>
-          </a:fillRef>
-          <a:effectRef idx="2">
-            <a:schemeClr val="accent1"/>
-          </a:effectRef>
-          <a:fontRef idx="minor">
-            <a:schemeClr val="lt1"/>
-          </a:fontRef>
-        </p:style>
-        <p:txBody>
-          <a:bodyPr rtlCol="0" anchor="ctr"/>
-          <a:lstStyle/>
-          <a:p>
-            <a:pPr algn="ctr"/>
-          </a:p>
-        </p:txBody>
-      </p:sp>
-      <p:sp>
-        <p:nvSpPr>
-          <p:cNvPr id="67" name="TextBox 66"/>
-          <p:cNvSpPr txBox="1"/>
-          <p:nvPr/>
-        </p:nvSpPr>
-        <p:spPr>
-          <a:xfrm>
-            <a:off x="8553600" y="10363199"/>
-            <a:ext cx="136800" cy="-2728200"/>
-          </a:xfrm>
-          <a:prstGeom prst="rect">
-            <a:avLst/>
-          </a:prstGeom>
-          <a:noFill/>
-        </p:spPr>
-        <p:txBody>
-          <a:bodyPr wrap="square">
-            <a:spAutoFit/>
-          </a:bodyPr>
-          <a:lstStyle/>
-          <a:p>
-            <a:pPr algn="l"/>
-            <a:r>
-              <a:rPr sz="900" b="0" i="0">
-                <a:solidFill>
-                  <a:srgbClr val="14532D"/>
-                </a:solidFill>
-              </a:rPr>
-              <a:t>✓ ₹1,500 lean + harvest bullet
-✓ 34.5% NPA reduction</a:t>
-            </a:r>
-          </a:p>
-        </p:txBody>
-      </p:sp>
-      <p:sp>
-        <p:nvSpPr>
-          <p:cNvPr id="68" name="Rectangle 67"/>
-          <p:cNvSpPr/>
-          <p:nvPr/>
-        </p:nvSpPr>
-        <p:spPr>
-          <a:xfrm>
-            <a:off x="1080000" y="7850999"/>
-            <a:ext cx="5760000" cy="-2296200"/>
-          </a:xfrm>
-          <a:prstGeom prst="rect">
-            <a:avLst/>
-          </a:prstGeom>
-          <a:solidFill>
-            <a:srgbClr val="1E3A8A"/>
-          </a:solidFill>
-          <a:ln>
-            <a:noFill/>
-          </a:ln>
-        </p:spPr>
-        <p:style>
-          <a:lnRef idx="1">
-            <a:schemeClr val="accent1"/>
-          </a:lnRef>
-          <a:fillRef idx="3">
-            <a:schemeClr val="accent1"/>
-          </a:fillRef>
-          <a:effectRef idx="2">
-            <a:schemeClr val="accent1"/>
-          </a:effectRef>
-          <a:fontRef idx="minor">
-            <a:schemeClr val="lt1"/>
-          </a:fontRef>
-        </p:style>
-        <p:txBody>
-          <a:bodyPr rtlCol="0" anchor="ctr"/>
-          <a:lstStyle/>
-          <a:p>
-            <a:pPr algn="ctr"/>
-          </a:p>
-        </p:txBody>
-      </p:sp>
-      <p:sp>
-        <p:nvSpPr>
-          <p:cNvPr id="69" name="TextBox 68"/>
-          <p:cNvSpPr txBox="1"/>
-          <p:nvPr/>
-        </p:nvSpPr>
-        <p:spPr>
-          <a:xfrm>
-            <a:off x="1260000" y="8030999"/>
-            <a:ext cx="5400000" cy="-2656200"/>
-          </a:xfrm>
-          <a:prstGeom prst="rect">
-            <a:avLst/>
-          </a:prstGeom>
-          <a:noFill/>
-        </p:spPr>
-        <p:txBody>
-          <a:bodyPr wrap="square">
-            <a:spAutoFit/>
-          </a:bodyPr>
-          <a:lstStyle/>
-          <a:p>
-            <a:pPr algn="ctr"/>
-            <a:r>
-              <a:rPr sz="1000" b="1" i="0">
-                <a:solidFill>
-                  <a:srgbClr val="FFFFFF"/>
-                </a:solidFill>
-              </a:rPr>
-              <a:t>Collateral Cost</a:t>
-            </a:r>
-          </a:p>
-        </p:txBody>
-      </p:sp>
-      <p:sp>
-        <p:nvSpPr>
-          <p:cNvPr id="70" name="Rectangle 69"/>
-          <p:cNvSpPr/>
-          <p:nvPr/>
-        </p:nvSpPr>
-        <p:spPr>
-          <a:xfrm>
-            <a:off x="6840000" y="7850999"/>
-            <a:ext cx="712800" cy="-2296200"/>
-          </a:xfrm>
-          <a:prstGeom prst="rect">
-            <a:avLst/>
-          </a:prstGeom>
-          <a:solidFill>
-            <a:srgbClr val="F8FAFF"/>
-          </a:solidFill>
-          <a:ln w="6350">
-            <a:solidFill>
-              <a:srgbClr val="DC2626"/>
-            </a:solidFill>
-          </a:ln>
-        </p:spPr>
-        <p:style>
-          <a:lnRef idx="1">
-            <a:schemeClr val="accent1"/>
-          </a:lnRef>
-          <a:fillRef idx="3">
-            <a:schemeClr val="accent1"/>
-          </a:fillRef>
-          <a:effectRef idx="2">
-            <a:schemeClr val="accent1"/>
-          </a:effectRef>
-          <a:fontRef idx="minor">
-            <a:schemeClr val="lt1"/>
-          </a:fontRef>
-        </p:style>
-        <p:txBody>
-          <a:bodyPr rtlCol="0" anchor="ctr"/>
-          <a:lstStyle/>
-          <a:p>
-            <a:pPr algn="ctr"/>
-          </a:p>
-        </p:txBody>
-      </p:sp>
-      <p:sp>
-        <p:nvSpPr>
-          <p:cNvPr id="71" name="TextBox 70"/>
-          <p:cNvSpPr txBox="1"/>
-          <p:nvPr/>
-        </p:nvSpPr>
-        <p:spPr>
-          <a:xfrm>
-            <a:off x="7128000" y="8066999"/>
-            <a:ext cx="136800" cy="-2728200"/>
-          </a:xfrm>
-          <a:prstGeom prst="rect">
-            <a:avLst/>
-          </a:prstGeom>
-          <a:noFill/>
-        </p:spPr>
-        <p:txBody>
-          <a:bodyPr wrap="square">
-            <a:spAutoFit/>
-          </a:bodyPr>
-          <a:lstStyle/>
-          <a:p>
-            <a:pPr algn="l"/>
-            <a:r>
-              <a:rPr sz="900" b="0" i="0">
-                <a:solidFill>
-                  <a:srgbClr val="0F172A"/>
-                </a:solidFill>
-              </a:rPr>
-              <a:t>✗ Physical inspection
-✗ ₹4,200/file, 7–10 days</a:t>
-            </a:r>
-          </a:p>
-        </p:txBody>
-      </p:sp>
-      <p:sp>
-        <p:nvSpPr>
-          <p:cNvPr id="72" name="Rectangle 71"/>
-          <p:cNvSpPr/>
-          <p:nvPr/>
-        </p:nvSpPr>
-        <p:spPr>
-          <a:xfrm>
-            <a:off x="7552800" y="7850999"/>
-            <a:ext cx="712800" cy="-2296200"/>
-          </a:xfrm>
-          <a:prstGeom prst="rect">
-            <a:avLst/>
-          </a:prstGeom>
-          <a:solidFill>
-            <a:srgbClr val="F8FAFF"/>
-          </a:solidFill>
-          <a:ln w="6350">
-            <a:solidFill>
-              <a:srgbClr val="D97706"/>
-            </a:solidFill>
-          </a:ln>
-        </p:spPr>
-        <p:style>
-          <a:lnRef idx="1">
-            <a:schemeClr val="accent1"/>
-          </a:lnRef>
-          <a:fillRef idx="3">
-            <a:schemeClr val="accent1"/>
-          </a:fillRef>
-          <a:effectRef idx="2">
-            <a:schemeClr val="accent1"/>
-          </a:effectRef>
-          <a:fontRef idx="minor">
-            <a:schemeClr val="lt1"/>
-          </a:fontRef>
-        </p:style>
-        <p:txBody>
-          <a:bodyPr rtlCol="0" anchor="ctr"/>
-          <a:lstStyle/>
-          <a:p>
-            <a:pPr algn="ctr"/>
-          </a:p>
-        </p:txBody>
-      </p:sp>
-      <p:sp>
-        <p:nvSpPr>
-          <p:cNvPr id="73" name="TextBox 72"/>
-          <p:cNvSpPr txBox="1"/>
-          <p:nvPr/>
-        </p:nvSpPr>
-        <p:spPr>
-          <a:xfrm>
-            <a:off x="7840800" y="8066999"/>
-            <a:ext cx="136800" cy="-2728200"/>
-          </a:xfrm>
-          <a:prstGeom prst="rect">
-            <a:avLst/>
-          </a:prstGeom>
-          <a:noFill/>
-        </p:spPr>
-        <p:txBody>
-          <a:bodyPr wrap="square">
-            <a:spAutoFit/>
-          </a:bodyPr>
-          <a:lstStyle/>
-          <a:p>
-            <a:pPr algn="l"/>
-            <a:r>
-              <a:rPr sz="900" b="0" i="0">
-                <a:solidFill>
-                  <a:srgbClr val="0F172A"/>
-                </a:solidFill>
-              </a:rPr>
-              <a:t>✗ Physical inspection
-✗ ₹4,200/file, vulnerable to fraud</a:t>
-            </a:r>
-          </a:p>
-        </p:txBody>
-      </p:sp>
-      <p:sp>
-        <p:nvSpPr>
-          <p:cNvPr id="74" name="Rectangle 73"/>
-          <p:cNvSpPr/>
-          <p:nvPr/>
-        </p:nvSpPr>
-        <p:spPr>
-          <a:xfrm>
-            <a:off x="8265600" y="7850999"/>
-            <a:ext cx="712800" cy="-2296200"/>
-          </a:xfrm>
-          <a:prstGeom prst="rect">
-            <a:avLst/>
-          </a:prstGeom>
-          <a:solidFill>
-            <a:srgbClr val="F0FDF4"/>
-          </a:solidFill>
-          <a:ln w="6350">
-            <a:solidFill>
-              <a:srgbClr val="16A34A"/>
-            </a:solidFill>
-          </a:ln>
-        </p:spPr>
-        <p:style>
-          <a:lnRef idx="1">
-            <a:schemeClr val="accent1"/>
-          </a:lnRef>
-          <a:fillRef idx="3">
-            <a:schemeClr val="accent1"/>
-          </a:fillRef>
-          <a:effectRef idx="2">
-            <a:schemeClr val="accent1"/>
-          </a:effectRef>
-          <a:fontRef idx="minor">
-            <a:schemeClr val="lt1"/>
-          </a:fontRef>
-        </p:style>
-        <p:txBody>
-          <a:bodyPr rtlCol="0" anchor="ctr"/>
-          <a:lstStyle/>
-          <a:p>
-            <a:pPr algn="ctr"/>
-          </a:p>
-        </p:txBody>
-      </p:sp>
-      <p:sp>
-        <p:nvSpPr>
-          <p:cNvPr id="75" name="TextBox 74"/>
-          <p:cNvSpPr txBox="1"/>
-          <p:nvPr/>
-        </p:nvSpPr>
-        <p:spPr>
-          <a:xfrm>
-            <a:off x="8553600" y="8066999"/>
-            <a:ext cx="136800" cy="-2728200"/>
-          </a:xfrm>
-          <a:prstGeom prst="rect">
-            <a:avLst/>
-          </a:prstGeom>
-          <a:noFill/>
-        </p:spPr>
-        <p:txBody>
-          <a:bodyPr wrap="square">
-            <a:spAutoFit/>
-          </a:bodyPr>
-          <a:lstStyle/>
-          <a:p>
-            <a:pPr algn="l"/>
-            <a:r>
-              <a:rPr sz="900" b="0" i="0">
-                <a:solidFill>
-                  <a:srgbClr val="14532D"/>
-                </a:solidFill>
-              </a:rPr>
-              <a:t>✓ AI H3 + satellite cross-check
-✓ ₹120/file · 97% OpEx saving</a:t>
-            </a:r>
-          </a:p>
-        </p:txBody>
-      </p:sp>
-      <p:sp>
-        <p:nvSpPr>
-          <p:cNvPr id="76" name="Rectangle 75"/>
-          <p:cNvSpPr/>
-          <p:nvPr/>
-        </p:nvSpPr>
-        <p:spPr>
-          <a:xfrm>
-            <a:off x="0" y="5806800"/>
-            <a:ext cx="10058400" cy="1728000"/>
-          </a:xfrm>
-          <a:prstGeom prst="rect">
-            <a:avLst/>
-          </a:prstGeom>
-          <a:solidFill>
-            <a:srgbClr val="1E3A8A"/>
-          </a:solidFill>
-          <a:ln>
-            <a:noFill/>
-          </a:ln>
-        </p:spPr>
-        <p:style>
-          <a:lnRef idx="1">
-            <a:schemeClr val="accent1"/>
-          </a:lnRef>
-          <a:fillRef idx="3">
-            <a:schemeClr val="accent1"/>
-          </a:fillRef>
-          <a:effectRef idx="2">
-            <a:schemeClr val="accent1"/>
-          </a:effectRef>
-          <a:fontRef idx="minor">
-            <a:schemeClr val="lt1"/>
-          </a:fontRef>
-        </p:style>
-        <p:txBody>
-          <a:bodyPr rtlCol="0" anchor="ctr"/>
-          <a:lstStyle/>
-          <a:p>
-            <a:pPr algn="ctr"/>
-          </a:p>
-        </p:txBody>
-      </p:sp>
-      <p:sp>
-        <p:nvSpPr>
-          <p:cNvPr id="77" name="TextBox 76"/>
-          <p:cNvSpPr txBox="1"/>
-          <p:nvPr/>
-        </p:nvSpPr>
-        <p:spPr>
-          <a:xfrm>
-            <a:off x="1080000" y="6022800"/>
-            <a:ext cx="7898400" cy="1368000"/>
-          </a:xfrm>
-          <a:prstGeom prst="rect">
-            <a:avLst/>
-          </a:prstGeom>
-          <a:noFill/>
-        </p:spPr>
-        <p:txBody>
-          <a:bodyPr wrap="square">
-            <a:spAutoFit/>
-          </a:bodyPr>
-          <a:lstStyle/>
-          <a:p>
-            <a:pPr algn="ctr"/>
-            <a:r>
-              <a:rPr sz="900" b="0" i="0">
-                <a:solidFill>
-                  <a:srgbClr val="BFDBFE"/>
-                </a:solidFill>
-              </a:rPr>
-              <a:t>GeoKisan eliminates the Kharif blind window that forces every incumbent NBFC to pause underwriting — turning monsoon season from a liability into a portfolio growth window.  |  GNPA Impact: −125 bps vs industry benchmark.</a:t>
+              <a:t>GeoKisan eliminates the Kharif cloud blindspot forcing every incumbent NBFC to pause underwriting — turning monsoon season from a liability into a portfolio growth window | GNPA Impact: −125 bps vs industry benchmark</a:t>
             </a:r>
           </a:p>
         </p:txBody>
@@ -6213,7 +5708,7 @@
 </file>
 
 <file path=ppt/slides/slide7.xml><?xml version="1.0" encoding="utf-8"?>
-<p:sld xmlns:a="http://schemas.openxmlformats.org/drawingml/2006/main" xmlns:p="http://schemas.openxmlformats.org/presentationml/2006/main" xmlns:r="http://schemas.openxmlformats.org/officeDocument/2006/relationships">
+<p:sld xmlns:a="http://schemas.openxmlformats.org/drawingml/2006/main" xmlns:r="http://schemas.openxmlformats.org/officeDocument/2006/relationships" xmlns:p="http://schemas.openxmlformats.org/presentationml/2006/main">
   <p:cSld>
     <p:spTree>
       <p:nvGrpSpPr>
@@ -6221,7 +5716,14 @@
         <p:cNvGrpSpPr/>
         <p:nvPr/>
       </p:nvGrpSpPr>
-      <p:grpSpPr/>
+      <p:grpSpPr>
+        <a:xfrm>
+          <a:off x="0" y="0"/>
+          <a:ext cx="0" cy="0"/>
+          <a:chOff x="0" y="0"/>
+          <a:chExt cx="0" cy="0"/>
+        </a:xfrm>
+      </p:grpSpPr>
       <p:sp>
         <p:nvSpPr>
           <p:cNvPr id="2" name="Title 1"/>
@@ -6236,7 +5738,9 @@
         <p:txBody>
           <a:bodyPr/>
           <a:lstStyle/>
-          <a:p/>
+          <a:p>
+            <a:endParaRPr/>
+          </a:p>
         </p:txBody>
       </p:sp>
       <p:sp>
@@ -6253,7 +5757,9 @@
         <p:txBody>
           <a:bodyPr/>
           <a:lstStyle/>
-          <a:p/>
+          <a:p>
+            <a:endParaRPr/>
+          </a:p>
         </p:txBody>
       </p:sp>
       <p:sp>
@@ -6298,6 +5804,7 @@
           <a:lstStyle/>
           <a:p>
             <a:pPr algn="ctr"/>
+            <a:endParaRPr/>
           </a:p>
         </p:txBody>
       </p:sp>
@@ -6421,7 +5928,7 @@
           </a:fontRef>
         </p:style>
         <p:txBody>
-          <a:bodyPr rtlCol="0" anchor="ctr" wrap="square"/>
+          <a:bodyPr wrap="square" rtlCol="0" anchor="ctr"/>
           <a:lstStyle/>
           <a:p>
             <a:pPr algn="ctr">
@@ -6502,7 +6009,7 @@
           </a:fontRef>
         </p:style>
         <p:txBody>
-          <a:bodyPr rtlCol="0" anchor="ctr" wrap="square"/>
+          <a:bodyPr wrap="square" rtlCol="0" anchor="ctr"/>
           <a:lstStyle/>
           <a:p>
             <a:pPr algn="ctr">
@@ -6583,7 +6090,7 @@
           </a:fontRef>
         </p:style>
         <p:txBody>
-          <a:bodyPr rtlCol="0" anchor="ctr" wrap="square"/>
+          <a:bodyPr wrap="square" rtlCol="0" anchor="ctr"/>
           <a:lstStyle/>
           <a:p>
             <a:pPr algn="ctr">
@@ -6664,7 +6171,7 @@
           </a:fontRef>
         </p:style>
         <p:txBody>
-          <a:bodyPr rtlCol="0" anchor="ctr" wrap="square"/>
+          <a:bodyPr wrap="square" rtlCol="0" anchor="ctr"/>
           <a:lstStyle/>
           <a:p>
             <a:pPr algn="ctr">
@@ -6716,7 +6223,7 @@
 </file>
 
 <file path=ppt/slides/slide8.xml><?xml version="1.0" encoding="utf-8"?>
-<p:sld xmlns:a="http://schemas.openxmlformats.org/drawingml/2006/main" xmlns:p="http://schemas.openxmlformats.org/presentationml/2006/main" xmlns:r="http://schemas.openxmlformats.org/officeDocument/2006/relationships">
+<p:sld xmlns:a="http://schemas.openxmlformats.org/drawingml/2006/main" xmlns:r="http://schemas.openxmlformats.org/officeDocument/2006/relationships" xmlns:p="http://schemas.openxmlformats.org/presentationml/2006/main">
   <p:cSld>
     <p:spTree>
       <p:nvGrpSpPr>
@@ -6724,7 +6231,14 @@
         <p:cNvGrpSpPr/>
         <p:nvPr/>
       </p:nvGrpSpPr>
-      <p:grpSpPr/>
+      <p:grpSpPr>
+        <a:xfrm>
+          <a:off x="0" y="0"/>
+          <a:ext cx="0" cy="0"/>
+          <a:chOff x="0" y="0"/>
+          <a:chExt cx="0" cy="0"/>
+        </a:xfrm>
+      </p:grpSpPr>
       <p:sp>
         <p:nvSpPr>
           <p:cNvPr id="2" name="Title 1"/>
@@ -6739,7 +6253,9 @@
         <p:txBody>
           <a:bodyPr/>
           <a:lstStyle/>
-          <a:p/>
+          <a:p>
+            <a:endParaRPr/>
+          </a:p>
         </p:txBody>
       </p:sp>
       <p:sp>
@@ -6756,7 +6272,9 @@
         <p:txBody>
           <a:bodyPr/>
           <a:lstStyle/>
-          <a:p/>
+          <a:p>
+            <a:endParaRPr/>
+          </a:p>
         </p:txBody>
       </p:sp>
       <p:sp>
@@ -6801,6 +6319,7 @@
           <a:lstStyle/>
           <a:p>
             <a:pPr algn="ctr"/>
+            <a:endParaRPr/>
           </a:p>
         </p:txBody>
       </p:sp>
@@ -7019,7 +6538,7 @@
           </a:fontRef>
         </p:style>
         <p:txBody>
-          <a:bodyPr rtlCol="0" anchor="ctr" wrap="square"/>
+          <a:bodyPr wrap="square" rtlCol="0" anchor="ctr"/>
           <a:lstStyle/>
           <a:p>
             <a:pPr algn="ctr">
